--- a/entregables/04-Exposicion-Organizacion-Git.pptx
+++ b/entregables/04-Exposicion-Organizacion-Git.pptx
@@ -2,17 +2,17 @@
 <file path=ppt/presentation.xml><?xml version="1.0" encoding="utf-8"?>
 <p:presentation xmlns:p="http://schemas.openxmlformats.org/presentationml/2006/main">
   <p:sldMasterIdLst>
-    <p:sldMasterId xmlns:r="http://schemas.openxmlformats.org/officeDocument/2006/relationships" id="2147483648" r:id="R6e72fc6d63404591"/>
+    <p:sldMasterId xmlns:r="http://schemas.openxmlformats.org/officeDocument/2006/relationships" id="2147483648" r:id="R6fa76e75945a4c9e"/>
   </p:sldMasterIdLst>
   <p:notesMasterIdLst>
-    <p:notesMasterId xmlns:r="http://schemas.openxmlformats.org/officeDocument/2006/relationships" r:id="Rb5a0a48c13994704"/>
+    <p:notesMasterId xmlns:r="http://schemas.openxmlformats.org/officeDocument/2006/relationships" r:id="R173ddc3426d74769"/>
   </p:notesMasterIdLst>
   <p:sldIdLst>
-    <p:sldId xmlns:r="http://schemas.openxmlformats.org/officeDocument/2006/relationships" id="256" r:id="R165ce3f4ea0d4194"/>
-    <p:sldId xmlns:r="http://schemas.openxmlformats.org/officeDocument/2006/relationships" id="257" r:id="Reaa1d12fa8034a3d"/>
-    <p:sldId xmlns:r="http://schemas.openxmlformats.org/officeDocument/2006/relationships" id="258" r:id="R29d60e2adcc5443a"/>
-    <p:sldId xmlns:r="http://schemas.openxmlformats.org/officeDocument/2006/relationships" id="259" r:id="R1a7bf3b388f1445b"/>
-    <p:sldId xmlns:r="http://schemas.openxmlformats.org/officeDocument/2006/relationships" id="260" r:id="R6206e881092f4b84"/>
+    <p:sldId xmlns:r="http://schemas.openxmlformats.org/officeDocument/2006/relationships" id="256" r:id="Rb706328c3884432f"/>
+    <p:sldId xmlns:r="http://schemas.openxmlformats.org/officeDocument/2006/relationships" id="257" r:id="Racd5acf5894948dd"/>
+    <p:sldId xmlns:r="http://schemas.openxmlformats.org/officeDocument/2006/relationships" id="258" r:id="Re47d458352b34d7e"/>
+    <p:sldId xmlns:r="http://schemas.openxmlformats.org/officeDocument/2006/relationships" id="259" r:id="Rb4fe19c4297f4fdf"/>
+    <p:sldId xmlns:r="http://schemas.openxmlformats.org/officeDocument/2006/relationships" id="260" r:id="Rdfc0f6162e9246e7"/>
   </p:sldIdLst>
   <p:sldSz cx="12192000" cy="6858000"/>
   <p:notesSz cx="6858000" cy="9144000"/>
@@ -2519,12 +2519,12 @@
   </p:cSld>
   <p:clrMap bg1="lt1" tx1="dk1" bg2="lt2" tx2="dk2" accent1="accent1" accent2="accent2" accent3="accent3" accent4="accent4" accent5="accent5" accent6="accent6" hlink="hlink" folHlink="folHlink"/>
   <p:sldLayoutIdLst>
-    <p:sldLayoutId xmlns:r="http://schemas.openxmlformats.org/officeDocument/2006/relationships" id="2147483649" r:id="R747a1f947ce0410f"/>
-    <p:sldLayoutId xmlns:r="http://schemas.openxmlformats.org/officeDocument/2006/relationships" id="2147483650" r:id="Rc6fa69cb987f4b08"/>
-    <p:sldLayoutId xmlns:r="http://schemas.openxmlformats.org/officeDocument/2006/relationships" id="2147483651" r:id="Rb102390bc9534b3d"/>
-    <p:sldLayoutId xmlns:r="http://schemas.openxmlformats.org/officeDocument/2006/relationships" id="2147483652" r:id="R9e2ca5766662493e"/>
-    <p:sldLayoutId xmlns:r="http://schemas.openxmlformats.org/officeDocument/2006/relationships" id="2147483653" r:id="R7fb04843a37047f0"/>
-    <p:sldLayoutId xmlns:r="http://schemas.openxmlformats.org/officeDocument/2006/relationships" id="2147483654" r:id="R68e85bbeba4d4402"/>
+    <p:sldLayoutId xmlns:r="http://schemas.openxmlformats.org/officeDocument/2006/relationships" id="2147483649" r:id="Rf6b326c0d07e4933"/>
+    <p:sldLayoutId xmlns:r="http://schemas.openxmlformats.org/officeDocument/2006/relationships" id="2147483650" r:id="Rc38c23105dc34593"/>
+    <p:sldLayoutId xmlns:r="http://schemas.openxmlformats.org/officeDocument/2006/relationships" id="2147483651" r:id="Rc5935b1877b646ba"/>
+    <p:sldLayoutId xmlns:r="http://schemas.openxmlformats.org/officeDocument/2006/relationships" id="2147483652" r:id="R1e409eca82ce464e"/>
+    <p:sldLayoutId xmlns:r="http://schemas.openxmlformats.org/officeDocument/2006/relationships" id="2147483653" r:id="R13cca8fddeaf4434"/>
+    <p:sldLayoutId xmlns:r="http://schemas.openxmlformats.org/officeDocument/2006/relationships" id="2147483654" r:id="Rb1c20ab800b54df2"/>
   </p:sldLayoutIdLst>
   <p:txStyles>
     <p:titleStyle>
@@ -6326,7 +6326,7 @@
                   <a:srgbClr val="1D6A96"/>
                 </a:solidFill>
               </a:rPr>
-              <a:t>Pull request → revisión de otro integrante → integración en main</a:t>
+              <a:t>Issues SQA-01–10 · tablero público → Pull Request → revisión → main</a:t>
             </a:r>
           </a:p>
         </p:txBody>

--- a/entregables/04-Exposicion-Organizacion-Git.pptx
+++ b/entregables/04-Exposicion-Organizacion-Git.pptx
@@ -2,17 +2,17 @@
 <file path=ppt/presentation.xml><?xml version="1.0" encoding="utf-8"?>
 <p:presentation xmlns:p="http://schemas.openxmlformats.org/presentationml/2006/main">
   <p:sldMasterIdLst>
-    <p:sldMasterId xmlns:r="http://schemas.openxmlformats.org/officeDocument/2006/relationships" id="2147483648" r:id="R6fa76e75945a4c9e"/>
+    <p:sldMasterId xmlns:r="http://schemas.openxmlformats.org/officeDocument/2006/relationships" id="2147483648" r:id="Rb6499e322cb24b54"/>
   </p:sldMasterIdLst>
   <p:notesMasterIdLst>
-    <p:notesMasterId xmlns:r="http://schemas.openxmlformats.org/officeDocument/2006/relationships" r:id="R173ddc3426d74769"/>
+    <p:notesMasterId xmlns:r="http://schemas.openxmlformats.org/officeDocument/2006/relationships" r:id="Re514ab48f2e847b6"/>
   </p:notesMasterIdLst>
   <p:sldIdLst>
-    <p:sldId xmlns:r="http://schemas.openxmlformats.org/officeDocument/2006/relationships" id="256" r:id="Rb706328c3884432f"/>
-    <p:sldId xmlns:r="http://schemas.openxmlformats.org/officeDocument/2006/relationships" id="257" r:id="Racd5acf5894948dd"/>
-    <p:sldId xmlns:r="http://schemas.openxmlformats.org/officeDocument/2006/relationships" id="258" r:id="Re47d458352b34d7e"/>
-    <p:sldId xmlns:r="http://schemas.openxmlformats.org/officeDocument/2006/relationships" id="259" r:id="Rb4fe19c4297f4fdf"/>
-    <p:sldId xmlns:r="http://schemas.openxmlformats.org/officeDocument/2006/relationships" id="260" r:id="Rdfc0f6162e9246e7"/>
+    <p:sldId xmlns:r="http://schemas.openxmlformats.org/officeDocument/2006/relationships" id="256" r:id="R2f2822a53e1641f7"/>
+    <p:sldId xmlns:r="http://schemas.openxmlformats.org/officeDocument/2006/relationships" id="257" r:id="R0588ab1294ce4512"/>
+    <p:sldId xmlns:r="http://schemas.openxmlformats.org/officeDocument/2006/relationships" id="258" r:id="R6779cbd13a0c40c7"/>
+    <p:sldId xmlns:r="http://schemas.openxmlformats.org/officeDocument/2006/relationships" id="259" r:id="R6cdf85c533fc410c"/>
+    <p:sldId xmlns:r="http://schemas.openxmlformats.org/officeDocument/2006/relationships" id="260" r:id="R8ddf9a6acda349d4"/>
   </p:sldIdLst>
   <p:sldSz cx="12192000" cy="6858000"/>
   <p:notesSz cx="6858000" cy="9144000"/>
@@ -2519,12 +2519,12 @@
   </p:cSld>
   <p:clrMap bg1="lt1" tx1="dk1" bg2="lt2" tx2="dk2" accent1="accent1" accent2="accent2" accent3="accent3" accent4="accent4" accent5="accent5" accent6="accent6" hlink="hlink" folHlink="folHlink"/>
   <p:sldLayoutIdLst>
-    <p:sldLayoutId xmlns:r="http://schemas.openxmlformats.org/officeDocument/2006/relationships" id="2147483649" r:id="Rf6b326c0d07e4933"/>
-    <p:sldLayoutId xmlns:r="http://schemas.openxmlformats.org/officeDocument/2006/relationships" id="2147483650" r:id="Rc38c23105dc34593"/>
-    <p:sldLayoutId xmlns:r="http://schemas.openxmlformats.org/officeDocument/2006/relationships" id="2147483651" r:id="Rc5935b1877b646ba"/>
-    <p:sldLayoutId xmlns:r="http://schemas.openxmlformats.org/officeDocument/2006/relationships" id="2147483652" r:id="R1e409eca82ce464e"/>
-    <p:sldLayoutId xmlns:r="http://schemas.openxmlformats.org/officeDocument/2006/relationships" id="2147483653" r:id="R13cca8fddeaf4434"/>
-    <p:sldLayoutId xmlns:r="http://schemas.openxmlformats.org/officeDocument/2006/relationships" id="2147483654" r:id="Rb1c20ab800b54df2"/>
+    <p:sldLayoutId xmlns:r="http://schemas.openxmlformats.org/officeDocument/2006/relationships" id="2147483649" r:id="R76dfcb92fc774555"/>
+    <p:sldLayoutId xmlns:r="http://schemas.openxmlformats.org/officeDocument/2006/relationships" id="2147483650" r:id="R0d9f1d370ca44b96"/>
+    <p:sldLayoutId xmlns:r="http://schemas.openxmlformats.org/officeDocument/2006/relationships" id="2147483651" r:id="R533373000c1b4508"/>
+    <p:sldLayoutId xmlns:r="http://schemas.openxmlformats.org/officeDocument/2006/relationships" id="2147483652" r:id="R232328a8d7ee4839"/>
+    <p:sldLayoutId xmlns:r="http://schemas.openxmlformats.org/officeDocument/2006/relationships" id="2147483653" r:id="R6f84606337e1418f"/>
+    <p:sldLayoutId xmlns:r="http://schemas.openxmlformats.org/officeDocument/2006/relationships" id="2147483654" r:id="Rb5dd7c9d189a4cbd"/>
   </p:sldLayoutIdLst>
   <p:txStyles>
     <p:titleStyle>
@@ -3979,25 +3979,7 @@
                   <a:srgbClr val="12304A"/>
                 </a:solidFill>
               </a:rPr>
-              <a:t>Cronograma: Docker/MySQL 12/10 (realizado)</a:t>
-            </a:r>
-          </a:p>
-          <a:p xmlns:a="http://schemas.openxmlformats.org/drawingml/2006/main">
-            <a:pPr>
-              <a:buNone/>
-              <a:defRPr sz="1800" b="1">
-                <a:solidFill>
-                  <a:srgbClr val="12304A"/>
-                </a:solidFill>
-              </a:defRPr>
-            </a:pPr>
-            <a:r>
-              <a:rPr sz="1800" b="1">
-                <a:solidFill>
-                  <a:srgbClr val="12304A"/>
-                </a:solidFill>
-              </a:rPr>
-              <a:t>Planificación 14/10 · seguimientos 15–18/10 (planificados) · exposición 19/10.</a:t>
+              <a:t>Cronograma: entorno Docker/MySQL 12/10 · organización de tareas 14/10 · seguimiento y revisión 15–18/10 · presentación 19/10.</a:t>
             </a:r>
           </a:p>
         </p:txBody>
@@ -4203,7 +4185,7 @@
                   <a:srgbClr val="526777"/>
                 </a:solidFill>
               </a:rPr>
-              <a:t>22 casos para las páginas funcionales; el alta de otro administrador queda como brecha.</a:t>
+              <a:t>22 casos automatizados para los flujos disponibles; CP-23 documenta la brecha de alta de administrador.</a:t>
             </a:r>
           </a:p>
         </p:txBody>
@@ -4734,7 +4716,7 @@
                   <a:srgbClr val="172B3A"/>
                 </a:solidFill>
               </a:rPr>
-              <a:t>Registrar otro administrador no está disponible en esta versión; se documenta como pendiente.</a:t>
+              <a:t>Esta versión del portal no ofrece alta de administradores. CP-23 identifica y describe esta brecha funcional.</a:t>
             </a:r>
           </a:p>
         </p:txBody>
@@ -5117,7 +5099,7 @@
                   <a:srgbClr val="12304A"/>
                 </a:solidFill>
               </a:rPr>
-              <a:t>Levantar app y MySQL</a:t>
+              <a:t>Entorno Docker y MySQL</a:t>
             </a:r>
           </a:p>
         </p:txBody>
@@ -5235,7 +5217,7 @@
                   <a:srgbClr val="12304A"/>
                 </a:solidFill>
               </a:rPr>
-              <a:t>Abrir Cypress en VS Code</a:t>
+              <a:t>Suite E2E en Cypress</a:t>
             </a:r>
           </a:p>
         </p:txBody>
@@ -5353,7 +5335,7 @@
                   <a:srgbClr val="12304A"/>
                 </a:solidFill>
               </a:rPr>
-              <a:t>Revisar resultado y capturas</a:t>
+              <a:t>Resultado y trazabilidad</a:t>
             </a:r>
           </a:p>
         </p:txBody>
@@ -5412,7 +5394,25 @@
                   <a:srgbClr val="12304A"/>
                 </a:solidFill>
               </a:rPr>
-              <a:t>Cypress 16.1.1 · 22 passing · 0 failing · 0 pending (14/10/2026).</a:t>
+              <a:t>Ejecución local registrada · 14/10/2026</a:t>
+            </a:r>
+          </a:p>
+          <a:p xmlns:a="http://schemas.openxmlformats.org/drawingml/2006/main">
+            <a:pPr>
+              <a:buNone/>
+              <a:defRPr sz="1875" b="1">
+                <a:solidFill>
+                  <a:srgbClr val="12304A"/>
+                </a:solidFill>
+              </a:defRPr>
+            </a:pPr>
+            <a:r>
+              <a:rPr sz="1875" b="1">
+                <a:solidFill>
+                  <a:srgbClr val="12304A"/>
+                </a:solidFill>
+              </a:rPr>
+              <a:t>22 passing · 0 failing · 0 pending</a:t>
             </a:r>
           </a:p>
         </p:txBody>
@@ -5618,7 +5618,7 @@
                   <a:srgbClr val="526777"/>
                 </a:solidFill>
               </a:rPr>
-              <a:t>Planificación 14/10 · seguimientos 15–18/10 · ensayo 18/10.</a:t>
+              <a:t>Cronograma del 14 al 19/10: planificación, seguimiento y revisión; presentación el 19/10.</a:t>
             </a:r>
           </a:p>
         </p:txBody>

--- a/entregables/04-Exposicion-Organizacion-Git.pptx
+++ b/entregables/04-Exposicion-Organizacion-Git.pptx
@@ -1,30 +1,125 @@
 
 <file path=ppt/presentation.xml><?xml version="1.0" encoding="utf-8"?>
-<p:presentation xmlns:p="http://schemas.openxmlformats.org/presentationml/2006/main">
+<p:presentation xmlns:a="http://schemas.openxmlformats.org/drawingml/2006/main" xmlns:r="http://schemas.openxmlformats.org/officeDocument/2006/relationships" xmlns:p="http://schemas.openxmlformats.org/presentationml/2006/main">
   <p:sldMasterIdLst>
-    <p:sldMasterId xmlns:r="http://schemas.openxmlformats.org/officeDocument/2006/relationships" id="2147483648" r:id="Rb6499e322cb24b54"/>
+    <p:sldMasterId id="2147483648" r:id="rId1"/>
   </p:sldMasterIdLst>
   <p:notesMasterIdLst>
-    <p:notesMasterId xmlns:r="http://schemas.openxmlformats.org/officeDocument/2006/relationships" r:id="Re514ab48f2e847b6"/>
+    <p:notesMasterId r:id="rId7"/>
   </p:notesMasterIdLst>
   <p:sldIdLst>
-    <p:sldId xmlns:r="http://schemas.openxmlformats.org/officeDocument/2006/relationships" id="256" r:id="R2f2822a53e1641f7"/>
-    <p:sldId xmlns:r="http://schemas.openxmlformats.org/officeDocument/2006/relationships" id="257" r:id="R0588ab1294ce4512"/>
-    <p:sldId xmlns:r="http://schemas.openxmlformats.org/officeDocument/2006/relationships" id="258" r:id="R6779cbd13a0c40c7"/>
-    <p:sldId xmlns:r="http://schemas.openxmlformats.org/officeDocument/2006/relationships" id="259" r:id="R6cdf85c533fc410c"/>
-    <p:sldId xmlns:r="http://schemas.openxmlformats.org/officeDocument/2006/relationships" id="260" r:id="R8ddf9a6acda349d4"/>
+    <p:sldId id="256" r:id="rId2"/>
+    <p:sldId id="257" r:id="rId3"/>
+    <p:sldId id="258" r:id="rId4"/>
+    <p:sldId id="259" r:id="rId5"/>
+    <p:sldId id="260" r:id="rId6"/>
   </p:sldIdLst>
   <p:sldSz cx="12192000" cy="6858000"/>
   <p:notesSz cx="6858000" cy="9144000"/>
+  <p:defaultTextStyle>
+    <a:defPPr>
+      <a:defRPr lang="es-BO"/>
+    </a:defPPr>
+    <a:lvl1pPr marL="0" algn="l" defTabSz="914400" rtl="0" eaLnBrk="1" latinLnBrk="0" hangingPunct="1">
+      <a:defRPr sz="1800" kern="1200">
+        <a:solidFill>
+          <a:schemeClr val="tx1"/>
+        </a:solidFill>
+        <a:latin typeface="+mn-lt"/>
+        <a:ea typeface="+mn-ea"/>
+        <a:cs typeface="+mn-cs"/>
+      </a:defRPr>
+    </a:lvl1pPr>
+    <a:lvl2pPr marL="457200" algn="l" defTabSz="914400" rtl="0" eaLnBrk="1" latinLnBrk="0" hangingPunct="1">
+      <a:defRPr sz="1800" kern="1200">
+        <a:solidFill>
+          <a:schemeClr val="tx1"/>
+        </a:solidFill>
+        <a:latin typeface="+mn-lt"/>
+        <a:ea typeface="+mn-ea"/>
+        <a:cs typeface="+mn-cs"/>
+      </a:defRPr>
+    </a:lvl2pPr>
+    <a:lvl3pPr marL="914400" algn="l" defTabSz="914400" rtl="0" eaLnBrk="1" latinLnBrk="0" hangingPunct="1">
+      <a:defRPr sz="1800" kern="1200">
+        <a:solidFill>
+          <a:schemeClr val="tx1"/>
+        </a:solidFill>
+        <a:latin typeface="+mn-lt"/>
+        <a:ea typeface="+mn-ea"/>
+        <a:cs typeface="+mn-cs"/>
+      </a:defRPr>
+    </a:lvl3pPr>
+    <a:lvl4pPr marL="1371600" algn="l" defTabSz="914400" rtl="0" eaLnBrk="1" latinLnBrk="0" hangingPunct="1">
+      <a:defRPr sz="1800" kern="1200">
+        <a:solidFill>
+          <a:schemeClr val="tx1"/>
+        </a:solidFill>
+        <a:latin typeface="+mn-lt"/>
+        <a:ea typeface="+mn-ea"/>
+        <a:cs typeface="+mn-cs"/>
+      </a:defRPr>
+    </a:lvl4pPr>
+    <a:lvl5pPr marL="1828800" algn="l" defTabSz="914400" rtl="0" eaLnBrk="1" latinLnBrk="0" hangingPunct="1">
+      <a:defRPr sz="1800" kern="1200">
+        <a:solidFill>
+          <a:schemeClr val="tx1"/>
+        </a:solidFill>
+        <a:latin typeface="+mn-lt"/>
+        <a:ea typeface="+mn-ea"/>
+        <a:cs typeface="+mn-cs"/>
+      </a:defRPr>
+    </a:lvl5pPr>
+    <a:lvl6pPr marL="2286000" algn="l" defTabSz="914400" rtl="0" eaLnBrk="1" latinLnBrk="0" hangingPunct="1">
+      <a:defRPr sz="1800" kern="1200">
+        <a:solidFill>
+          <a:schemeClr val="tx1"/>
+        </a:solidFill>
+        <a:latin typeface="+mn-lt"/>
+        <a:ea typeface="+mn-ea"/>
+        <a:cs typeface="+mn-cs"/>
+      </a:defRPr>
+    </a:lvl6pPr>
+    <a:lvl7pPr marL="2743200" algn="l" defTabSz="914400" rtl="0" eaLnBrk="1" latinLnBrk="0" hangingPunct="1">
+      <a:defRPr sz="1800" kern="1200">
+        <a:solidFill>
+          <a:schemeClr val="tx1"/>
+        </a:solidFill>
+        <a:latin typeface="+mn-lt"/>
+        <a:ea typeface="+mn-ea"/>
+        <a:cs typeface="+mn-cs"/>
+      </a:defRPr>
+    </a:lvl7pPr>
+    <a:lvl8pPr marL="3200400" algn="l" defTabSz="914400" rtl="0" eaLnBrk="1" latinLnBrk="0" hangingPunct="1">
+      <a:defRPr sz="1800" kern="1200">
+        <a:solidFill>
+          <a:schemeClr val="tx1"/>
+        </a:solidFill>
+        <a:latin typeface="+mn-lt"/>
+        <a:ea typeface="+mn-ea"/>
+        <a:cs typeface="+mn-cs"/>
+      </a:defRPr>
+    </a:lvl8pPr>
+    <a:lvl9pPr marL="3657600" algn="l" defTabSz="914400" rtl="0" eaLnBrk="1" latinLnBrk="0" hangingPunct="1">
+      <a:defRPr sz="1800" kern="1200">
+        <a:solidFill>
+          <a:schemeClr val="tx1"/>
+        </a:solidFill>
+        <a:latin typeface="+mn-lt"/>
+        <a:ea typeface="+mn-ea"/>
+        <a:cs typeface="+mn-cs"/>
+      </a:defRPr>
+    </a:lvl9pPr>
+  </p:defaultTextStyle>
 </p:presentation>
 </file>
 
 <file path=ppt/notesMasters/notesMaster1.xml><?xml version="1.0" encoding="utf-8"?>
-<p:notesMaster xmlns:p="http://schemas.openxmlformats.org/presentationml/2006/main">
+<p:notesMaster xmlns:a="http://schemas.openxmlformats.org/drawingml/2006/main" xmlns:r="http://schemas.openxmlformats.org/officeDocument/2006/relationships" xmlns:p="http://schemas.openxmlformats.org/presentationml/2006/main">
   <p:cSld>
     <p:bg>
       <p:bgRef idx="1001">
-        <a:schemeClr xmlns:a="http://schemas.openxmlformats.org/drawingml/2006/main" val="bg1"/>
+        <a:schemeClr val="bg1"/>
       </p:bgRef>
     </p:bg>
     <p:spTree>
@@ -34,380 +129,164 @@
         <p:nvPr/>
       </p:nvGrpSpPr>
       <p:grpSpPr>
-        <a:xfrm xmlns:a="http://schemas.openxmlformats.org/drawingml/2006/main"/>
+        <a:xfrm>
+          <a:off x="0" y="0"/>
+          <a:ext cx="0" cy="0"/>
+          <a:chOff x="0" y="0"/>
+          <a:chExt cx="0" cy="0"/>
+        </a:xfrm>
       </p:grpSpPr>
       <p:sp>
         <p:nvSpPr>
           <p:cNvPr id="2" name="Header Placeholder"/>
-          <p:cNvSpPr/>
+          <p:cNvSpPr>
+            <a:spLocks noGrp="1"/>
+          </p:cNvSpPr>
           <p:nvPr>
             <p:ph type="hdr" sz="quarter"/>
           </p:nvPr>
         </p:nvSpPr>
         <p:spPr>
-          <a:prstGeom xmlns:a="http://schemas.openxmlformats.org/drawingml/2006/main" prst="rect">
-            <a:avLst/>
-          </a:prstGeom>
-        </p:spPr>
-        <p:txBody>
-          <a:bodyPr xmlns:a="http://schemas.openxmlformats.org/drawingml/2006/main"/>
-          <a:lstStyle xmlns:a="http://schemas.openxmlformats.org/drawingml/2006/main"/>
-          <a:p xmlns:a="http://schemas.openxmlformats.org/drawingml/2006/main"/>
+          <a:prstGeom prst="rect">
+            <a:avLst/>
+          </a:prstGeom>
+        </p:spPr>
+        <p:txBody>
+          <a:bodyPr/>
+          <a:lstStyle/>
+          <a:p>
+            <a:endParaRPr/>
+          </a:p>
         </p:txBody>
       </p:sp>
       <p:sp>
         <p:nvSpPr>
           <p:cNvPr id="3" name="Date Placeholder"/>
-          <p:cNvSpPr/>
+          <p:cNvSpPr>
+            <a:spLocks noGrp="1"/>
+          </p:cNvSpPr>
           <p:nvPr>
             <p:ph type="dt" sz="quarter" idx="1"/>
           </p:nvPr>
         </p:nvSpPr>
         <p:spPr>
-          <a:prstGeom xmlns:a="http://schemas.openxmlformats.org/drawingml/2006/main" prst="rect">
-            <a:avLst/>
-          </a:prstGeom>
-        </p:spPr>
-        <p:txBody>
-          <a:bodyPr xmlns:a="http://schemas.openxmlformats.org/drawingml/2006/main"/>
-          <a:lstStyle xmlns:a="http://schemas.openxmlformats.org/drawingml/2006/main"/>
-          <a:p xmlns:a="http://schemas.openxmlformats.org/drawingml/2006/main"/>
+          <a:prstGeom prst="rect">
+            <a:avLst/>
+          </a:prstGeom>
+        </p:spPr>
+        <p:txBody>
+          <a:bodyPr/>
+          <a:lstStyle/>
+          <a:p>
+            <a:endParaRPr/>
+          </a:p>
         </p:txBody>
       </p:sp>
       <p:sp>
         <p:nvSpPr>
           <p:cNvPr id="4" name="Slide Image Placeholder"/>
-          <p:cNvSpPr/>
+          <p:cNvSpPr>
+            <a:spLocks noGrp="1" noRot="1" noChangeAspect="1"/>
+          </p:cNvSpPr>
           <p:nvPr>
             <p:ph type="sldImg" idx="2"/>
           </p:nvPr>
         </p:nvSpPr>
         <p:spPr>
-          <a:prstGeom xmlns:a="http://schemas.openxmlformats.org/drawingml/2006/main" prst="rect">
-            <a:avLst/>
-          </a:prstGeom>
-        </p:spPr>
-        <p:txBody>
-          <a:bodyPr xmlns:a="http://schemas.openxmlformats.org/drawingml/2006/main"/>
-          <a:lstStyle xmlns:a="http://schemas.openxmlformats.org/drawingml/2006/main"/>
-          <a:p xmlns:a="http://schemas.openxmlformats.org/drawingml/2006/main"/>
+          <a:prstGeom prst="rect">
+            <a:avLst/>
+          </a:prstGeom>
+        </p:spPr>
+        <p:txBody>
+          <a:bodyPr/>
+          <a:lstStyle/>
+          <a:p>
+            <a:endParaRPr/>
+          </a:p>
         </p:txBody>
       </p:sp>
       <p:sp>
         <p:nvSpPr>
           <p:cNvPr id="5" name="Notes Placeholder"/>
-          <p:cNvSpPr/>
+          <p:cNvSpPr>
+            <a:spLocks noGrp="1"/>
+          </p:cNvSpPr>
           <p:nvPr>
             <p:ph type="body" sz="quarter" idx="3"/>
           </p:nvPr>
         </p:nvSpPr>
         <p:spPr>
-          <a:prstGeom xmlns:a="http://schemas.openxmlformats.org/drawingml/2006/main" prst="rect">
-            <a:avLst/>
-          </a:prstGeom>
-        </p:spPr>
-        <p:txBody>
-          <a:bodyPr xmlns:a="http://schemas.openxmlformats.org/drawingml/2006/main"/>
-          <a:lstStyle xmlns:a="http://schemas.openxmlformats.org/drawingml/2006/main"/>
-          <a:p xmlns:a="http://schemas.openxmlformats.org/drawingml/2006/main"/>
+          <a:prstGeom prst="rect">
+            <a:avLst/>
+          </a:prstGeom>
+        </p:spPr>
+        <p:txBody>
+          <a:bodyPr/>
+          <a:lstStyle/>
+          <a:p>
+            <a:endParaRPr/>
+          </a:p>
         </p:txBody>
       </p:sp>
       <p:sp>
         <p:nvSpPr>
           <p:cNvPr id="6" name="Footer Placeholder"/>
-          <p:cNvSpPr/>
+          <p:cNvSpPr>
+            <a:spLocks noGrp="1"/>
+          </p:cNvSpPr>
           <p:nvPr>
             <p:ph type="ftr" sz="quarter" idx="4"/>
           </p:nvPr>
         </p:nvSpPr>
         <p:spPr>
-          <a:prstGeom xmlns:a="http://schemas.openxmlformats.org/drawingml/2006/main" prst="rect">
-            <a:avLst/>
-          </a:prstGeom>
-        </p:spPr>
-        <p:txBody>
-          <a:bodyPr xmlns:a="http://schemas.openxmlformats.org/drawingml/2006/main"/>
-          <a:lstStyle xmlns:a="http://schemas.openxmlformats.org/drawingml/2006/main"/>
-          <a:p xmlns:a="http://schemas.openxmlformats.org/drawingml/2006/main"/>
+          <a:prstGeom prst="rect">
+            <a:avLst/>
+          </a:prstGeom>
+        </p:spPr>
+        <p:txBody>
+          <a:bodyPr/>
+          <a:lstStyle/>
+          <a:p>
+            <a:endParaRPr/>
+          </a:p>
         </p:txBody>
       </p:sp>
       <p:sp>
         <p:nvSpPr>
           <p:cNvPr id="7" name="Slide Number Placeholder"/>
-          <p:cNvSpPr/>
+          <p:cNvSpPr>
+            <a:spLocks noGrp="1"/>
+          </p:cNvSpPr>
           <p:nvPr>
             <p:ph type="sldNum" sz="quarter" idx="5"/>
           </p:nvPr>
         </p:nvSpPr>
         <p:spPr>
-          <a:prstGeom xmlns:a="http://schemas.openxmlformats.org/drawingml/2006/main" prst="rect">
-            <a:avLst/>
-          </a:prstGeom>
-        </p:spPr>
-        <p:txBody>
-          <a:bodyPr xmlns:a="http://schemas.openxmlformats.org/drawingml/2006/main"/>
-          <a:lstStyle xmlns:a="http://schemas.openxmlformats.org/drawingml/2006/main"/>
-          <a:p xmlns:a="http://schemas.openxmlformats.org/drawingml/2006/main"/>
+          <a:prstGeom prst="rect">
+            <a:avLst/>
+          </a:prstGeom>
+        </p:spPr>
+        <p:txBody>
+          <a:bodyPr/>
+          <a:lstStyle/>
+          <a:p>
+            <a:endParaRPr/>
+          </a:p>
         </p:txBody>
       </p:sp>
     </p:spTree>
   </p:cSld>
   <p:clrMap bg1="lt1" tx1="dk1" bg2="lt2" tx2="dk2" accent1="accent1" accent2="accent2" accent3="accent3" accent4="accent4" accent5="accent5" accent6="accent6" hlink="hlink" folHlink="folHlink"/>
   <p:notesStyle>
-    <a:lvl1pPr xmlns:a="http://schemas.openxmlformats.org/drawingml/2006/main" marL="0" algn="l" defTabSz="914400" rtl="0" eaLnBrk="1" latinLnBrk="0" hangingPunct="1">
+    <a:lvl1pPr marL="0" algn="l" defTabSz="914400" rtl="0" eaLnBrk="1" latinLnBrk="0" hangingPunct="1">
       <a:defRPr sz="1200" kern="1200"/>
     </a:lvl1pPr>
   </p:notesStyle>
 </p:notesMaster>
 </file>
 
-<file path=ppt/notesMasters/theme/theme3.xml><?xml version="1.0" encoding="utf-8"?>
-<a:theme xmlns:a="http://schemas.openxmlformats.org/drawingml/2006/main" name="ChatGPT">
-  <a:themeElements>
-    <a:clrScheme name="ChatGPT">
-      <a:dk1>
-        <a:srgbClr val="000000"/>
-      </a:dk1>
-      <a:lt1>
-        <a:srgbClr val="FFFFFF"/>
-      </a:lt1>
-      <a:dk2>
-        <a:srgbClr val="0E2841"/>
-      </a:dk2>
-      <a:lt2>
-        <a:srgbClr val="E8E8E8"/>
-      </a:lt2>
-      <a:accent1>
-        <a:srgbClr val="156082"/>
-      </a:accent1>
-      <a:accent2>
-        <a:srgbClr val="E97132"/>
-      </a:accent2>
-      <a:accent3>
-        <a:srgbClr val="196B24"/>
-      </a:accent3>
-      <a:accent4>
-        <a:srgbClr val="0F9ED5"/>
-      </a:accent4>
-      <a:accent5>
-        <a:srgbClr val="A02B93"/>
-      </a:accent5>
-      <a:accent6>
-        <a:srgbClr val="4EA72E"/>
-      </a:accent6>
-      <a:hlink>
-        <a:srgbClr val="467886"/>
-      </a:hlink>
-      <a:folHlink>
-        <a:srgbClr val="96607D"/>
-      </a:folHlink>
-    </a:clrScheme>
-    <a:fontScheme name="">
-      <a:majorFont>
-        <a:latin typeface="Aptos"/>
-        <a:ea typeface=""/>
-        <a:cs typeface=""/>
-      </a:majorFont>
-      <a:minorFont>
-        <a:latin typeface="Aptos"/>
-        <a:ea typeface=""/>
-        <a:cs typeface=""/>
-      </a:minorFont>
-    </a:fontScheme>
-    <a:fmtScheme name="ChatGPT">
-      <a:fillStyleLst>
-        <a:solidFill>
-          <a:schemeClr val="phClr"/>
-        </a:solidFill>
-        <a:gradFill>
-          <a:gsLst>
-            <a:gs pos="0">
-              <a:schemeClr val="phClr">
-                <a:tint val="67000"/>
-                <a:lumMod val="110000"/>
-                <a:satMod val="105000"/>
-              </a:schemeClr>
-            </a:gs>
-            <a:gs pos="50000">
-              <a:schemeClr val="phClr">
-                <a:tint val="73000"/>
-                <a:lumMod val="105000"/>
-                <a:satMod val="103000"/>
-              </a:schemeClr>
-            </a:gs>
-            <a:gs pos="100000">
-              <a:schemeClr val="phClr">
-                <a:tint val="81000"/>
-                <a:lumMod val="105000"/>
-                <a:satMod val="109000"/>
-              </a:schemeClr>
-            </a:gs>
-          </a:gsLst>
-          <a:lin ang="5400000" scaled="0"/>
-        </a:gradFill>
-        <a:gradFill>
-          <a:gsLst>
-            <a:gs pos="0">
-              <a:schemeClr val="phClr">
-                <a:tint val="94000"/>
-                <a:lumMod val="102000"/>
-                <a:satMod val="103000"/>
-              </a:schemeClr>
-            </a:gs>
-            <a:gs pos="50000">
-              <a:schemeClr val="phClr">
-                <a:shade val="100000"/>
-                <a:lumMod val="100000"/>
-                <a:satMod val="110000"/>
-              </a:schemeClr>
-            </a:gs>
-            <a:gs pos="100000">
-              <a:schemeClr val="phClr">
-                <a:shade val="78000"/>
-                <a:lumMod val="99000"/>
-                <a:satMod val="120000"/>
-              </a:schemeClr>
-            </a:gs>
-          </a:gsLst>
-          <a:lin ang="5400000" scaled="0"/>
-        </a:gradFill>
-      </a:fillStyleLst>
-      <a:lnStyleLst>
-        <a:ln w="12700">
-          <a:solidFill>
-            <a:schemeClr val="phClr"/>
-          </a:solidFill>
-          <a:prstDash val="solid"/>
-        </a:ln>
-        <a:ln w="19050">
-          <a:solidFill>
-            <a:schemeClr val="phClr"/>
-          </a:solidFill>
-          <a:prstDash val="solid"/>
-        </a:ln>
-        <a:ln w="25400">
-          <a:solidFill>
-            <a:schemeClr val="phClr"/>
-          </a:solidFill>
-          <a:prstDash val="solid"/>
-        </a:ln>
-      </a:lnStyleLst>
-      <a:effectStyleLst>
-        <a:effectStyle>
-          <a:effectLst/>
-        </a:effectStyle>
-        <a:effectStyle>
-          <a:effectLst/>
-        </a:effectStyle>
-        <a:effectStyle>
-          <a:effectLst>
-            <a:outerShdw blurRad="57150" dist="19050" dir="5400000">
-              <a:srgbClr val="000000">
-                <a:alpha val="16000"/>
-              </a:srgbClr>
-            </a:outerShdw>
-          </a:effectLst>
-        </a:effectStyle>
-        <a:effectStyle>
-          <a:effectLst>
-            <a:outerShdw blurRad="19050" dist="9525" dir="5400000">
-              <a:srgbClr val="000000">
-                <a:alpha val="6000"/>
-              </a:srgbClr>
-            </a:outerShdw>
-          </a:effectLst>
-        </a:effectStyle>
-        <a:effectStyle>
-          <a:effectLst>
-            <a:outerShdw blurRad="28575" dist="9525" dir="5400000">
-              <a:srgbClr val="000000">
-                <a:alpha val="8000"/>
-              </a:srgbClr>
-            </a:outerShdw>
-          </a:effectLst>
-        </a:effectStyle>
-        <a:effectStyle>
-          <a:effectLst>
-            <a:outerShdw blurRad="57150" dist="19050" dir="5400000">
-              <a:srgbClr val="000000">
-                <a:alpha val="10000"/>
-              </a:srgbClr>
-            </a:outerShdw>
-          </a:effectLst>
-        </a:effectStyle>
-        <a:effectStyle>
-          <a:effectLst>
-            <a:outerShdw blurRad="114300" dist="38100" dir="5400000">
-              <a:srgbClr val="000000">
-                <a:alpha val="12000"/>
-              </a:srgbClr>
-            </a:outerShdw>
-          </a:effectLst>
-        </a:effectStyle>
-        <a:effectStyle>
-          <a:effectLst>
-            <a:outerShdw blurRad="171450" dist="57150" dir="5400000">
-              <a:srgbClr val="000000">
-                <a:alpha val="16000"/>
-              </a:srgbClr>
-            </a:outerShdw>
-          </a:effectLst>
-        </a:effectStyle>
-        <a:effectStyle>
-          <a:effectLst>
-            <a:outerShdw blurRad="266700" dist="95250" dir="5400000">
-              <a:srgbClr val="000000">
-                <a:alpha val="24000"/>
-              </a:srgbClr>
-            </a:outerShdw>
-          </a:effectLst>
-        </a:effectStyle>
-      </a:effectStyleLst>
-      <a:bgFillStyleLst>
-        <a:solidFill>
-          <a:schemeClr val="phClr"/>
-        </a:solidFill>
-        <a:solidFill>
-          <a:schemeClr val="phClr">
-            <a:tint val="95000"/>
-            <a:satMod val="170000"/>
-          </a:schemeClr>
-        </a:solidFill>
-        <a:gradFill>
-          <a:gsLst>
-            <a:gs pos="0">
-              <a:schemeClr val="phClr">
-                <a:tint val="93000"/>
-                <a:shade val="98000"/>
-                <a:lumMod val="102000"/>
-                <a:satMod val="150000"/>
-              </a:schemeClr>
-            </a:gs>
-            <a:gs pos="50000">
-              <a:schemeClr val="phClr">
-                <a:tint val="98000"/>
-                <a:shade val="90000"/>
-                <a:lumMod val="103000"/>
-                <a:satMod val="130000"/>
-              </a:schemeClr>
-            </a:gs>
-            <a:gs pos="100000">
-              <a:schemeClr val="phClr">
-                <a:shade val="63000"/>
-                <a:satMod val="120000"/>
-              </a:schemeClr>
-            </a:gs>
-          </a:gsLst>
-          <a:lin ang="5400000" scaled="0"/>
-        </a:gradFill>
-      </a:bgFillStyleLst>
-    </a:fmtScheme>
-  </a:themeElements>
-</a:theme>
-</file>
-
 <file path=ppt/notesSlides/notesSlide1.xml><?xml version="1.0" encoding="utf-8"?>
-<p:notes xmlns:p="http://schemas.openxmlformats.org/presentationml/2006/main">
+<p:notes xmlns:a="http://schemas.openxmlformats.org/drawingml/2006/main" xmlns:r="http://schemas.openxmlformats.org/officeDocument/2006/relationships" xmlns:p="http://schemas.openxmlformats.org/presentationml/2006/main">
   <p:cSld>
     <p:spTree>
       <p:nvGrpSpPr>
@@ -416,16 +295,21 @@
         <p:nvPr/>
       </p:nvGrpSpPr>
       <p:grpSpPr>
-        <a:xfrm xmlns:a="http://schemas.openxmlformats.org/drawingml/2006/main"/>
+        <a:xfrm>
+          <a:off x="0" y="0"/>
+          <a:ext cx="0" cy="0"/>
+          <a:chOff x="0" y="0"/>
+          <a:chExt cx="0" cy="0"/>
+        </a:xfrm>
       </p:grpSpPr>
       <p:sp>
         <p:nvSpPr>
           <p:cNvPr id="2" name="Slide Image Placeholder 1"/>
           <p:cNvSpPr>
-            <a:spLocks xmlns:a="http://schemas.openxmlformats.org/drawingml/2006/main" noGrp="1"/>
+            <a:spLocks noGrp="1" noRot="1" noChangeAspect="1"/>
           </p:cNvSpPr>
           <p:nvPr>
-            <p:ph type="sldImg" idx="0"/>
+            <p:ph type="sldImg"/>
           </p:nvPr>
         </p:nvSpPr>
         <p:spPr/>
@@ -434,7 +318,7 @@
         <p:nvSpPr>
           <p:cNvPr id="3" name="Notes Placeholder 2"/>
           <p:cNvSpPr>
-            <a:spLocks xmlns:a="http://schemas.openxmlformats.org/drawingml/2006/main" noGrp="1"/>
+            <a:spLocks noGrp="1"/>
           </p:cNvSpPr>
           <p:nvPr>
             <p:ph type="body" idx="1"/>
@@ -442,16 +326,18 @@
         </p:nvSpPr>
         <p:spPr/>
         <p:txBody>
-          <a:bodyPr xmlns:a="http://schemas.openxmlformats.org/drawingml/2006/main"/>
-          <a:lstStyle xmlns:a="http://schemas.openxmlformats.org/drawingml/2006/main"/>
-          <a:p xmlns:a="http://schemas.openxmlformats.org/drawingml/2006/main"/>
+          <a:bodyPr/>
+          <a:lstStyle/>
+          <a:p>
+            <a:endParaRPr/>
+          </a:p>
         </p:txBody>
       </p:sp>
       <p:sp>
         <p:nvSpPr>
           <p:cNvPr id="4" name="Slide Number Placeholder 3"/>
           <p:cNvSpPr>
-            <a:spLocks xmlns:a="http://schemas.openxmlformats.org/drawingml/2006/main" noGrp="1"/>
+            <a:spLocks noGrp="1"/>
           </p:cNvSpPr>
           <p:nvPr>
             <p:ph type="sldNum" idx="5"/>
@@ -459,21 +345,23 @@
         </p:nvSpPr>
         <p:spPr/>
         <p:txBody>
-          <a:bodyPr xmlns:a="http://schemas.openxmlformats.org/drawingml/2006/main"/>
-          <a:lstStyle xmlns:a="http://schemas.openxmlformats.org/drawingml/2006/main"/>
-          <a:p xmlns:a="http://schemas.openxmlformats.org/drawingml/2006/main"/>
+          <a:bodyPr/>
+          <a:lstStyle/>
+          <a:p>
+            <a:endParaRPr/>
+          </a:p>
         </p:txBody>
       </p:sp>
     </p:spTree>
   </p:cSld>
   <p:clrMapOvr>
-    <a:masterClrMapping xmlns:a="http://schemas.openxmlformats.org/drawingml/2006/main"/>
+    <a:masterClrMapping/>
   </p:clrMapOvr>
 </p:notes>
 </file>
 
 <file path=ppt/notesSlides/notesSlide2.xml><?xml version="1.0" encoding="utf-8"?>
-<p:notes xmlns:p="http://schemas.openxmlformats.org/presentationml/2006/main">
+<p:notes xmlns:a="http://schemas.openxmlformats.org/drawingml/2006/main" xmlns:r="http://schemas.openxmlformats.org/officeDocument/2006/relationships" xmlns:p="http://schemas.openxmlformats.org/presentationml/2006/main">
   <p:cSld>
     <p:spTree>
       <p:nvGrpSpPr>
@@ -482,16 +370,21 @@
         <p:nvPr/>
       </p:nvGrpSpPr>
       <p:grpSpPr>
-        <a:xfrm xmlns:a="http://schemas.openxmlformats.org/drawingml/2006/main"/>
+        <a:xfrm>
+          <a:off x="0" y="0"/>
+          <a:ext cx="0" cy="0"/>
+          <a:chOff x="0" y="0"/>
+          <a:chExt cx="0" cy="0"/>
+        </a:xfrm>
       </p:grpSpPr>
       <p:sp>
         <p:nvSpPr>
           <p:cNvPr id="2" name="Slide Image Placeholder 1"/>
           <p:cNvSpPr>
-            <a:spLocks xmlns:a="http://schemas.openxmlformats.org/drawingml/2006/main" noGrp="1"/>
+            <a:spLocks noGrp="1" noRot="1" noChangeAspect="1"/>
           </p:cNvSpPr>
           <p:nvPr>
-            <p:ph type="sldImg" idx="0"/>
+            <p:ph type="sldImg"/>
           </p:nvPr>
         </p:nvSpPr>
         <p:spPr/>
@@ -500,7 +393,7 @@
         <p:nvSpPr>
           <p:cNvPr id="3" name="Notes Placeholder 2"/>
           <p:cNvSpPr>
-            <a:spLocks xmlns:a="http://schemas.openxmlformats.org/drawingml/2006/main" noGrp="1"/>
+            <a:spLocks noGrp="1"/>
           </p:cNvSpPr>
           <p:nvPr>
             <p:ph type="body" idx="1"/>
@@ -508,16 +401,18 @@
         </p:nvSpPr>
         <p:spPr/>
         <p:txBody>
-          <a:bodyPr xmlns:a="http://schemas.openxmlformats.org/drawingml/2006/main"/>
-          <a:lstStyle xmlns:a="http://schemas.openxmlformats.org/drawingml/2006/main"/>
-          <a:p xmlns:a="http://schemas.openxmlformats.org/drawingml/2006/main"/>
+          <a:bodyPr/>
+          <a:lstStyle/>
+          <a:p>
+            <a:endParaRPr/>
+          </a:p>
         </p:txBody>
       </p:sp>
       <p:sp>
         <p:nvSpPr>
           <p:cNvPr id="4" name="Slide Number Placeholder 3"/>
           <p:cNvSpPr>
-            <a:spLocks xmlns:a="http://schemas.openxmlformats.org/drawingml/2006/main" noGrp="1"/>
+            <a:spLocks noGrp="1"/>
           </p:cNvSpPr>
           <p:nvPr>
             <p:ph type="sldNum" idx="5"/>
@@ -525,21 +420,23 @@
         </p:nvSpPr>
         <p:spPr/>
         <p:txBody>
-          <a:bodyPr xmlns:a="http://schemas.openxmlformats.org/drawingml/2006/main"/>
-          <a:lstStyle xmlns:a="http://schemas.openxmlformats.org/drawingml/2006/main"/>
-          <a:p xmlns:a="http://schemas.openxmlformats.org/drawingml/2006/main"/>
+          <a:bodyPr/>
+          <a:lstStyle/>
+          <a:p>
+            <a:endParaRPr/>
+          </a:p>
         </p:txBody>
       </p:sp>
     </p:spTree>
   </p:cSld>
   <p:clrMapOvr>
-    <a:masterClrMapping xmlns:a="http://schemas.openxmlformats.org/drawingml/2006/main"/>
+    <a:masterClrMapping/>
   </p:clrMapOvr>
 </p:notes>
 </file>
 
 <file path=ppt/notesSlides/notesSlide3.xml><?xml version="1.0" encoding="utf-8"?>
-<p:notes xmlns:p="http://schemas.openxmlformats.org/presentationml/2006/main">
+<p:notes xmlns:a="http://schemas.openxmlformats.org/drawingml/2006/main" xmlns:r="http://schemas.openxmlformats.org/officeDocument/2006/relationships" xmlns:p="http://schemas.openxmlformats.org/presentationml/2006/main">
   <p:cSld>
     <p:spTree>
       <p:nvGrpSpPr>
@@ -548,16 +445,21 @@
         <p:nvPr/>
       </p:nvGrpSpPr>
       <p:grpSpPr>
-        <a:xfrm xmlns:a="http://schemas.openxmlformats.org/drawingml/2006/main"/>
+        <a:xfrm>
+          <a:off x="0" y="0"/>
+          <a:ext cx="0" cy="0"/>
+          <a:chOff x="0" y="0"/>
+          <a:chExt cx="0" cy="0"/>
+        </a:xfrm>
       </p:grpSpPr>
       <p:sp>
         <p:nvSpPr>
           <p:cNvPr id="2" name="Slide Image Placeholder 1"/>
           <p:cNvSpPr>
-            <a:spLocks xmlns:a="http://schemas.openxmlformats.org/drawingml/2006/main" noGrp="1"/>
+            <a:spLocks noGrp="1" noRot="1" noChangeAspect="1"/>
           </p:cNvSpPr>
           <p:nvPr>
-            <p:ph type="sldImg" idx="0"/>
+            <p:ph type="sldImg"/>
           </p:nvPr>
         </p:nvSpPr>
         <p:spPr/>
@@ -566,7 +468,7 @@
         <p:nvSpPr>
           <p:cNvPr id="3" name="Notes Placeholder 2"/>
           <p:cNvSpPr>
-            <a:spLocks xmlns:a="http://schemas.openxmlformats.org/drawingml/2006/main" noGrp="1"/>
+            <a:spLocks noGrp="1"/>
           </p:cNvSpPr>
           <p:nvPr>
             <p:ph type="body" idx="1"/>
@@ -574,16 +476,18 @@
         </p:nvSpPr>
         <p:spPr/>
         <p:txBody>
-          <a:bodyPr xmlns:a="http://schemas.openxmlformats.org/drawingml/2006/main"/>
-          <a:lstStyle xmlns:a="http://schemas.openxmlformats.org/drawingml/2006/main"/>
-          <a:p xmlns:a="http://schemas.openxmlformats.org/drawingml/2006/main"/>
+          <a:bodyPr/>
+          <a:lstStyle/>
+          <a:p>
+            <a:endParaRPr/>
+          </a:p>
         </p:txBody>
       </p:sp>
       <p:sp>
         <p:nvSpPr>
           <p:cNvPr id="4" name="Slide Number Placeholder 3"/>
           <p:cNvSpPr>
-            <a:spLocks xmlns:a="http://schemas.openxmlformats.org/drawingml/2006/main" noGrp="1"/>
+            <a:spLocks noGrp="1"/>
           </p:cNvSpPr>
           <p:nvPr>
             <p:ph type="sldNum" idx="5"/>
@@ -591,21 +495,23 @@
         </p:nvSpPr>
         <p:spPr/>
         <p:txBody>
-          <a:bodyPr xmlns:a="http://schemas.openxmlformats.org/drawingml/2006/main"/>
-          <a:lstStyle xmlns:a="http://schemas.openxmlformats.org/drawingml/2006/main"/>
-          <a:p xmlns:a="http://schemas.openxmlformats.org/drawingml/2006/main"/>
+          <a:bodyPr/>
+          <a:lstStyle/>
+          <a:p>
+            <a:endParaRPr/>
+          </a:p>
         </p:txBody>
       </p:sp>
     </p:spTree>
   </p:cSld>
   <p:clrMapOvr>
-    <a:masterClrMapping xmlns:a="http://schemas.openxmlformats.org/drawingml/2006/main"/>
+    <a:masterClrMapping/>
   </p:clrMapOvr>
 </p:notes>
 </file>
 
 <file path=ppt/notesSlides/notesSlide4.xml><?xml version="1.0" encoding="utf-8"?>
-<p:notes xmlns:p="http://schemas.openxmlformats.org/presentationml/2006/main">
+<p:notes xmlns:a="http://schemas.openxmlformats.org/drawingml/2006/main" xmlns:r="http://schemas.openxmlformats.org/officeDocument/2006/relationships" xmlns:p="http://schemas.openxmlformats.org/presentationml/2006/main">
   <p:cSld>
     <p:spTree>
       <p:nvGrpSpPr>
@@ -614,16 +520,21 @@
         <p:nvPr/>
       </p:nvGrpSpPr>
       <p:grpSpPr>
-        <a:xfrm xmlns:a="http://schemas.openxmlformats.org/drawingml/2006/main"/>
+        <a:xfrm>
+          <a:off x="0" y="0"/>
+          <a:ext cx="0" cy="0"/>
+          <a:chOff x="0" y="0"/>
+          <a:chExt cx="0" cy="0"/>
+        </a:xfrm>
       </p:grpSpPr>
       <p:sp>
         <p:nvSpPr>
           <p:cNvPr id="2" name="Slide Image Placeholder 1"/>
           <p:cNvSpPr>
-            <a:spLocks xmlns:a="http://schemas.openxmlformats.org/drawingml/2006/main" noGrp="1"/>
+            <a:spLocks noGrp="1" noRot="1" noChangeAspect="1"/>
           </p:cNvSpPr>
           <p:nvPr>
-            <p:ph type="sldImg" idx="0"/>
+            <p:ph type="sldImg"/>
           </p:nvPr>
         </p:nvSpPr>
         <p:spPr/>
@@ -632,7 +543,7 @@
         <p:nvSpPr>
           <p:cNvPr id="3" name="Notes Placeholder 2"/>
           <p:cNvSpPr>
-            <a:spLocks xmlns:a="http://schemas.openxmlformats.org/drawingml/2006/main" noGrp="1"/>
+            <a:spLocks noGrp="1"/>
           </p:cNvSpPr>
           <p:nvPr>
             <p:ph type="body" idx="1"/>
@@ -640,16 +551,18 @@
         </p:nvSpPr>
         <p:spPr/>
         <p:txBody>
-          <a:bodyPr xmlns:a="http://schemas.openxmlformats.org/drawingml/2006/main"/>
-          <a:lstStyle xmlns:a="http://schemas.openxmlformats.org/drawingml/2006/main"/>
-          <a:p xmlns:a="http://schemas.openxmlformats.org/drawingml/2006/main"/>
+          <a:bodyPr/>
+          <a:lstStyle/>
+          <a:p>
+            <a:endParaRPr/>
+          </a:p>
         </p:txBody>
       </p:sp>
       <p:sp>
         <p:nvSpPr>
           <p:cNvPr id="4" name="Slide Number Placeholder 3"/>
           <p:cNvSpPr>
-            <a:spLocks xmlns:a="http://schemas.openxmlformats.org/drawingml/2006/main" noGrp="1"/>
+            <a:spLocks noGrp="1"/>
           </p:cNvSpPr>
           <p:nvPr>
             <p:ph type="sldNum" idx="5"/>
@@ -657,21 +570,23 @@
         </p:nvSpPr>
         <p:spPr/>
         <p:txBody>
-          <a:bodyPr xmlns:a="http://schemas.openxmlformats.org/drawingml/2006/main"/>
-          <a:lstStyle xmlns:a="http://schemas.openxmlformats.org/drawingml/2006/main"/>
-          <a:p xmlns:a="http://schemas.openxmlformats.org/drawingml/2006/main"/>
+          <a:bodyPr/>
+          <a:lstStyle/>
+          <a:p>
+            <a:endParaRPr/>
+          </a:p>
         </p:txBody>
       </p:sp>
     </p:spTree>
   </p:cSld>
   <p:clrMapOvr>
-    <a:masterClrMapping xmlns:a="http://schemas.openxmlformats.org/drawingml/2006/main"/>
+    <a:masterClrMapping/>
   </p:clrMapOvr>
 </p:notes>
 </file>
 
 <file path=ppt/notesSlides/notesSlide5.xml><?xml version="1.0" encoding="utf-8"?>
-<p:notes xmlns:p="http://schemas.openxmlformats.org/presentationml/2006/main">
+<p:notes xmlns:a="http://schemas.openxmlformats.org/drawingml/2006/main" xmlns:r="http://schemas.openxmlformats.org/officeDocument/2006/relationships" xmlns:p="http://schemas.openxmlformats.org/presentationml/2006/main">
   <p:cSld>
     <p:spTree>
       <p:nvGrpSpPr>
@@ -680,16 +595,21 @@
         <p:nvPr/>
       </p:nvGrpSpPr>
       <p:grpSpPr>
-        <a:xfrm xmlns:a="http://schemas.openxmlformats.org/drawingml/2006/main"/>
+        <a:xfrm>
+          <a:off x="0" y="0"/>
+          <a:ext cx="0" cy="0"/>
+          <a:chOff x="0" y="0"/>
+          <a:chExt cx="0" cy="0"/>
+        </a:xfrm>
       </p:grpSpPr>
       <p:sp>
         <p:nvSpPr>
           <p:cNvPr id="2" name="Slide Image Placeholder 1"/>
           <p:cNvSpPr>
-            <a:spLocks xmlns:a="http://schemas.openxmlformats.org/drawingml/2006/main" noGrp="1"/>
+            <a:spLocks noGrp="1" noRot="1" noChangeAspect="1"/>
           </p:cNvSpPr>
           <p:nvPr>
-            <p:ph type="sldImg" idx="0"/>
+            <p:ph type="sldImg"/>
           </p:nvPr>
         </p:nvSpPr>
         <p:spPr/>
@@ -698,7 +618,7 @@
         <p:nvSpPr>
           <p:cNvPr id="3" name="Notes Placeholder 2"/>
           <p:cNvSpPr>
-            <a:spLocks xmlns:a="http://schemas.openxmlformats.org/drawingml/2006/main" noGrp="1"/>
+            <a:spLocks noGrp="1"/>
           </p:cNvSpPr>
           <p:nvPr>
             <p:ph type="body" idx="1"/>
@@ -706,16 +626,18 @@
         </p:nvSpPr>
         <p:spPr/>
         <p:txBody>
-          <a:bodyPr xmlns:a="http://schemas.openxmlformats.org/drawingml/2006/main"/>
-          <a:lstStyle xmlns:a="http://schemas.openxmlformats.org/drawingml/2006/main"/>
-          <a:p xmlns:a="http://schemas.openxmlformats.org/drawingml/2006/main"/>
+          <a:bodyPr/>
+          <a:lstStyle/>
+          <a:p>
+            <a:endParaRPr/>
+          </a:p>
         </p:txBody>
       </p:sp>
       <p:sp>
         <p:nvSpPr>
           <p:cNvPr id="4" name="Slide Number Placeholder 3"/>
           <p:cNvSpPr>
-            <a:spLocks xmlns:a="http://schemas.openxmlformats.org/drawingml/2006/main" noGrp="1"/>
+            <a:spLocks noGrp="1"/>
           </p:cNvSpPr>
           <p:nvPr>
             <p:ph type="sldNum" idx="5"/>
@@ -723,21 +645,23 @@
         </p:nvSpPr>
         <p:spPr/>
         <p:txBody>
-          <a:bodyPr xmlns:a="http://schemas.openxmlformats.org/drawingml/2006/main"/>
-          <a:lstStyle xmlns:a="http://schemas.openxmlformats.org/drawingml/2006/main"/>
-          <a:p xmlns:a="http://schemas.openxmlformats.org/drawingml/2006/main"/>
+          <a:bodyPr/>
+          <a:lstStyle/>
+          <a:p>
+            <a:endParaRPr/>
+          </a:p>
         </p:txBody>
       </p:sp>
     </p:spTree>
   </p:cSld>
   <p:clrMapOvr>
-    <a:masterClrMapping xmlns:a="http://schemas.openxmlformats.org/drawingml/2006/main"/>
+    <a:masterClrMapping/>
   </p:clrMapOvr>
 </p:notes>
 </file>
 
 <file path=ppt/slideLayouts/slideLayout1.xml><?xml version="1.0" encoding="utf-8"?>
-<p:sldLayout xmlns:p="http://schemas.openxmlformats.org/presentationml/2006/main" type="title">
+<p:sldLayout xmlns:a="http://schemas.openxmlformats.org/drawingml/2006/main" xmlns:r="http://schemas.openxmlformats.org/officeDocument/2006/relationships" xmlns:p="http://schemas.openxmlformats.org/presentationml/2006/main" type="title">
   <p:cSld name="Title Slide">
     <p:spTree>
       <p:nvGrpSpPr>
@@ -746,43 +670,48 @@
         <p:nvPr/>
       </p:nvGrpSpPr>
       <p:grpSpPr>
-        <a:xfrm xmlns:a="http://schemas.openxmlformats.org/drawingml/2006/main"/>
+        <a:xfrm>
+          <a:off x="0" y="0"/>
+          <a:ext cx="0" cy="0"/>
+          <a:chOff x="0" y="0"/>
+          <a:chExt cx="0" cy="0"/>
+        </a:xfrm>
       </p:grpSpPr>
       <p:sp>
         <p:nvSpPr>
           <p:cNvPr id="3" name="Title">
-            <a:extLst xmlns:a="http://schemas.openxmlformats.org/drawingml/2006/main">
+            <a:extLst>
               <a:ext uri="{FF2B5EF4-FFF2-40B4-BE49-F238E27FC236}">
                 <a16:creationId xmlns:a16="http://schemas.microsoft.com/office/drawing/2014/main" id="{F19B7FA5-CD8E-486F-A02A-B2A19D9CD4E4}"/>
               </a:ext>
             </a:extLst>
           </p:cNvPr>
           <p:cNvSpPr>
-            <a:spLocks xmlns:a="http://schemas.openxmlformats.org/drawingml/2006/main" noGrp="1"/>
+            <a:spLocks noGrp="1"/>
           </p:cNvSpPr>
           <p:nvPr>
-            <p:ph type="title" idx="0"/>
+            <p:ph type="title"/>
           </p:nvPr>
         </p:nvSpPr>
         <p:spPr>
-          <a:xfrm xmlns:a="http://schemas.openxmlformats.org/drawingml/2006/main">
+          <a:xfrm>
             <a:off x="1219200" y="2590800"/>
             <a:ext cx="9753600" cy="990600"/>
           </a:xfrm>
-          <a:prstGeom xmlns:a="http://schemas.openxmlformats.org/drawingml/2006/main" prst="rect">
-            <a:avLst/>
-          </a:prstGeom>
-          <a:noFill xmlns:a="http://schemas.openxmlformats.org/drawingml/2006/main"/>
-          <a:ln xmlns:a="http://schemas.openxmlformats.org/drawingml/2006/main">
+          <a:prstGeom prst="rect">
+            <a:avLst/>
+          </a:prstGeom>
+          <a:noFill/>
+          <a:ln>
             <a:noFill/>
             <a:prstDash val="solid"/>
           </a:ln>
         </p:spPr>
         <p:txBody>
-          <a:bodyPr xmlns:a="http://schemas.openxmlformats.org/drawingml/2006/main" wrap="square" lIns="0" tIns="0" rIns="0" bIns="0" anchor="ctr">
+          <a:bodyPr wrap="square" lIns="0" tIns="0" rIns="0" bIns="0" anchor="ctr">
             <a:normAutofit/>
           </a:bodyPr>
-          <a:lstStyle xmlns:a="http://schemas.openxmlformats.org/drawingml/2006/main">
+          <a:lstStyle>
             <a:defPPr algn="ctr">
               <a:defRPr sz="4800" b="1">
                 <a:solidFill>
@@ -911,44 +840,46 @@
               <a:defRPr/>
             </a:lvl9pPr>
           </a:lstStyle>
-          <a:p xmlns:a="http://schemas.openxmlformats.org/drawingml/2006/main"/>
+          <a:p>
+            <a:endParaRPr/>
+          </a:p>
         </p:txBody>
       </p:sp>
       <p:sp>
         <p:nvSpPr>
           <p:cNvPr id="2" name="Subtitle">
-            <a:extLst xmlns:a="http://schemas.openxmlformats.org/drawingml/2006/main">
+            <a:extLst>
               <a:ext uri="{FF2B5EF4-FFF2-40B4-BE49-F238E27FC236}">
                 <a16:creationId xmlns:a16="http://schemas.microsoft.com/office/drawing/2014/main" id="{6683484F-C2B2-4E26-9646-94611B464788}"/>
               </a:ext>
             </a:extLst>
           </p:cNvPr>
           <p:cNvSpPr>
-            <a:spLocks xmlns:a="http://schemas.openxmlformats.org/drawingml/2006/main" noGrp="1"/>
+            <a:spLocks noGrp="1"/>
           </p:cNvSpPr>
           <p:nvPr>
             <p:ph type="subTitle" idx="1"/>
           </p:nvPr>
         </p:nvSpPr>
         <p:spPr>
-          <a:xfrm xmlns:a="http://schemas.openxmlformats.org/drawingml/2006/main">
+          <a:xfrm>
             <a:off x="1828800" y="3771900"/>
             <a:ext cx="8534400" cy="762000"/>
           </a:xfrm>
-          <a:prstGeom xmlns:a="http://schemas.openxmlformats.org/drawingml/2006/main" prst="rect">
-            <a:avLst/>
-          </a:prstGeom>
-          <a:noFill xmlns:a="http://schemas.openxmlformats.org/drawingml/2006/main"/>
-          <a:ln xmlns:a="http://schemas.openxmlformats.org/drawingml/2006/main">
+          <a:prstGeom prst="rect">
+            <a:avLst/>
+          </a:prstGeom>
+          <a:noFill/>
+          <a:ln>
             <a:noFill/>
             <a:prstDash val="solid"/>
           </a:ln>
         </p:spPr>
         <p:txBody>
-          <a:bodyPr xmlns:a="http://schemas.openxmlformats.org/drawingml/2006/main" wrap="square" lIns="0" tIns="0" rIns="0" bIns="0" anchor="ctr">
+          <a:bodyPr wrap="square" lIns="0" tIns="0" rIns="0" bIns="0" anchor="ctr">
             <a:normAutofit/>
           </a:bodyPr>
-          <a:lstStyle xmlns:a="http://schemas.openxmlformats.org/drawingml/2006/main">
+          <a:lstStyle>
             <a:defPPr algn="ctr">
               <a:defRPr sz="2100" b="0">
                 <a:solidFill>
@@ -1077,16 +1008,21 @@
               <a:defRPr/>
             </a:lvl9pPr>
           </a:lstStyle>
-          <a:p xmlns:a="http://schemas.openxmlformats.org/drawingml/2006/main"/>
+          <a:p>
+            <a:endParaRPr/>
+          </a:p>
         </p:txBody>
       </p:sp>
     </p:spTree>
   </p:cSld>
+  <p:clrMapOvr>
+    <a:masterClrMapping/>
+  </p:clrMapOvr>
 </p:sldLayout>
 </file>
 
 <file path=ppt/slideLayouts/slideLayout2.xml><?xml version="1.0" encoding="utf-8"?>
-<p:sldLayout xmlns:p="http://schemas.openxmlformats.org/presentationml/2006/main">
+<p:sldLayout xmlns:a="http://schemas.openxmlformats.org/drawingml/2006/main" xmlns:r="http://schemas.openxmlformats.org/officeDocument/2006/relationships" xmlns:p="http://schemas.openxmlformats.org/presentationml/2006/main">
   <p:cSld name="Section Header">
     <p:spTree>
       <p:nvGrpSpPr>
@@ -1095,43 +1031,48 @@
         <p:nvPr/>
       </p:nvGrpSpPr>
       <p:grpSpPr>
-        <a:xfrm xmlns:a="http://schemas.openxmlformats.org/drawingml/2006/main"/>
+        <a:xfrm>
+          <a:off x="0" y="0"/>
+          <a:ext cx="0" cy="0"/>
+          <a:chOff x="0" y="0"/>
+          <a:chExt cx="0" cy="0"/>
+        </a:xfrm>
       </p:grpSpPr>
       <p:sp>
         <p:nvSpPr>
           <p:cNvPr id="2" name="Section title">
-            <a:extLst xmlns:a="http://schemas.openxmlformats.org/drawingml/2006/main">
+            <a:extLst>
               <a:ext uri="{FF2B5EF4-FFF2-40B4-BE49-F238E27FC236}">
                 <a16:creationId xmlns:a16="http://schemas.microsoft.com/office/drawing/2014/main" id="{B4785C68-EC06-445B-8FB5-4D09CE7C5292}"/>
               </a:ext>
             </a:extLst>
           </p:cNvPr>
           <p:cNvSpPr>
-            <a:spLocks xmlns:a="http://schemas.openxmlformats.org/drawingml/2006/main" noGrp="1"/>
+            <a:spLocks noGrp="1"/>
           </p:cNvSpPr>
           <p:nvPr>
-            <p:ph type="title" idx="0"/>
+            <p:ph type="title"/>
           </p:nvPr>
         </p:nvSpPr>
         <p:spPr>
-          <a:xfrm xmlns:a="http://schemas.openxmlformats.org/drawingml/2006/main">
+          <a:xfrm>
             <a:off x="1219200" y="2857500"/>
             <a:ext cx="9753600" cy="1143000"/>
           </a:xfrm>
-          <a:prstGeom xmlns:a="http://schemas.openxmlformats.org/drawingml/2006/main" prst="rect">
-            <a:avLst/>
-          </a:prstGeom>
-          <a:noFill xmlns:a="http://schemas.openxmlformats.org/drawingml/2006/main"/>
-          <a:ln xmlns:a="http://schemas.openxmlformats.org/drawingml/2006/main">
+          <a:prstGeom prst="rect">
+            <a:avLst/>
+          </a:prstGeom>
+          <a:noFill/>
+          <a:ln>
             <a:noFill/>
             <a:prstDash val="solid"/>
           </a:ln>
         </p:spPr>
         <p:txBody>
-          <a:bodyPr xmlns:a="http://schemas.openxmlformats.org/drawingml/2006/main" wrap="square" lIns="0" tIns="0" rIns="0" bIns="0" anchor="ctr">
+          <a:bodyPr wrap="square" lIns="0" tIns="0" rIns="0" bIns="0" anchor="ctr">
             <a:normAutofit/>
           </a:bodyPr>
-          <a:lstStyle xmlns:a="http://schemas.openxmlformats.org/drawingml/2006/main">
+          <a:lstStyle>
             <a:defPPr algn="ctr">
               <a:defRPr sz="4200" b="1">
                 <a:solidFill>
@@ -1260,16 +1201,21 @@
               <a:defRPr/>
             </a:lvl9pPr>
           </a:lstStyle>
-          <a:p xmlns:a="http://schemas.openxmlformats.org/drawingml/2006/main"/>
+          <a:p>
+            <a:endParaRPr/>
+          </a:p>
         </p:txBody>
       </p:sp>
     </p:spTree>
   </p:cSld>
+  <p:clrMapOvr>
+    <a:masterClrMapping/>
+  </p:clrMapOvr>
 </p:sldLayout>
 </file>
 
 <file path=ppt/slideLayouts/slideLayout3.xml><?xml version="1.0" encoding="utf-8"?>
-<p:sldLayout xmlns:p="http://schemas.openxmlformats.org/presentationml/2006/main">
+<p:sldLayout xmlns:a="http://schemas.openxmlformats.org/drawingml/2006/main" xmlns:r="http://schemas.openxmlformats.org/officeDocument/2006/relationships" xmlns:p="http://schemas.openxmlformats.org/presentationml/2006/main">
   <p:cSld name="Title and Body">
     <p:spTree>
       <p:nvGrpSpPr>
@@ -1278,43 +1224,48 @@
         <p:nvPr/>
       </p:nvGrpSpPr>
       <p:grpSpPr>
-        <a:xfrm xmlns:a="http://schemas.openxmlformats.org/drawingml/2006/main"/>
+        <a:xfrm>
+          <a:off x="0" y="0"/>
+          <a:ext cx="0" cy="0"/>
+          <a:chOff x="0" y="0"/>
+          <a:chExt cx="0" cy="0"/>
+        </a:xfrm>
       </p:grpSpPr>
       <p:sp>
         <p:nvSpPr>
           <p:cNvPr id="3" name="Title">
-            <a:extLst xmlns:a="http://schemas.openxmlformats.org/drawingml/2006/main">
+            <a:extLst>
               <a:ext uri="{FF2B5EF4-FFF2-40B4-BE49-F238E27FC236}">
                 <a16:creationId xmlns:a16="http://schemas.microsoft.com/office/drawing/2014/main" id="{B84F0DE4-DF45-4928-A35D-EBEA7B4D01D2}"/>
               </a:ext>
             </a:extLst>
           </p:cNvPr>
           <p:cNvSpPr>
-            <a:spLocks xmlns:a="http://schemas.openxmlformats.org/drawingml/2006/main" noGrp="1"/>
+            <a:spLocks noGrp="1"/>
           </p:cNvSpPr>
           <p:nvPr>
-            <p:ph type="title" idx="0"/>
+            <p:ph type="title"/>
           </p:nvPr>
         </p:nvSpPr>
         <p:spPr>
-          <a:xfrm xmlns:a="http://schemas.openxmlformats.org/drawingml/2006/main">
+          <a:xfrm>
             <a:off x="685800" y="533400"/>
             <a:ext cx="10820400" cy="838200"/>
           </a:xfrm>
-          <a:prstGeom xmlns:a="http://schemas.openxmlformats.org/drawingml/2006/main" prst="rect">
-            <a:avLst/>
-          </a:prstGeom>
-          <a:noFill xmlns:a="http://schemas.openxmlformats.org/drawingml/2006/main"/>
-          <a:ln xmlns:a="http://schemas.openxmlformats.org/drawingml/2006/main">
+          <a:prstGeom prst="rect">
+            <a:avLst/>
+          </a:prstGeom>
+          <a:noFill/>
+          <a:ln>
             <a:noFill/>
             <a:prstDash val="solid"/>
           </a:ln>
         </p:spPr>
         <p:txBody>
-          <a:bodyPr xmlns:a="http://schemas.openxmlformats.org/drawingml/2006/main" wrap="square" lIns="0" tIns="0" rIns="0" bIns="0" anchor="t">
+          <a:bodyPr wrap="square" lIns="0" tIns="0" rIns="0" bIns="0" anchor="t">
             <a:normAutofit/>
           </a:bodyPr>
-          <a:lstStyle xmlns:a="http://schemas.openxmlformats.org/drawingml/2006/main">
+          <a:lstStyle>
             <a:defPPr algn="l">
               <a:defRPr sz="3300" b="1">
                 <a:solidFill>
@@ -1443,44 +1394,46 @@
               <a:defRPr/>
             </a:lvl9pPr>
           </a:lstStyle>
-          <a:p xmlns:a="http://schemas.openxmlformats.org/drawingml/2006/main"/>
+          <a:p>
+            <a:endParaRPr/>
+          </a:p>
         </p:txBody>
       </p:sp>
       <p:sp>
         <p:nvSpPr>
           <p:cNvPr id="2" name="Body">
-            <a:extLst xmlns:a="http://schemas.openxmlformats.org/drawingml/2006/main">
+            <a:extLst>
               <a:ext uri="{FF2B5EF4-FFF2-40B4-BE49-F238E27FC236}">
                 <a16:creationId xmlns:a16="http://schemas.microsoft.com/office/drawing/2014/main" id="{C8F3B0AA-4B92-49F9-84EF-44F35856A4DE}"/>
               </a:ext>
             </a:extLst>
           </p:cNvPr>
           <p:cNvSpPr>
-            <a:spLocks xmlns:a="http://schemas.openxmlformats.org/drawingml/2006/main" noGrp="1"/>
+            <a:spLocks noGrp="1"/>
           </p:cNvSpPr>
           <p:nvPr>
             <p:ph type="body" idx="1"/>
           </p:nvPr>
         </p:nvSpPr>
         <p:spPr>
-          <a:xfrm xmlns:a="http://schemas.openxmlformats.org/drawingml/2006/main">
+          <a:xfrm>
             <a:off x="685800" y="1905000"/>
             <a:ext cx="10820400" cy="4267200"/>
           </a:xfrm>
-          <a:prstGeom xmlns:a="http://schemas.openxmlformats.org/drawingml/2006/main" prst="rect">
-            <a:avLst/>
-          </a:prstGeom>
-          <a:noFill xmlns:a="http://schemas.openxmlformats.org/drawingml/2006/main"/>
-          <a:ln xmlns:a="http://schemas.openxmlformats.org/drawingml/2006/main">
+          <a:prstGeom prst="rect">
+            <a:avLst/>
+          </a:prstGeom>
+          <a:noFill/>
+          <a:ln>
             <a:noFill/>
             <a:prstDash val="solid"/>
           </a:ln>
         </p:spPr>
         <p:txBody>
-          <a:bodyPr xmlns:a="http://schemas.openxmlformats.org/drawingml/2006/main" wrap="square" lIns="0" tIns="0" rIns="0" bIns="0" anchor="t">
+          <a:bodyPr wrap="square" lIns="0" tIns="0" rIns="0" bIns="0" anchor="t">
             <a:normAutofit/>
           </a:bodyPr>
-          <a:lstStyle xmlns:a="http://schemas.openxmlformats.org/drawingml/2006/main">
+          <a:lstStyle>
             <a:defPPr algn="l">
               <a:defRPr sz="2250" b="0">
                 <a:solidFill>
@@ -1609,16 +1562,21 @@
               <a:defRPr/>
             </a:lvl9pPr>
           </a:lstStyle>
-          <a:p xmlns:a="http://schemas.openxmlformats.org/drawingml/2006/main"/>
+          <a:p>
+            <a:endParaRPr/>
+          </a:p>
         </p:txBody>
       </p:sp>
     </p:spTree>
   </p:cSld>
+  <p:clrMapOvr>
+    <a:masterClrMapping/>
+  </p:clrMapOvr>
 </p:sldLayout>
 </file>
 
 <file path=ppt/slideLayouts/slideLayout4.xml><?xml version="1.0" encoding="utf-8"?>
-<p:sldLayout xmlns:p="http://schemas.openxmlformats.org/presentationml/2006/main">
+<p:sldLayout xmlns:a="http://schemas.openxmlformats.org/drawingml/2006/main" xmlns:r="http://schemas.openxmlformats.org/officeDocument/2006/relationships" xmlns:p="http://schemas.openxmlformats.org/presentationml/2006/main">
   <p:cSld name="Title and Two Column">
     <p:spTree>
       <p:nvGrpSpPr>
@@ -1627,43 +1585,48 @@
         <p:nvPr/>
       </p:nvGrpSpPr>
       <p:grpSpPr>
-        <a:xfrm xmlns:a="http://schemas.openxmlformats.org/drawingml/2006/main"/>
+        <a:xfrm>
+          <a:off x="0" y="0"/>
+          <a:ext cx="0" cy="0"/>
+          <a:chOff x="0" y="0"/>
+          <a:chExt cx="0" cy="0"/>
+        </a:xfrm>
       </p:grpSpPr>
       <p:sp>
         <p:nvSpPr>
           <p:cNvPr id="4" name="Title">
-            <a:extLst xmlns:a="http://schemas.openxmlformats.org/drawingml/2006/main">
+            <a:extLst>
               <a:ext uri="{FF2B5EF4-FFF2-40B4-BE49-F238E27FC236}">
                 <a16:creationId xmlns:a16="http://schemas.microsoft.com/office/drawing/2014/main" id="{88B5C9DC-4397-4E3F-AA07-780817DC29FF}"/>
               </a:ext>
             </a:extLst>
           </p:cNvPr>
           <p:cNvSpPr>
-            <a:spLocks xmlns:a="http://schemas.openxmlformats.org/drawingml/2006/main" noGrp="1"/>
+            <a:spLocks noGrp="1"/>
           </p:cNvSpPr>
           <p:nvPr>
-            <p:ph type="title" idx="0"/>
+            <p:ph type="title"/>
           </p:nvPr>
         </p:nvSpPr>
         <p:spPr>
-          <a:xfrm xmlns:a="http://schemas.openxmlformats.org/drawingml/2006/main">
+          <a:xfrm>
             <a:off x="685800" y="533400"/>
             <a:ext cx="10820400" cy="838200"/>
           </a:xfrm>
-          <a:prstGeom xmlns:a="http://schemas.openxmlformats.org/drawingml/2006/main" prst="rect">
-            <a:avLst/>
-          </a:prstGeom>
-          <a:noFill xmlns:a="http://schemas.openxmlformats.org/drawingml/2006/main"/>
-          <a:ln xmlns:a="http://schemas.openxmlformats.org/drawingml/2006/main">
+          <a:prstGeom prst="rect">
+            <a:avLst/>
+          </a:prstGeom>
+          <a:noFill/>
+          <a:ln>
             <a:noFill/>
             <a:prstDash val="solid"/>
           </a:ln>
         </p:spPr>
         <p:txBody>
-          <a:bodyPr xmlns:a="http://schemas.openxmlformats.org/drawingml/2006/main" wrap="square" lIns="0" tIns="0" rIns="0" bIns="0" anchor="t">
+          <a:bodyPr wrap="square" lIns="0" tIns="0" rIns="0" bIns="0" anchor="t">
             <a:normAutofit/>
           </a:bodyPr>
-          <a:lstStyle xmlns:a="http://schemas.openxmlformats.org/drawingml/2006/main">
+          <a:lstStyle>
             <a:defPPr algn="l">
               <a:defRPr sz="3300" b="1">
                 <a:solidFill>
@@ -1792,44 +1755,46 @@
               <a:defRPr/>
             </a:lvl9pPr>
           </a:lstStyle>
-          <a:p xmlns:a="http://schemas.openxmlformats.org/drawingml/2006/main"/>
+          <a:p>
+            <a:endParaRPr/>
+          </a:p>
         </p:txBody>
       </p:sp>
       <p:sp>
         <p:nvSpPr>
           <p:cNvPr id="2" name="Left column">
-            <a:extLst xmlns:a="http://schemas.openxmlformats.org/drawingml/2006/main">
+            <a:extLst>
               <a:ext uri="{FF2B5EF4-FFF2-40B4-BE49-F238E27FC236}">
                 <a16:creationId xmlns:a16="http://schemas.microsoft.com/office/drawing/2014/main" id="{19BBED52-B096-46DA-A86D-AD132CA2433C}"/>
               </a:ext>
             </a:extLst>
           </p:cNvPr>
           <p:cNvSpPr>
-            <a:spLocks xmlns:a="http://schemas.openxmlformats.org/drawingml/2006/main" noGrp="1"/>
+            <a:spLocks noGrp="1"/>
           </p:cNvSpPr>
           <p:nvPr>
             <p:ph type="body" idx="1"/>
           </p:nvPr>
         </p:nvSpPr>
         <p:spPr>
-          <a:xfrm xmlns:a="http://schemas.openxmlformats.org/drawingml/2006/main">
+          <a:xfrm>
             <a:off x="685800" y="1905000"/>
             <a:ext cx="5029200" cy="4267200"/>
           </a:xfrm>
-          <a:prstGeom xmlns:a="http://schemas.openxmlformats.org/drawingml/2006/main" prst="rect">
-            <a:avLst/>
-          </a:prstGeom>
-          <a:noFill xmlns:a="http://schemas.openxmlformats.org/drawingml/2006/main"/>
-          <a:ln xmlns:a="http://schemas.openxmlformats.org/drawingml/2006/main">
+          <a:prstGeom prst="rect">
+            <a:avLst/>
+          </a:prstGeom>
+          <a:noFill/>
+          <a:ln>
             <a:noFill/>
             <a:prstDash val="solid"/>
           </a:ln>
         </p:spPr>
         <p:txBody>
-          <a:bodyPr xmlns:a="http://schemas.openxmlformats.org/drawingml/2006/main" wrap="square" lIns="0" tIns="0" rIns="0" bIns="0" anchor="t">
+          <a:bodyPr wrap="square" lIns="0" tIns="0" rIns="0" bIns="0" anchor="t">
             <a:normAutofit/>
           </a:bodyPr>
-          <a:lstStyle xmlns:a="http://schemas.openxmlformats.org/drawingml/2006/main">
+          <a:lstStyle>
             <a:defPPr algn="l">
               <a:defRPr sz="2100" b="0">
                 <a:solidFill>
@@ -1958,44 +1923,46 @@
               <a:defRPr/>
             </a:lvl9pPr>
           </a:lstStyle>
-          <a:p xmlns:a="http://schemas.openxmlformats.org/drawingml/2006/main"/>
+          <a:p>
+            <a:endParaRPr/>
+          </a:p>
         </p:txBody>
       </p:sp>
       <p:sp>
         <p:nvSpPr>
           <p:cNvPr id="3" name="Right column">
-            <a:extLst xmlns:a="http://schemas.openxmlformats.org/drawingml/2006/main">
+            <a:extLst>
               <a:ext uri="{FF2B5EF4-FFF2-40B4-BE49-F238E27FC236}">
                 <a16:creationId xmlns:a16="http://schemas.microsoft.com/office/drawing/2014/main" id="{C1C8FFBE-B572-4C8D-B380-DB4006F0E723}"/>
               </a:ext>
             </a:extLst>
           </p:cNvPr>
           <p:cNvSpPr>
-            <a:spLocks xmlns:a="http://schemas.openxmlformats.org/drawingml/2006/main" noGrp="1"/>
+            <a:spLocks noGrp="1"/>
           </p:cNvSpPr>
           <p:nvPr>
             <p:ph type="body" idx="2"/>
           </p:nvPr>
         </p:nvSpPr>
         <p:spPr>
-          <a:xfrm xmlns:a="http://schemas.openxmlformats.org/drawingml/2006/main">
+          <a:xfrm>
             <a:off x="6477000" y="1905000"/>
             <a:ext cx="5029200" cy="4267200"/>
           </a:xfrm>
-          <a:prstGeom xmlns:a="http://schemas.openxmlformats.org/drawingml/2006/main" prst="rect">
-            <a:avLst/>
-          </a:prstGeom>
-          <a:noFill xmlns:a="http://schemas.openxmlformats.org/drawingml/2006/main"/>
-          <a:ln xmlns:a="http://schemas.openxmlformats.org/drawingml/2006/main">
+          <a:prstGeom prst="rect">
+            <a:avLst/>
+          </a:prstGeom>
+          <a:noFill/>
+          <a:ln>
             <a:noFill/>
             <a:prstDash val="solid"/>
           </a:ln>
         </p:spPr>
         <p:txBody>
-          <a:bodyPr xmlns:a="http://schemas.openxmlformats.org/drawingml/2006/main" wrap="square" lIns="0" tIns="0" rIns="0" bIns="0" anchor="t">
+          <a:bodyPr wrap="square" lIns="0" tIns="0" rIns="0" bIns="0" anchor="t">
             <a:normAutofit/>
           </a:bodyPr>
-          <a:lstStyle xmlns:a="http://schemas.openxmlformats.org/drawingml/2006/main">
+          <a:lstStyle>
             <a:defPPr algn="l">
               <a:defRPr sz="2100" b="0">
                 <a:solidFill>
@@ -2124,16 +2091,21 @@
               <a:defRPr/>
             </a:lvl9pPr>
           </a:lstStyle>
-          <a:p xmlns:a="http://schemas.openxmlformats.org/drawingml/2006/main"/>
+          <a:p>
+            <a:endParaRPr/>
+          </a:p>
         </p:txBody>
       </p:sp>
     </p:spTree>
   </p:cSld>
+  <p:clrMapOvr>
+    <a:masterClrMapping/>
+  </p:clrMapOvr>
 </p:sldLayout>
 </file>
 
 <file path=ppt/slideLayouts/slideLayout5.xml><?xml version="1.0" encoding="utf-8"?>
-<p:sldLayout xmlns:p="http://schemas.openxmlformats.org/presentationml/2006/main">
+<p:sldLayout xmlns:a="http://schemas.openxmlformats.org/drawingml/2006/main" xmlns:r="http://schemas.openxmlformats.org/officeDocument/2006/relationships" xmlns:p="http://schemas.openxmlformats.org/presentationml/2006/main">
   <p:cSld name="Title and One Column">
     <p:spTree>
       <p:nvGrpSpPr>
@@ -2142,43 +2114,48 @@
         <p:nvPr/>
       </p:nvGrpSpPr>
       <p:grpSpPr>
-        <a:xfrm xmlns:a="http://schemas.openxmlformats.org/drawingml/2006/main"/>
+        <a:xfrm>
+          <a:off x="0" y="0"/>
+          <a:ext cx="0" cy="0"/>
+          <a:chOff x="0" y="0"/>
+          <a:chExt cx="0" cy="0"/>
+        </a:xfrm>
       </p:grpSpPr>
       <p:sp>
         <p:nvSpPr>
           <p:cNvPr id="3" name="Title">
-            <a:extLst xmlns:a="http://schemas.openxmlformats.org/drawingml/2006/main">
+            <a:extLst>
               <a:ext uri="{FF2B5EF4-FFF2-40B4-BE49-F238E27FC236}">
                 <a16:creationId xmlns:a16="http://schemas.microsoft.com/office/drawing/2014/main" id="{649FF770-A7B3-4B67-9CB7-B45E1D375076}"/>
               </a:ext>
             </a:extLst>
           </p:cNvPr>
           <p:cNvSpPr>
-            <a:spLocks xmlns:a="http://schemas.openxmlformats.org/drawingml/2006/main" noGrp="1"/>
+            <a:spLocks noGrp="1"/>
           </p:cNvSpPr>
           <p:nvPr>
-            <p:ph type="title" idx="0"/>
+            <p:ph type="title"/>
           </p:nvPr>
         </p:nvSpPr>
         <p:spPr>
-          <a:xfrm xmlns:a="http://schemas.openxmlformats.org/drawingml/2006/main">
+          <a:xfrm>
             <a:off x="685800" y="533400"/>
             <a:ext cx="10820400" cy="838200"/>
           </a:xfrm>
-          <a:prstGeom xmlns:a="http://schemas.openxmlformats.org/drawingml/2006/main" prst="rect">
-            <a:avLst/>
-          </a:prstGeom>
-          <a:noFill xmlns:a="http://schemas.openxmlformats.org/drawingml/2006/main"/>
-          <a:ln xmlns:a="http://schemas.openxmlformats.org/drawingml/2006/main">
+          <a:prstGeom prst="rect">
+            <a:avLst/>
+          </a:prstGeom>
+          <a:noFill/>
+          <a:ln>
             <a:noFill/>
             <a:prstDash val="solid"/>
           </a:ln>
         </p:spPr>
         <p:txBody>
-          <a:bodyPr xmlns:a="http://schemas.openxmlformats.org/drawingml/2006/main" wrap="square" lIns="0" tIns="0" rIns="0" bIns="0" anchor="t">
+          <a:bodyPr wrap="square" lIns="0" tIns="0" rIns="0" bIns="0" anchor="t">
             <a:normAutofit/>
           </a:bodyPr>
-          <a:lstStyle xmlns:a="http://schemas.openxmlformats.org/drawingml/2006/main">
+          <a:lstStyle>
             <a:defPPr algn="l">
               <a:defRPr sz="3300" b="1">
                 <a:solidFill>
@@ -2307,44 +2284,46 @@
               <a:defRPr/>
             </a:lvl9pPr>
           </a:lstStyle>
-          <a:p xmlns:a="http://schemas.openxmlformats.org/drawingml/2006/main"/>
+          <a:p>
+            <a:endParaRPr/>
+          </a:p>
         </p:txBody>
       </p:sp>
       <p:sp>
         <p:nvSpPr>
           <p:cNvPr id="2" name="Left column">
-            <a:extLst xmlns:a="http://schemas.openxmlformats.org/drawingml/2006/main">
+            <a:extLst>
               <a:ext uri="{FF2B5EF4-FFF2-40B4-BE49-F238E27FC236}">
                 <a16:creationId xmlns:a16="http://schemas.microsoft.com/office/drawing/2014/main" id="{B8BA685A-D9C6-4504-985D-0F7D56F611D6}"/>
               </a:ext>
             </a:extLst>
           </p:cNvPr>
           <p:cNvSpPr>
-            <a:spLocks xmlns:a="http://schemas.openxmlformats.org/drawingml/2006/main" noGrp="1"/>
+            <a:spLocks noGrp="1"/>
           </p:cNvSpPr>
           <p:nvPr>
             <p:ph type="body" idx="1"/>
           </p:nvPr>
         </p:nvSpPr>
         <p:spPr>
-          <a:xfrm xmlns:a="http://schemas.openxmlformats.org/drawingml/2006/main">
+          <a:xfrm>
             <a:off x="685800" y="1905000"/>
             <a:ext cx="5029200" cy="4267200"/>
           </a:xfrm>
-          <a:prstGeom xmlns:a="http://schemas.openxmlformats.org/drawingml/2006/main" prst="rect">
-            <a:avLst/>
-          </a:prstGeom>
-          <a:noFill xmlns:a="http://schemas.openxmlformats.org/drawingml/2006/main"/>
-          <a:ln xmlns:a="http://schemas.openxmlformats.org/drawingml/2006/main">
+          <a:prstGeom prst="rect">
+            <a:avLst/>
+          </a:prstGeom>
+          <a:noFill/>
+          <a:ln>
             <a:noFill/>
             <a:prstDash val="solid"/>
           </a:ln>
         </p:spPr>
         <p:txBody>
-          <a:bodyPr xmlns:a="http://schemas.openxmlformats.org/drawingml/2006/main" wrap="square" lIns="0" tIns="0" rIns="0" bIns="0" anchor="t">
+          <a:bodyPr wrap="square" lIns="0" tIns="0" rIns="0" bIns="0" anchor="t">
             <a:normAutofit/>
           </a:bodyPr>
-          <a:lstStyle xmlns:a="http://schemas.openxmlformats.org/drawingml/2006/main">
+          <a:lstStyle>
             <a:defPPr algn="l">
               <a:defRPr sz="2250" b="0">
                 <a:solidFill>
@@ -2473,16 +2452,21 @@
               <a:defRPr/>
             </a:lvl9pPr>
           </a:lstStyle>
-          <a:p xmlns:a="http://schemas.openxmlformats.org/drawingml/2006/main"/>
+          <a:p>
+            <a:endParaRPr/>
+          </a:p>
         </p:txBody>
       </p:sp>
     </p:spTree>
   </p:cSld>
+  <p:clrMapOvr>
+    <a:masterClrMapping/>
+  </p:clrMapOvr>
 </p:sldLayout>
 </file>
 
 <file path=ppt/slideLayouts/slideLayout6.xml><?xml version="1.0" encoding="utf-8"?>
-<p:sldLayout xmlns:p="http://schemas.openxmlformats.org/presentationml/2006/main" type="blank">
+<p:sldLayout xmlns:a="http://schemas.openxmlformats.org/drawingml/2006/main" xmlns:r="http://schemas.openxmlformats.org/officeDocument/2006/relationships" xmlns:p="http://schemas.openxmlformats.org/presentationml/2006/main" type="blank">
   <p:cSld name="Blank">
     <p:spTree>
       <p:nvGrpSpPr>
@@ -2491,19 +2475,27 @@
         <p:nvPr/>
       </p:nvGrpSpPr>
       <p:grpSpPr>
-        <a:xfrm xmlns:a="http://schemas.openxmlformats.org/drawingml/2006/main"/>
+        <a:xfrm>
+          <a:off x="0" y="0"/>
+          <a:ext cx="0" cy="0"/>
+          <a:chOff x="0" y="0"/>
+          <a:chExt cx="0" cy="0"/>
+        </a:xfrm>
       </p:grpSpPr>
     </p:spTree>
   </p:cSld>
+  <p:clrMapOvr>
+    <a:masterClrMapping/>
+  </p:clrMapOvr>
 </p:sldLayout>
 </file>
 
 <file path=ppt/slideMasters/slideMaster1.xml><?xml version="1.0" encoding="utf-8"?>
-<p:sldMaster xmlns:p="http://schemas.openxmlformats.org/presentationml/2006/main">
+<p:sldMaster xmlns:a="http://schemas.openxmlformats.org/drawingml/2006/main" xmlns:r="http://schemas.openxmlformats.org/officeDocument/2006/relationships" xmlns:p="http://schemas.openxmlformats.org/presentationml/2006/main">
   <p:cSld name="Master">
     <p:bg>
       <p:bgRef idx="1001">
-        <a:schemeClr xmlns:a="http://schemas.openxmlformats.org/drawingml/2006/main" val="bg1"/>
+        <a:schemeClr val="bg1"/>
       </p:bgRef>
     </p:bg>
     <p:spTree>
@@ -2513,22 +2505,27 @@
         <p:nvPr/>
       </p:nvGrpSpPr>
       <p:grpSpPr>
-        <a:xfrm xmlns:a="http://schemas.openxmlformats.org/drawingml/2006/main"/>
+        <a:xfrm>
+          <a:off x="0" y="0"/>
+          <a:ext cx="0" cy="0"/>
+          <a:chOff x="0" y="0"/>
+          <a:chExt cx="0" cy="0"/>
+        </a:xfrm>
       </p:grpSpPr>
     </p:spTree>
   </p:cSld>
   <p:clrMap bg1="lt1" tx1="dk1" bg2="lt2" tx2="dk2" accent1="accent1" accent2="accent2" accent3="accent3" accent4="accent4" accent5="accent5" accent6="accent6" hlink="hlink" folHlink="folHlink"/>
   <p:sldLayoutIdLst>
-    <p:sldLayoutId xmlns:r="http://schemas.openxmlformats.org/officeDocument/2006/relationships" id="2147483649" r:id="R76dfcb92fc774555"/>
-    <p:sldLayoutId xmlns:r="http://schemas.openxmlformats.org/officeDocument/2006/relationships" id="2147483650" r:id="R0d9f1d370ca44b96"/>
-    <p:sldLayoutId xmlns:r="http://schemas.openxmlformats.org/officeDocument/2006/relationships" id="2147483651" r:id="R533373000c1b4508"/>
-    <p:sldLayoutId xmlns:r="http://schemas.openxmlformats.org/officeDocument/2006/relationships" id="2147483652" r:id="R232328a8d7ee4839"/>
-    <p:sldLayoutId xmlns:r="http://schemas.openxmlformats.org/officeDocument/2006/relationships" id="2147483653" r:id="R6f84606337e1418f"/>
-    <p:sldLayoutId xmlns:r="http://schemas.openxmlformats.org/officeDocument/2006/relationships" id="2147483654" r:id="Rb5dd7c9d189a4cbd"/>
+    <p:sldLayoutId id="2147483649" r:id="rId1"/>
+    <p:sldLayoutId id="2147483650" r:id="rId2"/>
+    <p:sldLayoutId id="2147483651" r:id="rId3"/>
+    <p:sldLayoutId id="2147483652" r:id="rId4"/>
+    <p:sldLayoutId id="2147483653" r:id="rId5"/>
+    <p:sldLayoutId id="2147483654" r:id="rId6"/>
   </p:sldLayoutIdLst>
   <p:txStyles>
     <p:titleStyle>
-      <a:lvl1pPr xmlns:a="http://schemas.openxmlformats.org/drawingml/2006/main" algn="l">
+      <a:lvl1pPr algn="l">
         <a:lnSpc>
           <a:spcPct val="90000"/>
         </a:lnSpc>
@@ -2547,7 +2544,7 @@
       </a:lvl1pPr>
     </p:titleStyle>
     <p:bodyStyle>
-      <a:lvl1pPr xmlns:a="http://schemas.openxmlformats.org/drawingml/2006/main" marL="228600" indent="-228600" algn="l">
+      <a:lvl1pPr marL="228600" indent="-228600" algn="l">
         <a:lnSpc>
           <a:spcPct val="90000"/>
         </a:lnSpc>
@@ -2564,7 +2561,7 @@
           <a:cs typeface="+mn-lt"/>
         </a:defRPr>
       </a:lvl1pPr>
-      <a:lvl2pPr xmlns:a="http://schemas.openxmlformats.org/drawingml/2006/main" marL="685800" indent="-228600" algn="l">
+      <a:lvl2pPr marL="685800" indent="-228600" algn="l">
         <a:lnSpc>
           <a:spcPct val="90000"/>
         </a:lnSpc>
@@ -2581,7 +2578,7 @@
           <a:cs typeface="+mn-lt"/>
         </a:defRPr>
       </a:lvl2pPr>
-      <a:lvl3pPr xmlns:a="http://schemas.openxmlformats.org/drawingml/2006/main" marL="1143000" indent="-228600" algn="l">
+      <a:lvl3pPr marL="1143000" indent="-228600" algn="l">
         <a:lnSpc>
           <a:spcPct val="90000"/>
         </a:lnSpc>
@@ -2598,7 +2595,7 @@
           <a:cs typeface="+mn-lt"/>
         </a:defRPr>
       </a:lvl3pPr>
-      <a:lvl4pPr xmlns:a="http://schemas.openxmlformats.org/drawingml/2006/main" marL="1600200" indent="-228600" algn="l">
+      <a:lvl4pPr marL="1600200" indent="-228600" algn="l">
         <a:lnSpc>
           <a:spcPct val="90000"/>
         </a:lnSpc>
@@ -2615,7 +2612,7 @@
           <a:cs typeface="+mn-lt"/>
         </a:defRPr>
       </a:lvl4pPr>
-      <a:lvl5pPr xmlns:a="http://schemas.openxmlformats.org/drawingml/2006/main" marL="2057400" indent="-228600" algn="l">
+      <a:lvl5pPr marL="2057400" indent="-228600" algn="l">
         <a:lnSpc>
           <a:spcPct val="90000"/>
         </a:lnSpc>
@@ -2632,7 +2629,7 @@
           <a:cs typeface="+mn-lt"/>
         </a:defRPr>
       </a:lvl5pPr>
-      <a:lvl6pPr xmlns:a="http://schemas.openxmlformats.org/drawingml/2006/main" marL="2514600" indent="-228600" algn="l">
+      <a:lvl6pPr marL="2514600" indent="-228600" algn="l">
         <a:lnSpc>
           <a:spcPct val="90000"/>
         </a:lnSpc>
@@ -2649,7 +2646,7 @@
           <a:cs typeface="+mn-lt"/>
         </a:defRPr>
       </a:lvl6pPr>
-      <a:lvl7pPr xmlns:a="http://schemas.openxmlformats.org/drawingml/2006/main" marL="2971800" indent="-228600" algn="l">
+      <a:lvl7pPr marL="2971800" indent="-228600" algn="l">
         <a:lnSpc>
           <a:spcPct val="90000"/>
         </a:lnSpc>
@@ -2666,7 +2663,7 @@
           <a:cs typeface="+mn-lt"/>
         </a:defRPr>
       </a:lvl7pPr>
-      <a:lvl8pPr xmlns:a="http://schemas.openxmlformats.org/drawingml/2006/main" marL="3429000" indent="-228600" algn="l">
+      <a:lvl8pPr marL="3429000" indent="-228600" algn="l">
         <a:lnSpc>
           <a:spcPct val="90000"/>
         </a:lnSpc>
@@ -2683,7 +2680,7 @@
           <a:cs typeface="+mn-lt"/>
         </a:defRPr>
       </a:lvl8pPr>
-      <a:lvl9pPr xmlns:a="http://schemas.openxmlformats.org/drawingml/2006/main" marL="3886200" indent="-228600" algn="l">
+      <a:lvl9pPr marL="3886200" indent="-228600" algn="l">
         <a:lnSpc>
           <a:spcPct val="90000"/>
         </a:lnSpc>
@@ -2702,7 +2699,7 @@
       </a:lvl9pPr>
     </p:bodyStyle>
     <p:otherStyle>
-      <a:lvl1pPr xmlns:a="http://schemas.openxmlformats.org/drawingml/2006/main" marL="0" algn="l">
+      <a:lvl1pPr marL="0" algn="l">
         <a:buNone/>
         <a:defRPr sz="1800">
           <a:solidFill>
@@ -2713,7 +2710,7 @@
           <a:cs typeface="+mn-lt"/>
         </a:defRPr>
       </a:lvl1pPr>
-      <a:lvl2pPr xmlns:a="http://schemas.openxmlformats.org/drawingml/2006/main" marL="457200" algn="l">
+      <a:lvl2pPr marL="457200" algn="l">
         <a:buNone/>
         <a:defRPr sz="1800">
           <a:solidFill>
@@ -2724,7 +2721,7 @@
           <a:cs typeface="+mn-lt"/>
         </a:defRPr>
       </a:lvl2pPr>
-      <a:lvl3pPr xmlns:a="http://schemas.openxmlformats.org/drawingml/2006/main" marL="914400" algn="l">
+      <a:lvl3pPr marL="914400" algn="l">
         <a:buNone/>
         <a:defRPr sz="1800">
           <a:solidFill>
@@ -2735,7 +2732,7 @@
           <a:cs typeface="+mn-lt"/>
         </a:defRPr>
       </a:lvl3pPr>
-      <a:lvl4pPr xmlns:a="http://schemas.openxmlformats.org/drawingml/2006/main" marL="1371600" algn="l">
+      <a:lvl4pPr marL="1371600" algn="l">
         <a:buNone/>
         <a:defRPr sz="1800">
           <a:solidFill>
@@ -2746,7 +2743,7 @@
           <a:cs typeface="+mn-lt"/>
         </a:defRPr>
       </a:lvl4pPr>
-      <a:lvl5pPr xmlns:a="http://schemas.openxmlformats.org/drawingml/2006/main" marL="1828800" algn="l">
+      <a:lvl5pPr marL="1828800" algn="l">
         <a:buNone/>
         <a:defRPr sz="1800">
           <a:solidFill>
@@ -2757,7 +2754,7 @@
           <a:cs typeface="+mn-lt"/>
         </a:defRPr>
       </a:lvl5pPr>
-      <a:lvl6pPr xmlns:a="http://schemas.openxmlformats.org/drawingml/2006/main" marL="2286000" algn="l">
+      <a:lvl6pPr marL="2286000" algn="l">
         <a:buNone/>
         <a:defRPr sz="1800">
           <a:solidFill>
@@ -2768,7 +2765,7 @@
           <a:cs typeface="+mn-lt"/>
         </a:defRPr>
       </a:lvl6pPr>
-      <a:lvl7pPr xmlns:a="http://schemas.openxmlformats.org/drawingml/2006/main" marL="2743200" algn="l">
+      <a:lvl7pPr marL="2743200" algn="l">
         <a:buNone/>
         <a:defRPr sz="1800">
           <a:solidFill>
@@ -2779,7 +2776,7 @@
           <a:cs typeface="+mn-lt"/>
         </a:defRPr>
       </a:lvl7pPr>
-      <a:lvl8pPr xmlns:a="http://schemas.openxmlformats.org/drawingml/2006/main" marL="3200400" algn="l">
+      <a:lvl8pPr marL="3200400" algn="l">
         <a:buNone/>
         <a:defRPr sz="1800">
           <a:solidFill>
@@ -2790,7 +2787,7 @@
           <a:cs typeface="+mn-lt"/>
         </a:defRPr>
       </a:lvl8pPr>
-      <a:lvl9pPr xmlns:a="http://schemas.openxmlformats.org/drawingml/2006/main" marL="3657600" algn="l">
+      <a:lvl9pPr marL="3657600" algn="l">
         <a:buNone/>
         <a:defRPr sz="1800">
           <a:solidFill>
@@ -2806,259 +2803,15 @@
 </p:sldMaster>
 </file>
 
-<file path=ppt/slideMasters/theme/theme2.xml><?xml version="1.0" encoding="utf-8"?>
-<a:theme xmlns:a="http://schemas.openxmlformats.org/drawingml/2006/main" name="ChatGPT">
-  <a:themeElements>
-    <a:clrScheme name="ChatGPT">
-      <a:dk1>
-        <a:srgbClr val="000000"/>
-      </a:dk1>
-      <a:lt1>
-        <a:srgbClr val="FFFFFF"/>
-      </a:lt1>
-      <a:dk2>
-        <a:srgbClr val="0E2841"/>
-      </a:dk2>
-      <a:lt2>
-        <a:srgbClr val="E8E8E8"/>
-      </a:lt2>
-      <a:accent1>
-        <a:srgbClr val="156082"/>
-      </a:accent1>
-      <a:accent2>
-        <a:srgbClr val="E97132"/>
-      </a:accent2>
-      <a:accent3>
-        <a:srgbClr val="196B24"/>
-      </a:accent3>
-      <a:accent4>
-        <a:srgbClr val="0F9ED5"/>
-      </a:accent4>
-      <a:accent5>
-        <a:srgbClr val="A02B93"/>
-      </a:accent5>
-      <a:accent6>
-        <a:srgbClr val="4EA72E"/>
-      </a:accent6>
-      <a:hlink>
-        <a:srgbClr val="467886"/>
-      </a:hlink>
-      <a:folHlink>
-        <a:srgbClr val="96607D"/>
-      </a:folHlink>
-    </a:clrScheme>
-    <a:fontScheme name="">
-      <a:majorFont>
-        <a:latin typeface="Aptos"/>
-        <a:ea typeface=""/>
-        <a:cs typeface=""/>
-      </a:majorFont>
-      <a:minorFont>
-        <a:latin typeface="Aptos"/>
-        <a:ea typeface=""/>
-        <a:cs typeface=""/>
-      </a:minorFont>
-    </a:fontScheme>
-    <a:fmtScheme name="ChatGPT">
-      <a:fillStyleLst>
-        <a:solidFill>
-          <a:schemeClr val="phClr"/>
-        </a:solidFill>
-        <a:gradFill>
-          <a:gsLst>
-            <a:gs pos="0">
-              <a:schemeClr val="phClr">
-                <a:tint val="67000"/>
-                <a:lumMod val="110000"/>
-                <a:satMod val="105000"/>
-              </a:schemeClr>
-            </a:gs>
-            <a:gs pos="50000">
-              <a:schemeClr val="phClr">
-                <a:tint val="73000"/>
-                <a:lumMod val="105000"/>
-                <a:satMod val="103000"/>
-              </a:schemeClr>
-            </a:gs>
-            <a:gs pos="100000">
-              <a:schemeClr val="phClr">
-                <a:tint val="81000"/>
-                <a:lumMod val="105000"/>
-                <a:satMod val="109000"/>
-              </a:schemeClr>
-            </a:gs>
-          </a:gsLst>
-          <a:lin ang="5400000" scaled="0"/>
-        </a:gradFill>
-        <a:gradFill>
-          <a:gsLst>
-            <a:gs pos="0">
-              <a:schemeClr val="phClr">
-                <a:tint val="94000"/>
-                <a:lumMod val="102000"/>
-                <a:satMod val="103000"/>
-              </a:schemeClr>
-            </a:gs>
-            <a:gs pos="50000">
-              <a:schemeClr val="phClr">
-                <a:shade val="100000"/>
-                <a:lumMod val="100000"/>
-                <a:satMod val="110000"/>
-              </a:schemeClr>
-            </a:gs>
-            <a:gs pos="100000">
-              <a:schemeClr val="phClr">
-                <a:shade val="78000"/>
-                <a:lumMod val="99000"/>
-                <a:satMod val="120000"/>
-              </a:schemeClr>
-            </a:gs>
-          </a:gsLst>
-          <a:lin ang="5400000" scaled="0"/>
-        </a:gradFill>
-      </a:fillStyleLst>
-      <a:lnStyleLst>
-        <a:ln w="12700">
-          <a:solidFill>
-            <a:schemeClr val="phClr"/>
-          </a:solidFill>
-          <a:prstDash val="solid"/>
-        </a:ln>
-        <a:ln w="19050">
-          <a:solidFill>
-            <a:schemeClr val="phClr"/>
-          </a:solidFill>
-          <a:prstDash val="solid"/>
-        </a:ln>
-        <a:ln w="25400">
-          <a:solidFill>
-            <a:schemeClr val="phClr"/>
-          </a:solidFill>
-          <a:prstDash val="solid"/>
-        </a:ln>
-      </a:lnStyleLst>
-      <a:effectStyleLst>
-        <a:effectStyle>
-          <a:effectLst/>
-        </a:effectStyle>
-        <a:effectStyle>
-          <a:effectLst/>
-        </a:effectStyle>
-        <a:effectStyle>
-          <a:effectLst>
-            <a:outerShdw blurRad="57150" dist="19050" dir="5400000">
-              <a:srgbClr val="000000">
-                <a:alpha val="16000"/>
-              </a:srgbClr>
-            </a:outerShdw>
-          </a:effectLst>
-        </a:effectStyle>
-        <a:effectStyle>
-          <a:effectLst>
-            <a:outerShdw blurRad="19050" dist="9525" dir="5400000">
-              <a:srgbClr val="000000">
-                <a:alpha val="6000"/>
-              </a:srgbClr>
-            </a:outerShdw>
-          </a:effectLst>
-        </a:effectStyle>
-        <a:effectStyle>
-          <a:effectLst>
-            <a:outerShdw blurRad="28575" dist="9525" dir="5400000">
-              <a:srgbClr val="000000">
-                <a:alpha val="8000"/>
-              </a:srgbClr>
-            </a:outerShdw>
-          </a:effectLst>
-        </a:effectStyle>
-        <a:effectStyle>
-          <a:effectLst>
-            <a:outerShdw blurRad="57150" dist="19050" dir="5400000">
-              <a:srgbClr val="000000">
-                <a:alpha val="10000"/>
-              </a:srgbClr>
-            </a:outerShdw>
-          </a:effectLst>
-        </a:effectStyle>
-        <a:effectStyle>
-          <a:effectLst>
-            <a:outerShdw blurRad="114300" dist="38100" dir="5400000">
-              <a:srgbClr val="000000">
-                <a:alpha val="12000"/>
-              </a:srgbClr>
-            </a:outerShdw>
-          </a:effectLst>
-        </a:effectStyle>
-        <a:effectStyle>
-          <a:effectLst>
-            <a:outerShdw blurRad="171450" dist="57150" dir="5400000">
-              <a:srgbClr val="000000">
-                <a:alpha val="16000"/>
-              </a:srgbClr>
-            </a:outerShdw>
-          </a:effectLst>
-        </a:effectStyle>
-        <a:effectStyle>
-          <a:effectLst>
-            <a:outerShdw blurRad="266700" dist="95250" dir="5400000">
-              <a:srgbClr val="000000">
-                <a:alpha val="24000"/>
-              </a:srgbClr>
-            </a:outerShdw>
-          </a:effectLst>
-        </a:effectStyle>
-      </a:effectStyleLst>
-      <a:bgFillStyleLst>
-        <a:solidFill>
-          <a:schemeClr val="phClr"/>
-        </a:solidFill>
-        <a:solidFill>
-          <a:schemeClr val="phClr">
-            <a:tint val="95000"/>
-            <a:satMod val="170000"/>
-          </a:schemeClr>
-        </a:solidFill>
-        <a:gradFill>
-          <a:gsLst>
-            <a:gs pos="0">
-              <a:schemeClr val="phClr">
-                <a:tint val="93000"/>
-                <a:shade val="98000"/>
-                <a:lumMod val="102000"/>
-                <a:satMod val="150000"/>
-              </a:schemeClr>
-            </a:gs>
-            <a:gs pos="50000">
-              <a:schemeClr val="phClr">
-                <a:tint val="98000"/>
-                <a:shade val="90000"/>
-                <a:lumMod val="103000"/>
-                <a:satMod val="130000"/>
-              </a:schemeClr>
-            </a:gs>
-            <a:gs pos="100000">
-              <a:schemeClr val="phClr">
-                <a:shade val="63000"/>
-                <a:satMod val="120000"/>
-              </a:schemeClr>
-            </a:gs>
-          </a:gsLst>
-          <a:lin ang="5400000" scaled="0"/>
-        </a:gradFill>
-      </a:bgFillStyleLst>
-    </a:fmtScheme>
-  </a:themeElements>
-</a:theme>
-</file>
-
 <file path=ppt/slides/slide1.xml><?xml version="1.0" encoding="utf-8"?>
-<p:sld xmlns:p="http://schemas.openxmlformats.org/presentationml/2006/main">
+<p:sld xmlns:a="http://schemas.openxmlformats.org/drawingml/2006/main" xmlns:r="http://schemas.openxmlformats.org/officeDocument/2006/relationships" xmlns:p="http://schemas.openxmlformats.org/presentationml/2006/main">
   <p:cSld>
     <p:bg>
       <p:bgPr>
-        <a:solidFill xmlns:a="http://schemas.openxmlformats.org/drawingml/2006/main">
+        <a:solidFill>
           <a:srgbClr val="12304A"/>
         </a:solidFill>
+        <a:effectLst/>
       </p:bgPr>
     </p:bg>
     <p:spTree>
@@ -3068,39 +2821,44 @@
         <p:nvPr/>
       </p:nvGrpSpPr>
       <p:grpSpPr>
-        <a:xfrm xmlns:a="http://schemas.openxmlformats.org/drawingml/2006/main"/>
+        <a:xfrm>
+          <a:off x="0" y="0"/>
+          <a:ext cx="0" cy="0"/>
+          <a:chOff x="0" y="0"/>
+          <a:chExt cx="0" cy="0"/>
+        </a:xfrm>
       </p:grpSpPr>
       <p:sp>
         <p:nvSpPr>
-          <p:cNvPr id="5" name="">
-            <a:extLst xmlns:a="http://schemas.openxmlformats.org/drawingml/2006/main">
+          <p:cNvPr id="5" name="Rectángulo 4">
+            <a:extLst>
               <a:ext uri="{FF2B5EF4-FFF2-40B4-BE49-F238E27FC236}">
                 <a16:creationId xmlns:a16="http://schemas.microsoft.com/office/drawing/2014/main" id="{E23AB6EF-F68F-48A5-9253-70CE4F672E39}"/>
               </a:ext>
             </a:extLst>
           </p:cNvPr>
           <p:cNvSpPr>
-            <a:spLocks xmlns:a="http://schemas.openxmlformats.org/drawingml/2006/main" noGrp="1"/>
+            <a:spLocks noGrp="1"/>
           </p:cNvSpPr>
           <p:nvPr/>
         </p:nvSpPr>
         <p:spPr>
-          <a:xfrm xmlns:a="http://schemas.openxmlformats.org/drawingml/2006/main">
+          <a:xfrm>
             <a:off x="685800" y="1428750"/>
             <a:ext cx="10287000" cy="714375"/>
           </a:xfrm>
-          <a:prstGeom xmlns:a="http://schemas.openxmlformats.org/drawingml/2006/main" prst="rect">
-            <a:avLst/>
-          </a:prstGeom>
-          <a:noFill xmlns:a="http://schemas.openxmlformats.org/drawingml/2006/main"/>
-          <a:ln xmlns:a="http://schemas.openxmlformats.org/drawingml/2006/main" w="0">
+          <a:prstGeom prst="rect">
+            <a:avLst/>
+          </a:prstGeom>
+          <a:noFill/>
+          <a:ln w="0">
             <a:noFill/>
             <a:prstDash val="solid"/>
           </a:ln>
         </p:spPr>
         <p:txBody>
-          <a:bodyPr xmlns:a="http://schemas.openxmlformats.org/drawingml/2006/main" anchor="ctr"/>
-          <a:lstStyle xmlns:a="http://schemas.openxmlformats.org/drawingml/2006/main">
+          <a:bodyPr anchor="ctr"/>
+          <a:lstStyle>
             <a:defPPr>
               <a:defRPr sz="3600" b="1">
                 <a:solidFill>
@@ -3109,7 +2867,7 @@
               </a:defRPr>
             </a:defPPr>
           </a:lstStyle>
-          <a:p xmlns:a="http://schemas.openxmlformats.org/drawingml/2006/main">
+          <a:p>
             <a:pPr>
               <a:buNone/>
               <a:defRPr sz="3600" b="1">
@@ -3119,47 +2877,68 @@
               </a:defRPr>
             </a:pPr>
             <a:r>
-              <a:rPr sz="3600" b="1">
+              <a:rPr sz="3600" b="1" dirty="0" err="1">
                 <a:solidFill>
                   <a:srgbClr val="FFFFFF"/>
                 </a:solidFill>
               </a:rPr>
-              <a:t>Automatización de pruebas</a:t>
+              <a:t>Automatización</a:t>
             </a:r>
-          </a:p>
-        </p:txBody>
-      </p:sp>
-      <p:sp>
-        <p:nvSpPr>
-          <p:cNvPr id="2" name="">
-            <a:extLst xmlns:a="http://schemas.openxmlformats.org/drawingml/2006/main">
+            <a:r>
+              <a:rPr sz="3600" b="1" dirty="0">
+                <a:solidFill>
+                  <a:srgbClr val="FFFFFF"/>
+                </a:solidFill>
+              </a:rPr>
+              <a:t> de </a:t>
+            </a:r>
+            <a:r>
+              <a:rPr sz="3600" b="1" dirty="0" err="1">
+                <a:solidFill>
+                  <a:srgbClr val="FFFFFF"/>
+                </a:solidFill>
+              </a:rPr>
+              <a:t>pruebas</a:t>
+            </a:r>
+            <a:endParaRPr sz="3600" b="1" dirty="0">
+              <a:solidFill>
+                <a:srgbClr val="FFFFFF"/>
+              </a:solidFill>
+            </a:endParaRPr>
+          </a:p>
+        </p:txBody>
+      </p:sp>
+      <p:sp>
+        <p:nvSpPr>
+          <p:cNvPr id="2" name="Rectángulo 1">
+            <a:extLst>
               <a:ext uri="{FF2B5EF4-FFF2-40B4-BE49-F238E27FC236}">
                 <a16:creationId xmlns:a16="http://schemas.microsoft.com/office/drawing/2014/main" id="{87E7E0EE-2AC5-4B66-A589-E4A5509087D2}"/>
               </a:ext>
             </a:extLst>
           </p:cNvPr>
           <p:cNvSpPr>
-            <a:spLocks xmlns:a="http://schemas.openxmlformats.org/drawingml/2006/main" noGrp="1"/>
+            <a:spLocks noGrp="1"/>
           </p:cNvSpPr>
           <p:nvPr/>
         </p:nvSpPr>
         <p:spPr>
-          <a:xfrm xmlns:a="http://schemas.openxmlformats.org/drawingml/2006/main">
+          <a:xfrm>
             <a:off x="723900" y="2333625"/>
             <a:ext cx="10001250" cy="476250"/>
           </a:xfrm>
-          <a:prstGeom xmlns:a="http://schemas.openxmlformats.org/drawingml/2006/main" prst="rect">
-            <a:avLst/>
-          </a:prstGeom>
-          <a:noFill xmlns:a="http://schemas.openxmlformats.org/drawingml/2006/main"/>
-          <a:ln xmlns:a="http://schemas.openxmlformats.org/drawingml/2006/main" w="0">
+          <a:prstGeom prst="rect">
+            <a:avLst/>
+          </a:prstGeom>
+          <a:noFill/>
+          <a:ln w="0">
             <a:noFill/>
             <a:prstDash val="solid"/>
           </a:ln>
         </p:spPr>
         <p:txBody>
-          <a:bodyPr xmlns:a="http://schemas.openxmlformats.org/drawingml/2006/main" anchor="ctr"/>
-          <a:lstStyle xmlns:a="http://schemas.openxmlformats.org/drawingml/2006/main">
+          <a:bodyPr anchor="ctr"/>
+          <a:lstStyle>
             <a:defPPr>
               <a:defRPr sz="1950" b="0">
                 <a:solidFill>
@@ -3168,7 +2947,7 @@
               </a:defRPr>
             </a:defPPr>
           </a:lstStyle>
-          <a:p xmlns:a="http://schemas.openxmlformats.org/drawingml/2006/main">
+          <a:p>
             <a:pPr>
               <a:buNone/>
               <a:defRPr sz="1950" b="0">
@@ -3190,35 +2969,35 @@
       </p:sp>
       <p:sp>
         <p:nvSpPr>
-          <p:cNvPr id="3" name="">
-            <a:extLst xmlns:a="http://schemas.openxmlformats.org/drawingml/2006/main">
+          <p:cNvPr id="3" name="Rectángulo 2">
+            <a:extLst>
               <a:ext uri="{FF2B5EF4-FFF2-40B4-BE49-F238E27FC236}">
                 <a16:creationId xmlns:a16="http://schemas.microsoft.com/office/drawing/2014/main" id="{9870D82B-2A3C-41EC-A38C-7852382411CB}"/>
               </a:ext>
             </a:extLst>
           </p:cNvPr>
           <p:cNvSpPr>
-            <a:spLocks xmlns:a="http://schemas.openxmlformats.org/drawingml/2006/main" noGrp="1"/>
+            <a:spLocks noGrp="1"/>
           </p:cNvSpPr>
           <p:nvPr/>
         </p:nvSpPr>
         <p:spPr>
-          <a:xfrm xmlns:a="http://schemas.openxmlformats.org/drawingml/2006/main">
+          <a:xfrm>
             <a:off x="723900" y="3238500"/>
             <a:ext cx="9525000" cy="381000"/>
           </a:xfrm>
-          <a:prstGeom xmlns:a="http://schemas.openxmlformats.org/drawingml/2006/main" prst="rect">
-            <a:avLst/>
-          </a:prstGeom>
-          <a:noFill xmlns:a="http://schemas.openxmlformats.org/drawingml/2006/main"/>
-          <a:ln xmlns:a="http://schemas.openxmlformats.org/drawingml/2006/main" w="0">
+          <a:prstGeom prst="rect">
+            <a:avLst/>
+          </a:prstGeom>
+          <a:noFill/>
+          <a:ln w="0">
             <a:noFill/>
             <a:prstDash val="solid"/>
           </a:ln>
         </p:spPr>
         <p:txBody>
-          <a:bodyPr xmlns:a="http://schemas.openxmlformats.org/drawingml/2006/main" anchor="ctr"/>
-          <a:lstStyle xmlns:a="http://schemas.openxmlformats.org/drawingml/2006/main">
+          <a:bodyPr anchor="ctr"/>
+          <a:lstStyle>
             <a:defPPr>
               <a:defRPr sz="1500" b="0">
                 <a:solidFill>
@@ -3227,7 +3006,7 @@
               </a:defRPr>
             </a:defPPr>
           </a:lstStyle>
-          <a:p xmlns:a="http://schemas.openxmlformats.org/drawingml/2006/main">
+          <a:p>
             <a:pPr>
               <a:buNone/>
               <a:defRPr sz="1500" b="0">
@@ -3249,35 +3028,35 @@
       </p:sp>
       <p:sp>
         <p:nvSpPr>
-          <p:cNvPr id="4" name="">
-            <a:extLst xmlns:a="http://schemas.openxmlformats.org/drawingml/2006/main">
+          <p:cNvPr id="4" name="Rectángulo 3">
+            <a:extLst>
               <a:ext uri="{FF2B5EF4-FFF2-40B4-BE49-F238E27FC236}">
                 <a16:creationId xmlns:a16="http://schemas.microsoft.com/office/drawing/2014/main" id="{61D32375-180C-4C1E-97CC-769003ADEDB5}"/>
               </a:ext>
             </a:extLst>
           </p:cNvPr>
           <p:cNvSpPr>
-            <a:spLocks xmlns:a="http://schemas.openxmlformats.org/drawingml/2006/main" noGrp="1"/>
+            <a:spLocks noGrp="1"/>
           </p:cNvSpPr>
           <p:nvPr/>
         </p:nvSpPr>
         <p:spPr>
-          <a:xfrm xmlns:a="http://schemas.openxmlformats.org/drawingml/2006/main">
-            <a:off x="723900" y="5524500"/>
-            <a:ext cx="10477500" cy="514350"/>
+          <a:xfrm>
+            <a:off x="723900" y="5004619"/>
+            <a:ext cx="10477500" cy="1034231"/>
           </a:xfrm>
-          <a:prstGeom xmlns:a="http://schemas.openxmlformats.org/drawingml/2006/main" prst="rect">
-            <a:avLst/>
-          </a:prstGeom>
-          <a:noFill xmlns:a="http://schemas.openxmlformats.org/drawingml/2006/main"/>
-          <a:ln xmlns:a="http://schemas.openxmlformats.org/drawingml/2006/main" w="0">
+          <a:prstGeom prst="rect">
+            <a:avLst/>
+          </a:prstGeom>
+          <a:noFill/>
+          <a:ln w="0">
             <a:noFill/>
             <a:prstDash val="solid"/>
           </a:ln>
         </p:spPr>
         <p:txBody>
-          <a:bodyPr xmlns:a="http://schemas.openxmlformats.org/drawingml/2006/main" anchor="ctr"/>
-          <a:lstStyle xmlns:a="http://schemas.openxmlformats.org/drawingml/2006/main">
+          <a:bodyPr anchor="ctr"/>
+          <a:lstStyle>
             <a:defPPr>
               <a:defRPr sz="1200" b="0">
                 <a:solidFill>
@@ -3286,7 +3065,7 @@
               </a:defRPr>
             </a:defPPr>
           </a:lstStyle>
-          <a:p xmlns:a="http://schemas.openxmlformats.org/drawingml/2006/main">
+          <a:p>
             <a:pPr>
               <a:buNone/>
               <a:defRPr sz="1200" b="0">
@@ -3296,12 +3075,106 @@
               </a:defRPr>
             </a:pPr>
             <a:r>
-              <a:rPr sz="1200" b="0">
+              <a:rPr sz="1400" b="0" dirty="0">
                 <a:solidFill>
                   <a:srgbClr val="D7E8F2"/>
                 </a:solidFill>
+                <a:latin typeface="+mj-lt"/>
               </a:rPr>
-              <a:t>Noemy Molina Garron  |  Wendy Ramirez Veizaga  |  Natalia Romero Cuqui  |  Alex Joshua Villegas Ibanez</a:t>
+              <a:t>Noemy Molina Garron </a:t>
+            </a:r>
+            <a:endParaRPr lang="es-BO" sz="1400" b="0" dirty="0">
+              <a:solidFill>
+                <a:srgbClr val="D7E8F2"/>
+              </a:solidFill>
+              <a:latin typeface="+mj-lt"/>
+            </a:endParaRPr>
+          </a:p>
+          <a:p>
+            <a:pPr>
+              <a:buNone/>
+              <a:defRPr sz="1200" b="0">
+                <a:solidFill>
+                  <a:srgbClr val="D7E8F2"/>
+                </a:solidFill>
+              </a:defRPr>
+            </a:pPr>
+            <a:r>
+              <a:rPr sz="1400" b="0" dirty="0">
+                <a:solidFill>
+                  <a:srgbClr val="D7E8F2"/>
+                </a:solidFill>
+                <a:latin typeface="+mj-lt"/>
+              </a:rPr>
+              <a:t>Wendy Ramirez Veizaga</a:t>
+            </a:r>
+            <a:endParaRPr lang="es-BO" sz="1400" b="0" dirty="0">
+              <a:solidFill>
+                <a:srgbClr val="D7E8F2"/>
+              </a:solidFill>
+              <a:latin typeface="+mj-lt"/>
+            </a:endParaRPr>
+          </a:p>
+          <a:p>
+            <a:pPr>
+              <a:buNone/>
+              <a:defRPr sz="1200" b="0">
+                <a:solidFill>
+                  <a:srgbClr val="D7E8F2"/>
+                </a:solidFill>
+              </a:defRPr>
+            </a:pPr>
+            <a:r>
+              <a:rPr sz="1400" b="0" dirty="0">
+                <a:solidFill>
+                  <a:srgbClr val="D7E8F2"/>
+                </a:solidFill>
+                <a:latin typeface="+mj-lt"/>
+              </a:rPr>
+              <a:t>Natalia Romero </a:t>
+            </a:r>
+            <a:r>
+              <a:rPr sz="1400" b="0" dirty="0" err="1">
+                <a:solidFill>
+                  <a:srgbClr val="D7E8F2"/>
+                </a:solidFill>
+                <a:latin typeface="+mj-lt"/>
+              </a:rPr>
+              <a:t>Cuqui</a:t>
+            </a:r>
+            <a:r>
+              <a:rPr sz="1400" b="0" dirty="0">
+                <a:solidFill>
+                  <a:srgbClr val="D7E8F2"/>
+                </a:solidFill>
+                <a:latin typeface="+mj-lt"/>
+              </a:rPr>
+              <a:t> </a:t>
+            </a:r>
+            <a:endParaRPr lang="es-BO" sz="1400" dirty="0">
+              <a:solidFill>
+                <a:srgbClr val="D7E8F2"/>
+              </a:solidFill>
+              <a:latin typeface="+mj-lt"/>
+            </a:endParaRPr>
+          </a:p>
+          <a:p>
+            <a:pPr>
+              <a:buNone/>
+              <a:defRPr sz="1200" b="0">
+                <a:solidFill>
+                  <a:srgbClr val="D7E8F2"/>
+                </a:solidFill>
+              </a:defRPr>
+            </a:pPr>
+            <a:r>
+              <a:rPr sz="1400" b="0" dirty="0">
+                <a:solidFill>
+                  <a:srgbClr val="D7E8F2"/>
+                </a:solidFill>
+                <a:latin typeface="+mj-lt"/>
+              </a:rPr>
+              <a:t>Alex Joshua Villegas Ibanez</a:t>
             </a:r>
           </a:p>
         </p:txBody>
@@ -3313,17 +3186,21 @@
       </p:ext>
     </p:extLst>
   </p:cSld>
+  <p:clrMapOvr>
+    <a:masterClrMapping/>
+  </p:clrMapOvr>
 </p:sld>
 </file>
 
 <file path=ppt/slides/slide2.xml><?xml version="1.0" encoding="utf-8"?>
-<p:sld xmlns:p="http://schemas.openxmlformats.org/presentationml/2006/main">
+<p:sld xmlns:a="http://schemas.openxmlformats.org/drawingml/2006/main" xmlns:r="http://schemas.openxmlformats.org/officeDocument/2006/relationships" xmlns:p="http://schemas.openxmlformats.org/presentationml/2006/main">
   <p:cSld>
     <p:bg>
       <p:bgPr>
-        <a:solidFill xmlns:a="http://schemas.openxmlformats.org/drawingml/2006/main">
+        <a:solidFill>
           <a:srgbClr val="F3F7FA"/>
         </a:solidFill>
+        <a:effectLst/>
       </p:bgPr>
     </p:bg>
     <p:spTree>
@@ -3333,39 +3210,44 @@
         <p:nvPr/>
       </p:nvGrpSpPr>
       <p:grpSpPr>
-        <a:xfrm xmlns:a="http://schemas.openxmlformats.org/drawingml/2006/main"/>
+        <a:xfrm>
+          <a:off x="0" y="0"/>
+          <a:ext cx="0" cy="0"/>
+          <a:chOff x="0" y="0"/>
+          <a:chExt cx="0" cy="0"/>
+        </a:xfrm>
       </p:grpSpPr>
       <p:sp>
         <p:nvSpPr>
-          <p:cNvPr id="12" name="">
-            <a:extLst xmlns:a="http://schemas.openxmlformats.org/drawingml/2006/main">
+          <p:cNvPr id="12" name="Rectángulo 11">
+            <a:extLst>
               <a:ext uri="{FF2B5EF4-FFF2-40B4-BE49-F238E27FC236}">
                 <a16:creationId xmlns:a16="http://schemas.microsoft.com/office/drawing/2014/main" id="{877A6D41-7014-4E7F-AA6C-046E342AF768}"/>
               </a:ext>
             </a:extLst>
           </p:cNvPr>
           <p:cNvSpPr>
-            <a:spLocks xmlns:a="http://schemas.openxmlformats.org/drawingml/2006/main" noGrp="1"/>
+            <a:spLocks noGrp="1"/>
           </p:cNvSpPr>
           <p:nvPr/>
         </p:nvSpPr>
         <p:spPr>
-          <a:xfrm xmlns:a="http://schemas.openxmlformats.org/drawingml/2006/main">
+          <a:xfrm>
             <a:off x="609600" y="323850"/>
             <a:ext cx="8572500" cy="247650"/>
           </a:xfrm>
-          <a:prstGeom xmlns:a="http://schemas.openxmlformats.org/drawingml/2006/main" prst="rect">
-            <a:avLst/>
-          </a:prstGeom>
-          <a:noFill xmlns:a="http://schemas.openxmlformats.org/drawingml/2006/main"/>
-          <a:ln xmlns:a="http://schemas.openxmlformats.org/drawingml/2006/main" w="0">
+          <a:prstGeom prst="rect">
+            <a:avLst/>
+          </a:prstGeom>
+          <a:noFill/>
+          <a:ln w="0">
             <a:noFill/>
             <a:prstDash val="solid"/>
           </a:ln>
         </p:spPr>
         <p:txBody>
-          <a:bodyPr xmlns:a="http://schemas.openxmlformats.org/drawingml/2006/main" anchor="ctr"/>
-          <a:lstStyle xmlns:a="http://schemas.openxmlformats.org/drawingml/2006/main">
+          <a:bodyPr anchor="ctr"/>
+          <a:lstStyle>
             <a:defPPr>
               <a:defRPr sz="1050" b="1">
                 <a:solidFill>
@@ -3374,7 +3256,7 @@
               </a:defRPr>
             </a:defPPr>
           </a:lstStyle>
-          <a:p xmlns:a="http://schemas.openxmlformats.org/drawingml/2006/main">
+          <a:p>
             <a:pPr>
               <a:buNone/>
               <a:defRPr sz="1050" b="1">
@@ -3396,35 +3278,35 @@
       </p:sp>
       <p:sp>
         <p:nvSpPr>
-          <p:cNvPr id="2" name="">
-            <a:extLst xmlns:a="http://schemas.openxmlformats.org/drawingml/2006/main">
+          <p:cNvPr id="2" name="Rectángulo 1">
+            <a:extLst>
               <a:ext uri="{FF2B5EF4-FFF2-40B4-BE49-F238E27FC236}">
                 <a16:creationId xmlns:a16="http://schemas.microsoft.com/office/drawing/2014/main" id="{FA098F79-6E97-4860-AD2D-21A3A18BE58E}"/>
               </a:ext>
             </a:extLst>
           </p:cNvPr>
           <p:cNvSpPr>
-            <a:spLocks xmlns:a="http://schemas.openxmlformats.org/drawingml/2006/main" noGrp="1"/>
+            <a:spLocks noGrp="1"/>
           </p:cNvSpPr>
           <p:nvPr/>
         </p:nvSpPr>
         <p:spPr>
-          <a:xfrm xmlns:a="http://schemas.openxmlformats.org/drawingml/2006/main">
+          <a:xfrm>
             <a:off x="609600" y="781050"/>
             <a:ext cx="10953750" cy="533400"/>
           </a:xfrm>
-          <a:prstGeom xmlns:a="http://schemas.openxmlformats.org/drawingml/2006/main" prst="rect">
-            <a:avLst/>
-          </a:prstGeom>
-          <a:noFill xmlns:a="http://schemas.openxmlformats.org/drawingml/2006/main"/>
-          <a:ln xmlns:a="http://schemas.openxmlformats.org/drawingml/2006/main" w="0">
+          <a:prstGeom prst="rect">
+            <a:avLst/>
+          </a:prstGeom>
+          <a:noFill/>
+          <a:ln w="0">
             <a:noFill/>
             <a:prstDash val="solid"/>
           </a:ln>
         </p:spPr>
         <p:txBody>
-          <a:bodyPr xmlns:a="http://schemas.openxmlformats.org/drawingml/2006/main" anchor="ctr"/>
-          <a:lstStyle xmlns:a="http://schemas.openxmlformats.org/drawingml/2006/main">
+          <a:bodyPr anchor="ctr"/>
+          <a:lstStyle>
             <a:defPPr>
               <a:defRPr sz="2700" b="1">
                 <a:solidFill>
@@ -3433,7 +3315,7 @@
               </a:defRPr>
             </a:defPPr>
           </a:lstStyle>
-          <a:p xmlns:a="http://schemas.openxmlformats.org/drawingml/2006/main">
+          <a:p>
             <a:pPr>
               <a:buNone/>
               <a:defRPr sz="2700" b="1">
@@ -3455,35 +3337,35 @@
       </p:sp>
       <p:sp>
         <p:nvSpPr>
-          <p:cNvPr id="3" name="">
-            <a:extLst xmlns:a="http://schemas.openxmlformats.org/drawingml/2006/main">
+          <p:cNvPr id="3" name="Rectángulo 2">
+            <a:extLst>
               <a:ext uri="{FF2B5EF4-FFF2-40B4-BE49-F238E27FC236}">
                 <a16:creationId xmlns:a16="http://schemas.microsoft.com/office/drawing/2014/main" id="{3C68701A-98E0-4DF8-AC28-44012ACA7519}"/>
               </a:ext>
             </a:extLst>
           </p:cNvPr>
           <p:cNvSpPr>
-            <a:spLocks xmlns:a="http://schemas.openxmlformats.org/drawingml/2006/main" noGrp="1"/>
+            <a:spLocks noGrp="1"/>
           </p:cNvSpPr>
           <p:nvPr/>
         </p:nvSpPr>
         <p:spPr>
-          <a:xfrm xmlns:a="http://schemas.openxmlformats.org/drawingml/2006/main">
+          <a:xfrm>
             <a:off x="609600" y="1381125"/>
             <a:ext cx="10477500" cy="381000"/>
           </a:xfrm>
-          <a:prstGeom xmlns:a="http://schemas.openxmlformats.org/drawingml/2006/main" prst="rect">
-            <a:avLst/>
-          </a:prstGeom>
-          <a:noFill xmlns:a="http://schemas.openxmlformats.org/drawingml/2006/main"/>
-          <a:ln xmlns:a="http://schemas.openxmlformats.org/drawingml/2006/main" w="0">
+          <a:prstGeom prst="rect">
+            <a:avLst/>
+          </a:prstGeom>
+          <a:noFill/>
+          <a:ln w="0">
             <a:noFill/>
             <a:prstDash val="solid"/>
           </a:ln>
         </p:spPr>
         <p:txBody>
-          <a:bodyPr xmlns:a="http://schemas.openxmlformats.org/drawingml/2006/main" anchor="ctr"/>
-          <a:lstStyle xmlns:a="http://schemas.openxmlformats.org/drawingml/2006/main">
+          <a:bodyPr anchor="ctr"/>
+          <a:lstStyle>
             <a:defPPr>
               <a:defRPr sz="1425" b="0">
                 <a:solidFill>
@@ -3492,7 +3374,7 @@
               </a:defRPr>
             </a:defPPr>
           </a:lstStyle>
-          <a:p xmlns:a="http://schemas.openxmlformats.org/drawingml/2006/main">
+          <a:p>
             <a:pPr>
               <a:buNone/>
               <a:defRPr sz="1425" b="0">
@@ -3514,35 +3396,35 @@
       </p:sp>
       <p:sp>
         <p:nvSpPr>
-          <p:cNvPr id="4" name="">
-            <a:extLst xmlns:a="http://schemas.openxmlformats.org/drawingml/2006/main">
+          <p:cNvPr id="4" name="Rectángulo 3">
+            <a:extLst>
               <a:ext uri="{FF2B5EF4-FFF2-40B4-BE49-F238E27FC236}">
                 <a16:creationId xmlns:a16="http://schemas.microsoft.com/office/drawing/2014/main" id="{358B46C3-C849-44CB-99AF-B09112A3F558}"/>
               </a:ext>
             </a:extLst>
           </p:cNvPr>
           <p:cNvSpPr>
-            <a:spLocks xmlns:a="http://schemas.openxmlformats.org/drawingml/2006/main" noGrp="1"/>
+            <a:spLocks noGrp="1"/>
           </p:cNvSpPr>
           <p:nvPr/>
         </p:nvSpPr>
         <p:spPr>
-          <a:xfrm xmlns:a="http://schemas.openxmlformats.org/drawingml/2006/main">
+          <a:xfrm>
             <a:off x="609600" y="6419850"/>
             <a:ext cx="10477500" cy="190500"/>
           </a:xfrm>
-          <a:prstGeom xmlns:a="http://schemas.openxmlformats.org/drawingml/2006/main" prst="rect">
-            <a:avLst/>
-          </a:prstGeom>
-          <a:noFill xmlns:a="http://schemas.openxmlformats.org/drawingml/2006/main"/>
-          <a:ln xmlns:a="http://schemas.openxmlformats.org/drawingml/2006/main" w="0">
+          <a:prstGeom prst="rect">
+            <a:avLst/>
+          </a:prstGeom>
+          <a:noFill/>
+          <a:ln w="0">
             <a:noFill/>
             <a:prstDash val="solid"/>
           </a:ln>
         </p:spPr>
         <p:txBody>
-          <a:bodyPr xmlns:a="http://schemas.openxmlformats.org/drawingml/2006/main" anchor="ctr"/>
-          <a:lstStyle xmlns:a="http://schemas.openxmlformats.org/drawingml/2006/main">
+          <a:bodyPr anchor="ctr"/>
+          <a:lstStyle>
             <a:defPPr>
               <a:defRPr sz="900" b="0">
                 <a:solidFill>
@@ -3551,7 +3433,7 @@
               </a:defRPr>
             </a:defPPr>
           </a:lstStyle>
-          <a:p xmlns:a="http://schemas.openxmlformats.org/drawingml/2006/main">
+          <a:p>
             <a:pPr>
               <a:buNone/>
               <a:defRPr sz="900" b="0">
@@ -3573,35 +3455,35 @@
       </p:sp>
       <p:sp>
         <p:nvSpPr>
-          <p:cNvPr id="5" name="">
-            <a:extLst xmlns:a="http://schemas.openxmlformats.org/drawingml/2006/main">
+          <p:cNvPr id="5" name="Rectángulo 4">
+            <a:extLst>
               <a:ext uri="{FF2B5EF4-FFF2-40B4-BE49-F238E27FC236}">
                 <a16:creationId xmlns:a16="http://schemas.microsoft.com/office/drawing/2014/main" id="{A8FA9C82-3A1B-4AE4-B588-83DA9AF708CF}"/>
               </a:ext>
             </a:extLst>
           </p:cNvPr>
           <p:cNvSpPr>
-            <a:spLocks xmlns:a="http://schemas.openxmlformats.org/drawingml/2006/main" noGrp="1"/>
+            <a:spLocks noGrp="1"/>
           </p:cNvSpPr>
           <p:nvPr/>
         </p:nvSpPr>
         <p:spPr>
-          <a:xfrm xmlns:a="http://schemas.openxmlformats.org/drawingml/2006/main">
+          <a:xfrm>
             <a:off x="762000" y="2333625"/>
             <a:ext cx="2857500" cy="361950"/>
           </a:xfrm>
-          <a:prstGeom xmlns:a="http://schemas.openxmlformats.org/drawingml/2006/main" prst="rect">
-            <a:avLst/>
-          </a:prstGeom>
-          <a:noFill xmlns:a="http://schemas.openxmlformats.org/drawingml/2006/main"/>
-          <a:ln xmlns:a="http://schemas.openxmlformats.org/drawingml/2006/main" w="0">
+          <a:prstGeom prst="rect">
+            <a:avLst/>
+          </a:prstGeom>
+          <a:noFill/>
+          <a:ln w="0">
             <a:noFill/>
             <a:prstDash val="solid"/>
           </a:ln>
         </p:spPr>
         <p:txBody>
-          <a:bodyPr xmlns:a="http://schemas.openxmlformats.org/drawingml/2006/main" anchor="ctr"/>
-          <a:lstStyle xmlns:a="http://schemas.openxmlformats.org/drawingml/2006/main">
+          <a:bodyPr anchor="ctr"/>
+          <a:lstStyle>
             <a:defPPr>
               <a:defRPr sz="1650" b="1">
                 <a:solidFill>
@@ -3610,7 +3492,7 @@
               </a:defRPr>
             </a:defPPr>
           </a:lstStyle>
-          <a:p xmlns:a="http://schemas.openxmlformats.org/drawingml/2006/main">
+          <a:p>
             <a:pPr>
               <a:buNone/>
               <a:defRPr sz="1650" b="1">
@@ -3632,35 +3514,35 @@
       </p:sp>
       <p:sp>
         <p:nvSpPr>
-          <p:cNvPr id="6" name="">
-            <a:extLst xmlns:a="http://schemas.openxmlformats.org/drawingml/2006/main">
+          <p:cNvPr id="6" name="Rectángulo 5">
+            <a:extLst>
               <a:ext uri="{FF2B5EF4-FFF2-40B4-BE49-F238E27FC236}">
                 <a16:creationId xmlns:a16="http://schemas.microsoft.com/office/drawing/2014/main" id="{EAA25E81-D4A3-4307-B141-7BD9A7F2296D}"/>
               </a:ext>
             </a:extLst>
           </p:cNvPr>
           <p:cNvSpPr>
-            <a:spLocks xmlns:a="http://schemas.openxmlformats.org/drawingml/2006/main" noGrp="1"/>
+            <a:spLocks noGrp="1"/>
           </p:cNvSpPr>
           <p:nvPr/>
         </p:nvSpPr>
         <p:spPr>
-          <a:xfrm xmlns:a="http://schemas.openxmlformats.org/drawingml/2006/main">
+          <a:xfrm>
             <a:off x="762000" y="2762250"/>
             <a:ext cx="4000500" cy="342900"/>
           </a:xfrm>
-          <a:prstGeom xmlns:a="http://schemas.openxmlformats.org/drawingml/2006/main" prst="rect">
-            <a:avLst/>
-          </a:prstGeom>
-          <a:noFill xmlns:a="http://schemas.openxmlformats.org/drawingml/2006/main"/>
-          <a:ln xmlns:a="http://schemas.openxmlformats.org/drawingml/2006/main" w="0">
+          <a:prstGeom prst="rect">
+            <a:avLst/>
+          </a:prstGeom>
+          <a:noFill/>
+          <a:ln w="0">
             <a:noFill/>
             <a:prstDash val="solid"/>
           </a:ln>
         </p:spPr>
         <p:txBody>
-          <a:bodyPr xmlns:a="http://schemas.openxmlformats.org/drawingml/2006/main" anchor="ctr"/>
-          <a:lstStyle xmlns:a="http://schemas.openxmlformats.org/drawingml/2006/main">
+          <a:bodyPr anchor="ctr"/>
+          <a:lstStyle>
             <a:defPPr>
               <a:defRPr sz="1575" b="0">
                 <a:solidFill>
@@ -3669,7 +3551,7 @@
               </a:defRPr>
             </a:defPPr>
           </a:lstStyle>
-          <a:p xmlns:a="http://schemas.openxmlformats.org/drawingml/2006/main">
+          <a:p>
             <a:pPr>
               <a:buNone/>
               <a:defRPr sz="1575" b="0">
@@ -3691,35 +3573,35 @@
       </p:sp>
       <p:sp>
         <p:nvSpPr>
-          <p:cNvPr id="7" name="">
-            <a:extLst xmlns:a="http://schemas.openxmlformats.org/drawingml/2006/main">
+          <p:cNvPr id="7" name="Rectángulo 6">
+            <a:extLst>
               <a:ext uri="{FF2B5EF4-FFF2-40B4-BE49-F238E27FC236}">
                 <a16:creationId xmlns:a16="http://schemas.microsoft.com/office/drawing/2014/main" id="{94E70088-6A78-4F81-961D-9F037674C2EF}"/>
               </a:ext>
             </a:extLst>
           </p:cNvPr>
           <p:cNvSpPr>
-            <a:spLocks xmlns:a="http://schemas.openxmlformats.org/drawingml/2006/main" noGrp="1"/>
+            <a:spLocks noGrp="1"/>
           </p:cNvSpPr>
           <p:nvPr/>
         </p:nvSpPr>
         <p:spPr>
-          <a:xfrm xmlns:a="http://schemas.openxmlformats.org/drawingml/2006/main">
+          <a:xfrm>
             <a:off x="4857750" y="2333625"/>
             <a:ext cx="2857500" cy="361950"/>
           </a:xfrm>
-          <a:prstGeom xmlns:a="http://schemas.openxmlformats.org/drawingml/2006/main" prst="rect">
-            <a:avLst/>
-          </a:prstGeom>
-          <a:noFill xmlns:a="http://schemas.openxmlformats.org/drawingml/2006/main"/>
-          <a:ln xmlns:a="http://schemas.openxmlformats.org/drawingml/2006/main" w="0">
+          <a:prstGeom prst="rect">
+            <a:avLst/>
+          </a:prstGeom>
+          <a:noFill/>
+          <a:ln w="0">
             <a:noFill/>
             <a:prstDash val="solid"/>
           </a:ln>
         </p:spPr>
         <p:txBody>
-          <a:bodyPr xmlns:a="http://schemas.openxmlformats.org/drawingml/2006/main" anchor="ctr"/>
-          <a:lstStyle xmlns:a="http://schemas.openxmlformats.org/drawingml/2006/main">
+          <a:bodyPr anchor="ctr"/>
+          <a:lstStyle>
             <a:defPPr>
               <a:defRPr sz="1650" b="1">
                 <a:solidFill>
@@ -3728,7 +3610,7 @@
               </a:defRPr>
             </a:defPPr>
           </a:lstStyle>
-          <a:p xmlns:a="http://schemas.openxmlformats.org/drawingml/2006/main">
+          <a:p>
             <a:pPr>
               <a:buNone/>
               <a:defRPr sz="1650" b="1">
@@ -3750,35 +3632,35 @@
       </p:sp>
       <p:sp>
         <p:nvSpPr>
-          <p:cNvPr id="8" name="">
-            <a:extLst xmlns:a="http://schemas.openxmlformats.org/drawingml/2006/main">
+          <p:cNvPr id="8" name="Rectángulo 7">
+            <a:extLst>
               <a:ext uri="{FF2B5EF4-FFF2-40B4-BE49-F238E27FC236}">
                 <a16:creationId xmlns:a16="http://schemas.microsoft.com/office/drawing/2014/main" id="{CFF5974B-72F6-4361-8458-EC895D75EA1A}"/>
               </a:ext>
             </a:extLst>
           </p:cNvPr>
           <p:cNvSpPr>
-            <a:spLocks xmlns:a="http://schemas.openxmlformats.org/drawingml/2006/main" noGrp="1"/>
+            <a:spLocks noGrp="1"/>
           </p:cNvSpPr>
           <p:nvPr/>
         </p:nvSpPr>
         <p:spPr>
-          <a:xfrm xmlns:a="http://schemas.openxmlformats.org/drawingml/2006/main">
+          <a:xfrm>
             <a:off x="4857750" y="2762250"/>
             <a:ext cx="4000500" cy="342900"/>
           </a:xfrm>
-          <a:prstGeom xmlns:a="http://schemas.openxmlformats.org/drawingml/2006/main" prst="rect">
-            <a:avLst/>
-          </a:prstGeom>
-          <a:noFill xmlns:a="http://schemas.openxmlformats.org/drawingml/2006/main"/>
-          <a:ln xmlns:a="http://schemas.openxmlformats.org/drawingml/2006/main" w="0">
+          <a:prstGeom prst="rect">
+            <a:avLst/>
+          </a:prstGeom>
+          <a:noFill/>
+          <a:ln w="0">
             <a:noFill/>
             <a:prstDash val="solid"/>
           </a:ln>
         </p:spPr>
         <p:txBody>
-          <a:bodyPr xmlns:a="http://schemas.openxmlformats.org/drawingml/2006/main" anchor="ctr"/>
-          <a:lstStyle xmlns:a="http://schemas.openxmlformats.org/drawingml/2006/main">
+          <a:bodyPr anchor="ctr"/>
+          <a:lstStyle>
             <a:defPPr>
               <a:defRPr sz="1575" b="0">
                 <a:solidFill>
@@ -3787,7 +3669,7 @@
               </a:defRPr>
             </a:defPPr>
           </a:lstStyle>
-          <a:p xmlns:a="http://schemas.openxmlformats.org/drawingml/2006/main">
+          <a:p>
             <a:pPr>
               <a:buNone/>
               <a:defRPr sz="1575" b="0">
@@ -3809,35 +3691,35 @@
       </p:sp>
       <p:sp>
         <p:nvSpPr>
-          <p:cNvPr id="9" name="">
-            <a:extLst xmlns:a="http://schemas.openxmlformats.org/drawingml/2006/main">
+          <p:cNvPr id="9" name="Rectángulo 8">
+            <a:extLst>
               <a:ext uri="{FF2B5EF4-FFF2-40B4-BE49-F238E27FC236}">
                 <a16:creationId xmlns:a16="http://schemas.microsoft.com/office/drawing/2014/main" id="{7C42325F-2DF3-4904-A2AC-DC620B2CCAC3}"/>
               </a:ext>
             </a:extLst>
           </p:cNvPr>
           <p:cNvSpPr>
-            <a:spLocks xmlns:a="http://schemas.openxmlformats.org/drawingml/2006/main" noGrp="1"/>
+            <a:spLocks noGrp="1"/>
           </p:cNvSpPr>
           <p:nvPr/>
         </p:nvSpPr>
         <p:spPr>
-          <a:xfrm xmlns:a="http://schemas.openxmlformats.org/drawingml/2006/main">
+          <a:xfrm>
             <a:off x="8763000" y="2333625"/>
             <a:ext cx="2857500" cy="361950"/>
           </a:xfrm>
-          <a:prstGeom xmlns:a="http://schemas.openxmlformats.org/drawingml/2006/main" prst="rect">
-            <a:avLst/>
-          </a:prstGeom>
-          <a:noFill xmlns:a="http://schemas.openxmlformats.org/drawingml/2006/main"/>
-          <a:ln xmlns:a="http://schemas.openxmlformats.org/drawingml/2006/main" w="0">
+          <a:prstGeom prst="rect">
+            <a:avLst/>
+          </a:prstGeom>
+          <a:noFill/>
+          <a:ln w="0">
             <a:noFill/>
             <a:prstDash val="solid"/>
           </a:ln>
         </p:spPr>
         <p:txBody>
-          <a:bodyPr xmlns:a="http://schemas.openxmlformats.org/drawingml/2006/main" anchor="ctr"/>
-          <a:lstStyle xmlns:a="http://schemas.openxmlformats.org/drawingml/2006/main">
+          <a:bodyPr anchor="ctr"/>
+          <a:lstStyle>
             <a:defPPr>
               <a:defRPr sz="1650" b="1">
                 <a:solidFill>
@@ -3846,7 +3728,7 @@
               </a:defRPr>
             </a:defPPr>
           </a:lstStyle>
-          <a:p xmlns:a="http://schemas.openxmlformats.org/drawingml/2006/main">
+          <a:p>
             <a:pPr>
               <a:buNone/>
               <a:defRPr sz="1650" b="1">
@@ -3868,35 +3750,35 @@
       </p:sp>
       <p:sp>
         <p:nvSpPr>
-          <p:cNvPr id="10" name="">
-            <a:extLst xmlns:a="http://schemas.openxmlformats.org/drawingml/2006/main">
+          <p:cNvPr id="10" name="Rectángulo 9">
+            <a:extLst>
               <a:ext uri="{FF2B5EF4-FFF2-40B4-BE49-F238E27FC236}">
                 <a16:creationId xmlns:a16="http://schemas.microsoft.com/office/drawing/2014/main" id="{3BDFD400-24FA-49CC-9830-6640EEA7F684}"/>
               </a:ext>
             </a:extLst>
           </p:cNvPr>
           <p:cNvSpPr>
-            <a:spLocks xmlns:a="http://schemas.openxmlformats.org/drawingml/2006/main" noGrp="1"/>
+            <a:spLocks noGrp="1"/>
           </p:cNvSpPr>
           <p:nvPr/>
         </p:nvSpPr>
         <p:spPr>
-          <a:xfrm xmlns:a="http://schemas.openxmlformats.org/drawingml/2006/main">
+          <a:xfrm>
             <a:off x="8763000" y="2762250"/>
             <a:ext cx="3143250" cy="342900"/>
           </a:xfrm>
-          <a:prstGeom xmlns:a="http://schemas.openxmlformats.org/drawingml/2006/main" prst="rect">
-            <a:avLst/>
-          </a:prstGeom>
-          <a:noFill xmlns:a="http://schemas.openxmlformats.org/drawingml/2006/main"/>
-          <a:ln xmlns:a="http://schemas.openxmlformats.org/drawingml/2006/main" w="0">
+          <a:prstGeom prst="rect">
+            <a:avLst/>
+          </a:prstGeom>
+          <a:noFill/>
+          <a:ln w="0">
             <a:noFill/>
             <a:prstDash val="solid"/>
           </a:ln>
         </p:spPr>
         <p:txBody>
-          <a:bodyPr xmlns:a="http://schemas.openxmlformats.org/drawingml/2006/main" anchor="ctr"/>
-          <a:lstStyle xmlns:a="http://schemas.openxmlformats.org/drawingml/2006/main">
+          <a:bodyPr anchor="ctr"/>
+          <a:lstStyle>
             <a:defPPr>
               <a:defRPr sz="1575" b="0">
                 <a:solidFill>
@@ -3905,7 +3787,7 @@
               </a:defRPr>
             </a:defPPr>
           </a:lstStyle>
-          <a:p xmlns:a="http://schemas.openxmlformats.org/drawingml/2006/main">
+          <a:p>
             <a:pPr>
               <a:buNone/>
               <a:defRPr sz="1575" b="0">
@@ -3927,35 +3809,35 @@
       </p:sp>
       <p:sp>
         <p:nvSpPr>
-          <p:cNvPr id="11" name="">
-            <a:extLst xmlns:a="http://schemas.openxmlformats.org/drawingml/2006/main">
+          <p:cNvPr id="11" name="Rectángulo 10">
+            <a:extLst>
               <a:ext uri="{FF2B5EF4-FFF2-40B4-BE49-F238E27FC236}">
                 <a16:creationId xmlns:a16="http://schemas.microsoft.com/office/drawing/2014/main" id="{AEC20728-24F3-4371-85F9-6D4DAC071300}"/>
               </a:ext>
             </a:extLst>
           </p:cNvPr>
           <p:cNvSpPr>
-            <a:spLocks xmlns:a="http://schemas.openxmlformats.org/drawingml/2006/main" noGrp="1"/>
+            <a:spLocks noGrp="1"/>
           </p:cNvSpPr>
           <p:nvPr/>
         </p:nvSpPr>
         <p:spPr>
-          <a:xfrm xmlns:a="http://schemas.openxmlformats.org/drawingml/2006/main">
+          <a:xfrm>
             <a:off x="762000" y="3857625"/>
             <a:ext cx="10287000" cy="819150"/>
           </a:xfrm>
-          <a:prstGeom xmlns:a="http://schemas.openxmlformats.org/drawingml/2006/main" prst="rect">
-            <a:avLst/>
-          </a:prstGeom>
-          <a:noFill xmlns:a="http://schemas.openxmlformats.org/drawingml/2006/main"/>
-          <a:ln xmlns:a="http://schemas.openxmlformats.org/drawingml/2006/main" w="0">
+          <a:prstGeom prst="rect">
+            <a:avLst/>
+          </a:prstGeom>
+          <a:noFill/>
+          <a:ln w="0">
             <a:noFill/>
             <a:prstDash val="solid"/>
           </a:ln>
         </p:spPr>
         <p:txBody>
-          <a:bodyPr xmlns:a="http://schemas.openxmlformats.org/drawingml/2006/main" anchor="ctr"/>
-          <a:lstStyle xmlns:a="http://schemas.openxmlformats.org/drawingml/2006/main">
+          <a:bodyPr anchor="ctr"/>
+          <a:lstStyle>
             <a:defPPr>
               <a:defRPr sz="1800" b="1">
                 <a:solidFill>
@@ -3964,7 +3846,7 @@
               </a:defRPr>
             </a:defPPr>
           </a:lstStyle>
-          <a:p xmlns:a="http://schemas.openxmlformats.org/drawingml/2006/main">
+          <a:p>
             <a:pPr>
               <a:buNone/>
               <a:defRPr sz="1800" b="1">
@@ -3991,17 +3873,21 @@
       </p:ext>
     </p:extLst>
   </p:cSld>
+  <p:clrMapOvr>
+    <a:masterClrMapping/>
+  </p:clrMapOvr>
 </p:sld>
 </file>
 
 <file path=ppt/slides/slide3.xml><?xml version="1.0" encoding="utf-8"?>
-<p:sld xmlns:p="http://schemas.openxmlformats.org/presentationml/2006/main">
+<p:sld xmlns:a="http://schemas.openxmlformats.org/drawingml/2006/main" xmlns:r="http://schemas.openxmlformats.org/officeDocument/2006/relationships" xmlns:p="http://schemas.openxmlformats.org/presentationml/2006/main">
   <p:cSld>
     <p:bg>
       <p:bgPr>
-        <a:solidFill xmlns:a="http://schemas.openxmlformats.org/drawingml/2006/main">
+        <a:solidFill>
           <a:srgbClr val="F3F7FA"/>
         </a:solidFill>
+        <a:effectLst/>
       </p:bgPr>
     </p:bg>
     <p:spTree>
@@ -4011,39 +3897,44 @@
         <p:nvPr/>
       </p:nvGrpSpPr>
       <p:grpSpPr>
-        <a:xfrm xmlns:a="http://schemas.openxmlformats.org/drawingml/2006/main"/>
+        <a:xfrm>
+          <a:off x="0" y="0"/>
+          <a:ext cx="0" cy="0"/>
+          <a:chOff x="0" y="0"/>
+          <a:chExt cx="0" cy="0"/>
+        </a:xfrm>
       </p:grpSpPr>
       <p:sp>
         <p:nvSpPr>
-          <p:cNvPr id="13" name="">
-            <a:extLst xmlns:a="http://schemas.openxmlformats.org/drawingml/2006/main">
+          <p:cNvPr id="13" name="Rectángulo 12">
+            <a:extLst>
               <a:ext uri="{FF2B5EF4-FFF2-40B4-BE49-F238E27FC236}">
                 <a16:creationId xmlns:a16="http://schemas.microsoft.com/office/drawing/2014/main" id="{1CC791DD-4297-4709-8E0B-EB2FE2EA97ED}"/>
               </a:ext>
             </a:extLst>
           </p:cNvPr>
           <p:cNvSpPr>
-            <a:spLocks xmlns:a="http://schemas.openxmlformats.org/drawingml/2006/main" noGrp="1"/>
+            <a:spLocks noGrp="1"/>
           </p:cNvSpPr>
           <p:nvPr/>
         </p:nvSpPr>
         <p:spPr>
-          <a:xfrm xmlns:a="http://schemas.openxmlformats.org/drawingml/2006/main">
+          <a:xfrm>
             <a:off x="609600" y="323850"/>
             <a:ext cx="8572500" cy="247650"/>
           </a:xfrm>
-          <a:prstGeom xmlns:a="http://schemas.openxmlformats.org/drawingml/2006/main" prst="rect">
-            <a:avLst/>
-          </a:prstGeom>
-          <a:noFill xmlns:a="http://schemas.openxmlformats.org/drawingml/2006/main"/>
-          <a:ln xmlns:a="http://schemas.openxmlformats.org/drawingml/2006/main" w="0">
+          <a:prstGeom prst="rect">
+            <a:avLst/>
+          </a:prstGeom>
+          <a:noFill/>
+          <a:ln w="0">
             <a:noFill/>
             <a:prstDash val="solid"/>
           </a:ln>
         </p:spPr>
         <p:txBody>
-          <a:bodyPr xmlns:a="http://schemas.openxmlformats.org/drawingml/2006/main" anchor="ctr"/>
-          <a:lstStyle xmlns:a="http://schemas.openxmlformats.org/drawingml/2006/main">
+          <a:bodyPr anchor="ctr"/>
+          <a:lstStyle>
             <a:defPPr>
               <a:defRPr sz="1050" b="1">
                 <a:solidFill>
@@ -4052,7 +3943,7 @@
               </a:defRPr>
             </a:defPPr>
           </a:lstStyle>
-          <a:p xmlns:a="http://schemas.openxmlformats.org/drawingml/2006/main">
+          <a:p>
             <a:pPr>
               <a:buNone/>
               <a:defRPr sz="1050" b="1">
@@ -4074,35 +3965,35 @@
       </p:sp>
       <p:sp>
         <p:nvSpPr>
-          <p:cNvPr id="2" name="">
-            <a:extLst xmlns:a="http://schemas.openxmlformats.org/drawingml/2006/main">
+          <p:cNvPr id="2" name="Rectángulo 1">
+            <a:extLst>
               <a:ext uri="{FF2B5EF4-FFF2-40B4-BE49-F238E27FC236}">
                 <a16:creationId xmlns:a16="http://schemas.microsoft.com/office/drawing/2014/main" id="{90AB753E-CBFD-4E25-BCED-8BDA553E312F}"/>
               </a:ext>
             </a:extLst>
           </p:cNvPr>
           <p:cNvSpPr>
-            <a:spLocks xmlns:a="http://schemas.openxmlformats.org/drawingml/2006/main" noGrp="1"/>
+            <a:spLocks noGrp="1"/>
           </p:cNvSpPr>
           <p:nvPr/>
         </p:nvSpPr>
         <p:spPr>
-          <a:xfrm xmlns:a="http://schemas.openxmlformats.org/drawingml/2006/main">
+          <a:xfrm>
             <a:off x="609600" y="781050"/>
             <a:ext cx="10953750" cy="533400"/>
           </a:xfrm>
-          <a:prstGeom xmlns:a="http://schemas.openxmlformats.org/drawingml/2006/main" prst="rect">
-            <a:avLst/>
-          </a:prstGeom>
-          <a:noFill xmlns:a="http://schemas.openxmlformats.org/drawingml/2006/main"/>
-          <a:ln xmlns:a="http://schemas.openxmlformats.org/drawingml/2006/main" w="0">
+          <a:prstGeom prst="rect">
+            <a:avLst/>
+          </a:prstGeom>
+          <a:noFill/>
+          <a:ln w="0">
             <a:noFill/>
             <a:prstDash val="solid"/>
           </a:ln>
         </p:spPr>
         <p:txBody>
-          <a:bodyPr xmlns:a="http://schemas.openxmlformats.org/drawingml/2006/main" anchor="ctr"/>
-          <a:lstStyle xmlns:a="http://schemas.openxmlformats.org/drawingml/2006/main">
+          <a:bodyPr anchor="ctr"/>
+          <a:lstStyle>
             <a:defPPr>
               <a:defRPr sz="2700" b="1">
                 <a:solidFill>
@@ -4111,7 +4002,7 @@
               </a:defRPr>
             </a:defPPr>
           </a:lstStyle>
-          <a:p xmlns:a="http://schemas.openxmlformats.org/drawingml/2006/main">
+          <a:p>
             <a:pPr>
               <a:buNone/>
               <a:defRPr sz="2700" b="1">
@@ -4133,35 +4024,35 @@
       </p:sp>
       <p:sp>
         <p:nvSpPr>
-          <p:cNvPr id="3" name="">
-            <a:extLst xmlns:a="http://schemas.openxmlformats.org/drawingml/2006/main">
+          <p:cNvPr id="3" name="Rectángulo 2">
+            <a:extLst>
               <a:ext uri="{FF2B5EF4-FFF2-40B4-BE49-F238E27FC236}">
                 <a16:creationId xmlns:a16="http://schemas.microsoft.com/office/drawing/2014/main" id="{0DE01529-AFA2-456F-8DD2-E109E4DEB375}"/>
               </a:ext>
             </a:extLst>
           </p:cNvPr>
           <p:cNvSpPr>
-            <a:spLocks xmlns:a="http://schemas.openxmlformats.org/drawingml/2006/main" noGrp="1"/>
+            <a:spLocks noGrp="1"/>
           </p:cNvSpPr>
           <p:nvPr/>
         </p:nvSpPr>
         <p:spPr>
-          <a:xfrm xmlns:a="http://schemas.openxmlformats.org/drawingml/2006/main">
+          <a:xfrm>
             <a:off x="609600" y="1381125"/>
             <a:ext cx="10477500" cy="381000"/>
           </a:xfrm>
-          <a:prstGeom xmlns:a="http://schemas.openxmlformats.org/drawingml/2006/main" prst="rect">
-            <a:avLst/>
-          </a:prstGeom>
-          <a:noFill xmlns:a="http://schemas.openxmlformats.org/drawingml/2006/main"/>
-          <a:ln xmlns:a="http://schemas.openxmlformats.org/drawingml/2006/main" w="0">
+          <a:prstGeom prst="rect">
+            <a:avLst/>
+          </a:prstGeom>
+          <a:noFill/>
+          <a:ln w="0">
             <a:noFill/>
             <a:prstDash val="solid"/>
           </a:ln>
         </p:spPr>
         <p:txBody>
-          <a:bodyPr xmlns:a="http://schemas.openxmlformats.org/drawingml/2006/main" anchor="ctr"/>
-          <a:lstStyle xmlns:a="http://schemas.openxmlformats.org/drawingml/2006/main">
+          <a:bodyPr anchor="ctr"/>
+          <a:lstStyle>
             <a:defPPr>
               <a:defRPr sz="1425" b="0">
                 <a:solidFill>
@@ -4170,7 +4061,7 @@
               </a:defRPr>
             </a:defPPr>
           </a:lstStyle>
-          <a:p xmlns:a="http://schemas.openxmlformats.org/drawingml/2006/main">
+          <a:p>
             <a:pPr>
               <a:buNone/>
               <a:defRPr sz="1425" b="0">
@@ -4192,35 +4083,35 @@
       </p:sp>
       <p:sp>
         <p:nvSpPr>
-          <p:cNvPr id="4" name="">
-            <a:extLst xmlns:a="http://schemas.openxmlformats.org/drawingml/2006/main">
+          <p:cNvPr id="4" name="Rectángulo 3">
+            <a:extLst>
               <a:ext uri="{FF2B5EF4-FFF2-40B4-BE49-F238E27FC236}">
                 <a16:creationId xmlns:a16="http://schemas.microsoft.com/office/drawing/2014/main" id="{73CB876A-C808-4A4C-96BE-FADB51DD1B94}"/>
               </a:ext>
             </a:extLst>
           </p:cNvPr>
           <p:cNvSpPr>
-            <a:spLocks xmlns:a="http://schemas.openxmlformats.org/drawingml/2006/main" noGrp="1"/>
+            <a:spLocks noGrp="1"/>
           </p:cNvSpPr>
           <p:nvPr/>
         </p:nvSpPr>
         <p:spPr>
-          <a:xfrm xmlns:a="http://schemas.openxmlformats.org/drawingml/2006/main">
+          <a:xfrm>
             <a:off x="609600" y="6419850"/>
             <a:ext cx="10477500" cy="190500"/>
           </a:xfrm>
-          <a:prstGeom xmlns:a="http://schemas.openxmlformats.org/drawingml/2006/main" prst="rect">
-            <a:avLst/>
-          </a:prstGeom>
-          <a:noFill xmlns:a="http://schemas.openxmlformats.org/drawingml/2006/main"/>
-          <a:ln xmlns:a="http://schemas.openxmlformats.org/drawingml/2006/main" w="0">
+          <a:prstGeom prst="rect">
+            <a:avLst/>
+          </a:prstGeom>
+          <a:noFill/>
+          <a:ln w="0">
             <a:noFill/>
             <a:prstDash val="solid"/>
           </a:ln>
         </p:spPr>
         <p:txBody>
-          <a:bodyPr xmlns:a="http://schemas.openxmlformats.org/drawingml/2006/main" anchor="ctr"/>
-          <a:lstStyle xmlns:a="http://schemas.openxmlformats.org/drawingml/2006/main">
+          <a:bodyPr anchor="ctr"/>
+          <a:lstStyle>
             <a:defPPr>
               <a:defRPr sz="900" b="0">
                 <a:solidFill>
@@ -4229,7 +4120,7 @@
               </a:defRPr>
             </a:defPPr>
           </a:lstStyle>
-          <a:p xmlns:a="http://schemas.openxmlformats.org/drawingml/2006/main">
+          <a:p>
             <a:pPr>
               <a:buNone/>
               <a:defRPr sz="900" b="0">
@@ -4251,35 +4142,35 @@
       </p:sp>
       <p:sp>
         <p:nvSpPr>
-          <p:cNvPr id="5" name="">
-            <a:extLst xmlns:a="http://schemas.openxmlformats.org/drawingml/2006/main">
+          <p:cNvPr id="5" name="Rectángulo 4">
+            <a:extLst>
               <a:ext uri="{FF2B5EF4-FFF2-40B4-BE49-F238E27FC236}">
                 <a16:creationId xmlns:a16="http://schemas.microsoft.com/office/drawing/2014/main" id="{E1A07298-00AF-46FA-8FA2-A0D16E8E0686}"/>
               </a:ext>
             </a:extLst>
           </p:cNvPr>
           <p:cNvSpPr>
-            <a:spLocks xmlns:a="http://schemas.openxmlformats.org/drawingml/2006/main" noGrp="1"/>
+            <a:spLocks noGrp="1"/>
           </p:cNvSpPr>
           <p:nvPr/>
         </p:nvSpPr>
         <p:spPr>
-          <a:xfrm xmlns:a="http://schemas.openxmlformats.org/drawingml/2006/main">
+          <a:xfrm>
             <a:off x="762000" y="2238375"/>
             <a:ext cx="3238500" cy="381000"/>
           </a:xfrm>
-          <a:prstGeom xmlns:a="http://schemas.openxmlformats.org/drawingml/2006/main" prst="rect">
-            <a:avLst/>
-          </a:prstGeom>
-          <a:noFill xmlns:a="http://schemas.openxmlformats.org/drawingml/2006/main"/>
-          <a:ln xmlns:a="http://schemas.openxmlformats.org/drawingml/2006/main" w="0">
+          <a:prstGeom prst="rect">
+            <a:avLst/>
+          </a:prstGeom>
+          <a:noFill/>
+          <a:ln w="0">
             <a:noFill/>
             <a:prstDash val="solid"/>
           </a:ln>
         </p:spPr>
         <p:txBody>
-          <a:bodyPr xmlns:a="http://schemas.openxmlformats.org/drawingml/2006/main" anchor="ctr"/>
-          <a:lstStyle xmlns:a="http://schemas.openxmlformats.org/drawingml/2006/main">
+          <a:bodyPr anchor="ctr"/>
+          <a:lstStyle>
             <a:defPPr>
               <a:defRPr sz="1800" b="1">
                 <a:solidFill>
@@ -4288,7 +4179,7 @@
               </a:defRPr>
             </a:defPPr>
           </a:lstStyle>
-          <a:p xmlns:a="http://schemas.openxmlformats.org/drawingml/2006/main">
+          <a:p>
             <a:pPr>
               <a:buNone/>
               <a:defRPr sz="1800" b="1">
@@ -4310,35 +4201,35 @@
       </p:sp>
       <p:sp>
         <p:nvSpPr>
-          <p:cNvPr id="6" name="">
-            <a:extLst xmlns:a="http://schemas.openxmlformats.org/drawingml/2006/main">
+          <p:cNvPr id="6" name="Rectángulo 5">
+            <a:extLst>
               <a:ext uri="{FF2B5EF4-FFF2-40B4-BE49-F238E27FC236}">
                 <a16:creationId xmlns:a16="http://schemas.microsoft.com/office/drawing/2014/main" id="{0F98B9D1-EA4B-43AF-8B35-84D517F9DA51}"/>
               </a:ext>
             </a:extLst>
           </p:cNvPr>
           <p:cNvSpPr>
-            <a:spLocks xmlns:a="http://schemas.openxmlformats.org/drawingml/2006/main" noGrp="1"/>
+            <a:spLocks noGrp="1"/>
           </p:cNvSpPr>
           <p:nvPr/>
         </p:nvSpPr>
         <p:spPr>
-          <a:xfrm xmlns:a="http://schemas.openxmlformats.org/drawingml/2006/main">
+          <a:xfrm>
             <a:off x="762000" y="2686050"/>
             <a:ext cx="4667250" cy="809625"/>
           </a:xfrm>
-          <a:prstGeom xmlns:a="http://schemas.openxmlformats.org/drawingml/2006/main" prst="rect">
-            <a:avLst/>
-          </a:prstGeom>
-          <a:noFill xmlns:a="http://schemas.openxmlformats.org/drawingml/2006/main"/>
-          <a:ln xmlns:a="http://schemas.openxmlformats.org/drawingml/2006/main" w="0">
+          <a:prstGeom prst="rect">
+            <a:avLst/>
+          </a:prstGeom>
+          <a:noFill/>
+          <a:ln w="0">
             <a:noFill/>
             <a:prstDash val="solid"/>
           </a:ln>
         </p:spPr>
         <p:txBody>
-          <a:bodyPr xmlns:a="http://schemas.openxmlformats.org/drawingml/2006/main" anchor="ctr"/>
-          <a:lstStyle xmlns:a="http://schemas.openxmlformats.org/drawingml/2006/main">
+          <a:bodyPr anchor="ctr"/>
+          <a:lstStyle>
             <a:defPPr>
               <a:defRPr sz="1575" b="0">
                 <a:solidFill>
@@ -4347,7 +4238,7 @@
               </a:defRPr>
             </a:defPPr>
           </a:lstStyle>
-          <a:p xmlns:a="http://schemas.openxmlformats.org/drawingml/2006/main">
+          <a:p>
             <a:pPr>
               <a:buNone/>
               <a:defRPr sz="1575" b="0">
@@ -4369,35 +4260,35 @@
       </p:sp>
       <p:sp>
         <p:nvSpPr>
-          <p:cNvPr id="7" name="">
-            <a:extLst xmlns:a="http://schemas.openxmlformats.org/drawingml/2006/main">
+          <p:cNvPr id="7" name="Rectángulo 6">
+            <a:extLst>
               <a:ext uri="{FF2B5EF4-FFF2-40B4-BE49-F238E27FC236}">
                 <a16:creationId xmlns:a16="http://schemas.microsoft.com/office/drawing/2014/main" id="{A888E31F-00B4-4EAD-A74C-4C26A641EDD0}"/>
               </a:ext>
             </a:extLst>
           </p:cNvPr>
           <p:cNvSpPr>
-            <a:spLocks xmlns:a="http://schemas.openxmlformats.org/drawingml/2006/main" noGrp="1"/>
+            <a:spLocks noGrp="1"/>
           </p:cNvSpPr>
           <p:nvPr/>
         </p:nvSpPr>
         <p:spPr>
-          <a:xfrm xmlns:a="http://schemas.openxmlformats.org/drawingml/2006/main">
+          <a:xfrm>
             <a:off x="6096000" y="2238375"/>
             <a:ext cx="2667000" cy="381000"/>
           </a:xfrm>
-          <a:prstGeom xmlns:a="http://schemas.openxmlformats.org/drawingml/2006/main" prst="rect">
-            <a:avLst/>
-          </a:prstGeom>
-          <a:noFill xmlns:a="http://schemas.openxmlformats.org/drawingml/2006/main"/>
-          <a:ln xmlns:a="http://schemas.openxmlformats.org/drawingml/2006/main" w="0">
+          <a:prstGeom prst="rect">
+            <a:avLst/>
+          </a:prstGeom>
+          <a:noFill/>
+          <a:ln w="0">
             <a:noFill/>
             <a:prstDash val="solid"/>
           </a:ln>
         </p:spPr>
         <p:txBody>
-          <a:bodyPr xmlns:a="http://schemas.openxmlformats.org/drawingml/2006/main" anchor="ctr"/>
-          <a:lstStyle xmlns:a="http://schemas.openxmlformats.org/drawingml/2006/main">
+          <a:bodyPr anchor="ctr"/>
+          <a:lstStyle>
             <a:defPPr>
               <a:defRPr sz="1800" b="1">
                 <a:solidFill>
@@ -4406,7 +4297,7 @@
               </a:defRPr>
             </a:defPPr>
           </a:lstStyle>
-          <a:p xmlns:a="http://schemas.openxmlformats.org/drawingml/2006/main">
+          <a:p>
             <a:pPr>
               <a:buNone/>
               <a:defRPr sz="1800" b="1">
@@ -4428,35 +4319,35 @@
       </p:sp>
       <p:sp>
         <p:nvSpPr>
-          <p:cNvPr id="8" name="">
-            <a:extLst xmlns:a="http://schemas.openxmlformats.org/drawingml/2006/main">
+          <p:cNvPr id="8" name="Rectángulo 7">
+            <a:extLst>
               <a:ext uri="{FF2B5EF4-FFF2-40B4-BE49-F238E27FC236}">
                 <a16:creationId xmlns:a16="http://schemas.microsoft.com/office/drawing/2014/main" id="{0D5E1EAA-4941-4159-938C-DB26E9193F35}"/>
               </a:ext>
             </a:extLst>
           </p:cNvPr>
           <p:cNvSpPr>
-            <a:spLocks xmlns:a="http://schemas.openxmlformats.org/drawingml/2006/main" noGrp="1"/>
+            <a:spLocks noGrp="1"/>
           </p:cNvSpPr>
           <p:nvPr/>
         </p:nvSpPr>
         <p:spPr>
-          <a:xfrm xmlns:a="http://schemas.openxmlformats.org/drawingml/2006/main">
+          <a:xfrm>
             <a:off x="6096000" y="2686050"/>
             <a:ext cx="5238750" cy="809625"/>
           </a:xfrm>
-          <a:prstGeom xmlns:a="http://schemas.openxmlformats.org/drawingml/2006/main" prst="rect">
-            <a:avLst/>
-          </a:prstGeom>
-          <a:noFill xmlns:a="http://schemas.openxmlformats.org/drawingml/2006/main"/>
-          <a:ln xmlns:a="http://schemas.openxmlformats.org/drawingml/2006/main" w="0">
+          <a:prstGeom prst="rect">
+            <a:avLst/>
+          </a:prstGeom>
+          <a:noFill/>
+          <a:ln w="0">
             <a:noFill/>
             <a:prstDash val="solid"/>
           </a:ln>
         </p:spPr>
         <p:txBody>
-          <a:bodyPr xmlns:a="http://schemas.openxmlformats.org/drawingml/2006/main" anchor="ctr"/>
-          <a:lstStyle xmlns:a="http://schemas.openxmlformats.org/drawingml/2006/main">
+          <a:bodyPr anchor="ctr"/>
+          <a:lstStyle>
             <a:defPPr>
               <a:defRPr sz="1575" b="0">
                 <a:solidFill>
@@ -4465,7 +4356,7 @@
               </a:defRPr>
             </a:defPPr>
           </a:lstStyle>
-          <a:p xmlns:a="http://schemas.openxmlformats.org/drawingml/2006/main">
+          <a:p>
             <a:pPr>
               <a:buNone/>
               <a:defRPr sz="1575" b="0">
@@ -4487,35 +4378,35 @@
       </p:sp>
       <p:sp>
         <p:nvSpPr>
-          <p:cNvPr id="9" name="">
-            <a:extLst xmlns:a="http://schemas.openxmlformats.org/drawingml/2006/main">
+          <p:cNvPr id="9" name="Rectángulo 8">
+            <a:extLst>
               <a:ext uri="{FF2B5EF4-FFF2-40B4-BE49-F238E27FC236}">
                 <a16:creationId xmlns:a16="http://schemas.microsoft.com/office/drawing/2014/main" id="{A06E9F02-1BEE-4096-B2C9-44987E76A2FA}"/>
               </a:ext>
             </a:extLst>
           </p:cNvPr>
           <p:cNvSpPr>
-            <a:spLocks xmlns:a="http://schemas.openxmlformats.org/drawingml/2006/main" noGrp="1"/>
+            <a:spLocks noGrp="1"/>
           </p:cNvSpPr>
           <p:nvPr/>
         </p:nvSpPr>
         <p:spPr>
-          <a:xfrm xmlns:a="http://schemas.openxmlformats.org/drawingml/2006/main">
+          <a:xfrm>
             <a:off x="762000" y="4000500"/>
             <a:ext cx="2857500" cy="381000"/>
           </a:xfrm>
-          <a:prstGeom xmlns:a="http://schemas.openxmlformats.org/drawingml/2006/main" prst="rect">
-            <a:avLst/>
-          </a:prstGeom>
-          <a:noFill xmlns:a="http://schemas.openxmlformats.org/drawingml/2006/main"/>
-          <a:ln xmlns:a="http://schemas.openxmlformats.org/drawingml/2006/main" w="0">
+          <a:prstGeom prst="rect">
+            <a:avLst/>
+          </a:prstGeom>
+          <a:noFill/>
+          <a:ln w="0">
             <a:noFill/>
             <a:prstDash val="solid"/>
           </a:ln>
         </p:spPr>
         <p:txBody>
-          <a:bodyPr xmlns:a="http://schemas.openxmlformats.org/drawingml/2006/main" anchor="ctr"/>
-          <a:lstStyle xmlns:a="http://schemas.openxmlformats.org/drawingml/2006/main">
+          <a:bodyPr anchor="ctr"/>
+          <a:lstStyle>
             <a:defPPr>
               <a:defRPr sz="1800" b="1">
                 <a:solidFill>
@@ -4524,7 +4415,7 @@
               </a:defRPr>
             </a:defPPr>
           </a:lstStyle>
-          <a:p xmlns:a="http://schemas.openxmlformats.org/drawingml/2006/main">
+          <a:p>
             <a:pPr>
               <a:buNone/>
               <a:defRPr sz="1800" b="1">
@@ -4546,35 +4437,35 @@
       </p:sp>
       <p:sp>
         <p:nvSpPr>
-          <p:cNvPr id="10" name="">
-            <a:extLst xmlns:a="http://schemas.openxmlformats.org/drawingml/2006/main">
+          <p:cNvPr id="10" name="Rectángulo 9">
+            <a:extLst>
               <a:ext uri="{FF2B5EF4-FFF2-40B4-BE49-F238E27FC236}">
                 <a16:creationId xmlns:a16="http://schemas.microsoft.com/office/drawing/2014/main" id="{D73BE652-90B9-4890-AEC1-D973AC5C3DF5}"/>
               </a:ext>
             </a:extLst>
           </p:cNvPr>
           <p:cNvSpPr>
-            <a:spLocks xmlns:a="http://schemas.openxmlformats.org/drawingml/2006/main" noGrp="1"/>
+            <a:spLocks noGrp="1"/>
           </p:cNvSpPr>
           <p:nvPr/>
         </p:nvSpPr>
         <p:spPr>
-          <a:xfrm xmlns:a="http://schemas.openxmlformats.org/drawingml/2006/main">
+          <a:xfrm>
             <a:off x="762000" y="4448175"/>
             <a:ext cx="4953000" cy="838200"/>
           </a:xfrm>
-          <a:prstGeom xmlns:a="http://schemas.openxmlformats.org/drawingml/2006/main" prst="rect">
-            <a:avLst/>
-          </a:prstGeom>
-          <a:noFill xmlns:a="http://schemas.openxmlformats.org/drawingml/2006/main"/>
-          <a:ln xmlns:a="http://schemas.openxmlformats.org/drawingml/2006/main" w="0">
+          <a:prstGeom prst="rect">
+            <a:avLst/>
+          </a:prstGeom>
+          <a:noFill/>
+          <a:ln w="0">
             <a:noFill/>
             <a:prstDash val="solid"/>
           </a:ln>
         </p:spPr>
         <p:txBody>
-          <a:bodyPr xmlns:a="http://schemas.openxmlformats.org/drawingml/2006/main" anchor="ctr"/>
-          <a:lstStyle xmlns:a="http://schemas.openxmlformats.org/drawingml/2006/main">
+          <a:bodyPr anchor="ctr"/>
+          <a:lstStyle>
             <a:defPPr>
               <a:defRPr sz="1575" b="0">
                 <a:solidFill>
@@ -4583,7 +4474,7 @@
               </a:defRPr>
             </a:defPPr>
           </a:lstStyle>
-          <a:p xmlns:a="http://schemas.openxmlformats.org/drawingml/2006/main">
+          <a:p>
             <a:pPr>
               <a:buNone/>
               <a:defRPr sz="1575" b="0">
@@ -4605,35 +4496,35 @@
       </p:sp>
       <p:sp>
         <p:nvSpPr>
-          <p:cNvPr id="11" name="">
-            <a:extLst xmlns:a="http://schemas.openxmlformats.org/drawingml/2006/main">
+          <p:cNvPr id="11" name="Rectángulo 10">
+            <a:extLst>
               <a:ext uri="{FF2B5EF4-FFF2-40B4-BE49-F238E27FC236}">
                 <a16:creationId xmlns:a16="http://schemas.microsoft.com/office/drawing/2014/main" id="{EAE5D3CD-0E15-4879-94FF-029C11A9EFE3}"/>
               </a:ext>
             </a:extLst>
           </p:cNvPr>
           <p:cNvSpPr>
-            <a:spLocks xmlns:a="http://schemas.openxmlformats.org/drawingml/2006/main" noGrp="1"/>
+            <a:spLocks noGrp="1"/>
           </p:cNvSpPr>
           <p:nvPr/>
         </p:nvSpPr>
         <p:spPr>
-          <a:xfrm xmlns:a="http://schemas.openxmlformats.org/drawingml/2006/main">
+          <a:xfrm>
             <a:off x="6096000" y="4000500"/>
             <a:ext cx="3810000" cy="381000"/>
           </a:xfrm>
-          <a:prstGeom xmlns:a="http://schemas.openxmlformats.org/drawingml/2006/main" prst="rect">
-            <a:avLst/>
-          </a:prstGeom>
-          <a:noFill xmlns:a="http://schemas.openxmlformats.org/drawingml/2006/main"/>
-          <a:ln xmlns:a="http://schemas.openxmlformats.org/drawingml/2006/main" w="0">
+          <a:prstGeom prst="rect">
+            <a:avLst/>
+          </a:prstGeom>
+          <a:noFill/>
+          <a:ln w="0">
             <a:noFill/>
             <a:prstDash val="solid"/>
           </a:ln>
         </p:spPr>
         <p:txBody>
-          <a:bodyPr xmlns:a="http://schemas.openxmlformats.org/drawingml/2006/main" anchor="ctr"/>
-          <a:lstStyle xmlns:a="http://schemas.openxmlformats.org/drawingml/2006/main">
+          <a:bodyPr anchor="ctr"/>
+          <a:lstStyle>
             <a:defPPr>
               <a:defRPr sz="1800" b="1">
                 <a:solidFill>
@@ -4642,7 +4533,7 @@
               </a:defRPr>
             </a:defPPr>
           </a:lstStyle>
-          <a:p xmlns:a="http://schemas.openxmlformats.org/drawingml/2006/main">
+          <a:p>
             <a:pPr>
               <a:buNone/>
               <a:defRPr sz="1800" b="1">
@@ -4664,35 +4555,35 @@
       </p:sp>
       <p:sp>
         <p:nvSpPr>
-          <p:cNvPr id="12" name="">
-            <a:extLst xmlns:a="http://schemas.openxmlformats.org/drawingml/2006/main">
+          <p:cNvPr id="12" name="Rectángulo 11">
+            <a:extLst>
               <a:ext uri="{FF2B5EF4-FFF2-40B4-BE49-F238E27FC236}">
                 <a16:creationId xmlns:a16="http://schemas.microsoft.com/office/drawing/2014/main" id="{AECA2ED1-3069-4C7C-B14E-53C01E5F10AE}"/>
               </a:ext>
             </a:extLst>
           </p:cNvPr>
           <p:cNvSpPr>
-            <a:spLocks xmlns:a="http://schemas.openxmlformats.org/drawingml/2006/main" noGrp="1"/>
+            <a:spLocks noGrp="1"/>
           </p:cNvSpPr>
           <p:nvPr/>
         </p:nvSpPr>
         <p:spPr>
-          <a:xfrm xmlns:a="http://schemas.openxmlformats.org/drawingml/2006/main">
+          <a:xfrm>
             <a:off x="6096000" y="4448175"/>
             <a:ext cx="5143500" cy="876300"/>
           </a:xfrm>
-          <a:prstGeom xmlns:a="http://schemas.openxmlformats.org/drawingml/2006/main" prst="rect">
-            <a:avLst/>
-          </a:prstGeom>
-          <a:noFill xmlns:a="http://schemas.openxmlformats.org/drawingml/2006/main"/>
-          <a:ln xmlns:a="http://schemas.openxmlformats.org/drawingml/2006/main" w="0">
+          <a:prstGeom prst="rect">
+            <a:avLst/>
+          </a:prstGeom>
+          <a:noFill/>
+          <a:ln w="0">
             <a:noFill/>
             <a:prstDash val="solid"/>
           </a:ln>
         </p:spPr>
         <p:txBody>
-          <a:bodyPr xmlns:a="http://schemas.openxmlformats.org/drawingml/2006/main" anchor="ctr"/>
-          <a:lstStyle xmlns:a="http://schemas.openxmlformats.org/drawingml/2006/main">
+          <a:bodyPr anchor="ctr"/>
+          <a:lstStyle>
             <a:defPPr>
               <a:defRPr sz="1500" b="0">
                 <a:solidFill>
@@ -4701,7 +4592,7 @@
               </a:defRPr>
             </a:defPPr>
           </a:lstStyle>
-          <a:p xmlns:a="http://schemas.openxmlformats.org/drawingml/2006/main">
+          <a:p>
             <a:pPr>
               <a:buNone/>
               <a:defRPr sz="1500" b="0">
@@ -4728,17 +4619,21 @@
       </p:ext>
     </p:extLst>
   </p:cSld>
+  <p:clrMapOvr>
+    <a:masterClrMapping/>
+  </p:clrMapOvr>
 </p:sld>
 </file>
 
 <file path=ppt/slides/slide4.xml><?xml version="1.0" encoding="utf-8"?>
-<p:sld xmlns:p="http://schemas.openxmlformats.org/presentationml/2006/main">
+<p:sld xmlns:a="http://schemas.openxmlformats.org/drawingml/2006/main" xmlns:r="http://schemas.openxmlformats.org/officeDocument/2006/relationships" xmlns:p="http://schemas.openxmlformats.org/presentationml/2006/main">
   <p:cSld>
     <p:bg>
       <p:bgPr>
-        <a:solidFill xmlns:a="http://schemas.openxmlformats.org/drawingml/2006/main">
+        <a:solidFill>
           <a:srgbClr val="F3F7FA"/>
         </a:solidFill>
+        <a:effectLst/>
       </p:bgPr>
     </p:bg>
     <p:spTree>
@@ -4748,39 +4643,44 @@
         <p:nvPr/>
       </p:nvGrpSpPr>
       <p:grpSpPr>
-        <a:xfrm xmlns:a="http://schemas.openxmlformats.org/drawingml/2006/main"/>
+        <a:xfrm>
+          <a:off x="0" y="0"/>
+          <a:ext cx="0" cy="0"/>
+          <a:chOff x="0" y="0"/>
+          <a:chExt cx="0" cy="0"/>
+        </a:xfrm>
       </p:grpSpPr>
       <p:sp>
         <p:nvSpPr>
-          <p:cNvPr id="12" name="">
-            <a:extLst xmlns:a="http://schemas.openxmlformats.org/drawingml/2006/main">
+          <p:cNvPr id="12" name="Rectángulo 11">
+            <a:extLst>
               <a:ext uri="{FF2B5EF4-FFF2-40B4-BE49-F238E27FC236}">
                 <a16:creationId xmlns:a16="http://schemas.microsoft.com/office/drawing/2014/main" id="{583035A6-6124-4417-942E-ABC55ABB2A2D}"/>
               </a:ext>
             </a:extLst>
           </p:cNvPr>
           <p:cNvSpPr>
-            <a:spLocks xmlns:a="http://schemas.openxmlformats.org/drawingml/2006/main" noGrp="1"/>
+            <a:spLocks noGrp="1"/>
           </p:cNvSpPr>
           <p:nvPr/>
         </p:nvSpPr>
         <p:spPr>
-          <a:xfrm xmlns:a="http://schemas.openxmlformats.org/drawingml/2006/main">
+          <a:xfrm>
             <a:off x="609600" y="323850"/>
             <a:ext cx="8572500" cy="247650"/>
           </a:xfrm>
-          <a:prstGeom xmlns:a="http://schemas.openxmlformats.org/drawingml/2006/main" prst="rect">
-            <a:avLst/>
-          </a:prstGeom>
-          <a:noFill xmlns:a="http://schemas.openxmlformats.org/drawingml/2006/main"/>
-          <a:ln xmlns:a="http://schemas.openxmlformats.org/drawingml/2006/main" w="0">
+          <a:prstGeom prst="rect">
+            <a:avLst/>
+          </a:prstGeom>
+          <a:noFill/>
+          <a:ln w="0">
             <a:noFill/>
             <a:prstDash val="solid"/>
           </a:ln>
         </p:spPr>
         <p:txBody>
-          <a:bodyPr xmlns:a="http://schemas.openxmlformats.org/drawingml/2006/main" anchor="ctr"/>
-          <a:lstStyle xmlns:a="http://schemas.openxmlformats.org/drawingml/2006/main">
+          <a:bodyPr anchor="ctr"/>
+          <a:lstStyle>
             <a:defPPr>
               <a:defRPr sz="1050" b="1">
                 <a:solidFill>
@@ -4789,7 +4689,7 @@
               </a:defRPr>
             </a:defPPr>
           </a:lstStyle>
-          <a:p xmlns:a="http://schemas.openxmlformats.org/drawingml/2006/main">
+          <a:p>
             <a:pPr>
               <a:buNone/>
               <a:defRPr sz="1050" b="1">
@@ -4811,35 +4711,35 @@
       </p:sp>
       <p:sp>
         <p:nvSpPr>
-          <p:cNvPr id="2" name="">
-            <a:extLst xmlns:a="http://schemas.openxmlformats.org/drawingml/2006/main">
+          <p:cNvPr id="2" name="Rectángulo 1">
+            <a:extLst>
               <a:ext uri="{FF2B5EF4-FFF2-40B4-BE49-F238E27FC236}">
                 <a16:creationId xmlns:a16="http://schemas.microsoft.com/office/drawing/2014/main" id="{9F589B5E-FE8F-47E7-ADF0-F49A0505F73F}"/>
               </a:ext>
             </a:extLst>
           </p:cNvPr>
           <p:cNvSpPr>
-            <a:spLocks xmlns:a="http://schemas.openxmlformats.org/drawingml/2006/main" noGrp="1"/>
+            <a:spLocks noGrp="1"/>
           </p:cNvSpPr>
           <p:nvPr/>
         </p:nvSpPr>
         <p:spPr>
-          <a:xfrm xmlns:a="http://schemas.openxmlformats.org/drawingml/2006/main">
+          <a:xfrm>
             <a:off x="609600" y="781050"/>
             <a:ext cx="10953750" cy="533400"/>
           </a:xfrm>
-          <a:prstGeom xmlns:a="http://schemas.openxmlformats.org/drawingml/2006/main" prst="rect">
-            <a:avLst/>
-          </a:prstGeom>
-          <a:noFill xmlns:a="http://schemas.openxmlformats.org/drawingml/2006/main"/>
-          <a:ln xmlns:a="http://schemas.openxmlformats.org/drawingml/2006/main" w="0">
+          <a:prstGeom prst="rect">
+            <a:avLst/>
+          </a:prstGeom>
+          <a:noFill/>
+          <a:ln w="0">
             <a:noFill/>
             <a:prstDash val="solid"/>
           </a:ln>
         </p:spPr>
         <p:txBody>
-          <a:bodyPr xmlns:a="http://schemas.openxmlformats.org/drawingml/2006/main" anchor="ctr"/>
-          <a:lstStyle xmlns:a="http://schemas.openxmlformats.org/drawingml/2006/main">
+          <a:bodyPr anchor="ctr"/>
+          <a:lstStyle>
             <a:defPPr>
               <a:defRPr sz="2700" b="1">
                 <a:solidFill>
@@ -4848,7 +4748,7 @@
               </a:defRPr>
             </a:defPPr>
           </a:lstStyle>
-          <a:p xmlns:a="http://schemas.openxmlformats.org/drawingml/2006/main">
+          <a:p>
             <a:pPr>
               <a:buNone/>
               <a:defRPr sz="2700" b="1">
@@ -4870,35 +4770,35 @@
       </p:sp>
       <p:sp>
         <p:nvSpPr>
-          <p:cNvPr id="3" name="">
-            <a:extLst xmlns:a="http://schemas.openxmlformats.org/drawingml/2006/main">
+          <p:cNvPr id="3" name="Rectángulo 2">
+            <a:extLst>
               <a:ext uri="{FF2B5EF4-FFF2-40B4-BE49-F238E27FC236}">
                 <a16:creationId xmlns:a16="http://schemas.microsoft.com/office/drawing/2014/main" id="{BE12C3A6-912A-4DBF-9D4A-46F85A2F083C}"/>
               </a:ext>
             </a:extLst>
           </p:cNvPr>
           <p:cNvSpPr>
-            <a:spLocks xmlns:a="http://schemas.openxmlformats.org/drawingml/2006/main" noGrp="1"/>
+            <a:spLocks noGrp="1"/>
           </p:cNvSpPr>
           <p:nvPr/>
         </p:nvSpPr>
         <p:spPr>
-          <a:xfrm xmlns:a="http://schemas.openxmlformats.org/drawingml/2006/main">
+          <a:xfrm>
             <a:off x="609600" y="1381125"/>
             <a:ext cx="10477500" cy="381000"/>
           </a:xfrm>
-          <a:prstGeom xmlns:a="http://schemas.openxmlformats.org/drawingml/2006/main" prst="rect">
-            <a:avLst/>
-          </a:prstGeom>
-          <a:noFill xmlns:a="http://schemas.openxmlformats.org/drawingml/2006/main"/>
-          <a:ln xmlns:a="http://schemas.openxmlformats.org/drawingml/2006/main" w="0">
+          <a:prstGeom prst="rect">
+            <a:avLst/>
+          </a:prstGeom>
+          <a:noFill/>
+          <a:ln w="0">
             <a:noFill/>
             <a:prstDash val="solid"/>
           </a:ln>
         </p:spPr>
         <p:txBody>
-          <a:bodyPr xmlns:a="http://schemas.openxmlformats.org/drawingml/2006/main" anchor="ctr"/>
-          <a:lstStyle xmlns:a="http://schemas.openxmlformats.org/drawingml/2006/main">
+          <a:bodyPr anchor="ctr"/>
+          <a:lstStyle>
             <a:defPPr>
               <a:defRPr sz="1425" b="0">
                 <a:solidFill>
@@ -4907,7 +4807,7 @@
               </a:defRPr>
             </a:defPPr>
           </a:lstStyle>
-          <a:p xmlns:a="http://schemas.openxmlformats.org/drawingml/2006/main">
+          <a:p>
             <a:pPr>
               <a:buNone/>
               <a:defRPr sz="1425" b="0">
@@ -4929,35 +4829,35 @@
       </p:sp>
       <p:sp>
         <p:nvSpPr>
-          <p:cNvPr id="4" name="">
-            <a:extLst xmlns:a="http://schemas.openxmlformats.org/drawingml/2006/main">
+          <p:cNvPr id="4" name="Rectángulo 3">
+            <a:extLst>
               <a:ext uri="{FF2B5EF4-FFF2-40B4-BE49-F238E27FC236}">
                 <a16:creationId xmlns:a16="http://schemas.microsoft.com/office/drawing/2014/main" id="{22AB8B8B-D92A-4D35-B81D-6EEB447302A2}"/>
               </a:ext>
             </a:extLst>
           </p:cNvPr>
           <p:cNvSpPr>
-            <a:spLocks xmlns:a="http://schemas.openxmlformats.org/drawingml/2006/main" noGrp="1"/>
+            <a:spLocks noGrp="1"/>
           </p:cNvSpPr>
           <p:nvPr/>
         </p:nvSpPr>
         <p:spPr>
-          <a:xfrm xmlns:a="http://schemas.openxmlformats.org/drawingml/2006/main">
+          <a:xfrm>
             <a:off x="609600" y="6419850"/>
             <a:ext cx="10477500" cy="190500"/>
           </a:xfrm>
-          <a:prstGeom xmlns:a="http://schemas.openxmlformats.org/drawingml/2006/main" prst="rect">
-            <a:avLst/>
-          </a:prstGeom>
-          <a:noFill xmlns:a="http://schemas.openxmlformats.org/drawingml/2006/main"/>
-          <a:ln xmlns:a="http://schemas.openxmlformats.org/drawingml/2006/main" w="0">
+          <a:prstGeom prst="rect">
+            <a:avLst/>
+          </a:prstGeom>
+          <a:noFill/>
+          <a:ln w="0">
             <a:noFill/>
             <a:prstDash val="solid"/>
           </a:ln>
         </p:spPr>
         <p:txBody>
-          <a:bodyPr xmlns:a="http://schemas.openxmlformats.org/drawingml/2006/main" anchor="ctr"/>
-          <a:lstStyle xmlns:a="http://schemas.openxmlformats.org/drawingml/2006/main">
+          <a:bodyPr anchor="ctr"/>
+          <a:lstStyle>
             <a:defPPr>
               <a:defRPr sz="900" b="0">
                 <a:solidFill>
@@ -4966,7 +4866,7 @@
               </a:defRPr>
             </a:defPPr>
           </a:lstStyle>
-          <a:p xmlns:a="http://schemas.openxmlformats.org/drawingml/2006/main">
+          <a:p>
             <a:pPr>
               <a:buNone/>
               <a:defRPr sz="900" b="0">
@@ -4988,35 +4888,35 @@
       </p:sp>
       <p:sp>
         <p:nvSpPr>
-          <p:cNvPr id="5" name="">
-            <a:extLst xmlns:a="http://schemas.openxmlformats.org/drawingml/2006/main">
+          <p:cNvPr id="5" name="Rectángulo 4">
+            <a:extLst>
               <a:ext uri="{FF2B5EF4-FFF2-40B4-BE49-F238E27FC236}">
                 <a16:creationId xmlns:a16="http://schemas.microsoft.com/office/drawing/2014/main" id="{EE4C0ADA-E944-4C64-958B-D1932F06A276}"/>
               </a:ext>
             </a:extLst>
           </p:cNvPr>
           <p:cNvSpPr>
-            <a:spLocks xmlns:a="http://schemas.openxmlformats.org/drawingml/2006/main" noGrp="1"/>
+            <a:spLocks noGrp="1"/>
           </p:cNvSpPr>
           <p:nvPr/>
         </p:nvSpPr>
         <p:spPr>
-          <a:xfrm xmlns:a="http://schemas.openxmlformats.org/drawingml/2006/main">
+          <a:xfrm>
             <a:off x="857250" y="2333625"/>
             <a:ext cx="666750" cy="666750"/>
           </a:xfrm>
-          <a:prstGeom xmlns:a="http://schemas.openxmlformats.org/drawingml/2006/main" prst="rect">
-            <a:avLst/>
-          </a:prstGeom>
-          <a:noFill xmlns:a="http://schemas.openxmlformats.org/drawingml/2006/main"/>
-          <a:ln xmlns:a="http://schemas.openxmlformats.org/drawingml/2006/main" w="0">
+          <a:prstGeom prst="rect">
+            <a:avLst/>
+          </a:prstGeom>
+          <a:noFill/>
+          <a:ln w="0">
             <a:noFill/>
             <a:prstDash val="solid"/>
           </a:ln>
         </p:spPr>
         <p:txBody>
-          <a:bodyPr xmlns:a="http://schemas.openxmlformats.org/drawingml/2006/main" anchor="ctr"/>
-          <a:lstStyle xmlns:a="http://schemas.openxmlformats.org/drawingml/2006/main">
+          <a:bodyPr anchor="ctr"/>
+          <a:lstStyle>
             <a:defPPr>
               <a:defRPr sz="3150" b="1">
                 <a:solidFill>
@@ -5025,7 +4925,7 @@
               </a:defRPr>
             </a:defPPr>
           </a:lstStyle>
-          <a:p xmlns:a="http://schemas.openxmlformats.org/drawingml/2006/main">
+          <a:p>
             <a:pPr>
               <a:buNone/>
               <a:defRPr sz="3150" b="1">
@@ -5047,35 +4947,35 @@
       </p:sp>
       <p:sp>
         <p:nvSpPr>
-          <p:cNvPr id="6" name="">
-            <a:extLst xmlns:a="http://schemas.openxmlformats.org/drawingml/2006/main">
+          <p:cNvPr id="6" name="Rectángulo 5">
+            <a:extLst>
               <a:ext uri="{FF2B5EF4-FFF2-40B4-BE49-F238E27FC236}">
                 <a16:creationId xmlns:a16="http://schemas.microsoft.com/office/drawing/2014/main" id="{555C6079-3EDB-433A-85AC-3C2571BEB366}"/>
               </a:ext>
             </a:extLst>
           </p:cNvPr>
           <p:cNvSpPr>
-            <a:spLocks xmlns:a="http://schemas.openxmlformats.org/drawingml/2006/main" noGrp="1"/>
+            <a:spLocks noGrp="1"/>
           </p:cNvSpPr>
           <p:nvPr/>
         </p:nvSpPr>
         <p:spPr>
-          <a:xfrm xmlns:a="http://schemas.openxmlformats.org/drawingml/2006/main">
+          <a:xfrm>
             <a:off x="1619250" y="2428875"/>
             <a:ext cx="3714750" cy="428625"/>
           </a:xfrm>
-          <a:prstGeom xmlns:a="http://schemas.openxmlformats.org/drawingml/2006/main" prst="rect">
-            <a:avLst/>
-          </a:prstGeom>
-          <a:noFill xmlns:a="http://schemas.openxmlformats.org/drawingml/2006/main"/>
-          <a:ln xmlns:a="http://schemas.openxmlformats.org/drawingml/2006/main" w="0">
+          <a:prstGeom prst="rect">
+            <a:avLst/>
+          </a:prstGeom>
+          <a:noFill/>
+          <a:ln w="0">
             <a:noFill/>
             <a:prstDash val="solid"/>
           </a:ln>
         </p:spPr>
         <p:txBody>
-          <a:bodyPr xmlns:a="http://schemas.openxmlformats.org/drawingml/2006/main" anchor="ctr"/>
-          <a:lstStyle xmlns:a="http://schemas.openxmlformats.org/drawingml/2006/main">
+          <a:bodyPr anchor="ctr"/>
+          <a:lstStyle>
             <a:defPPr>
               <a:defRPr sz="1875" b="1">
                 <a:solidFill>
@@ -5084,7 +4984,7 @@
               </a:defRPr>
             </a:defPPr>
           </a:lstStyle>
-          <a:p xmlns:a="http://schemas.openxmlformats.org/drawingml/2006/main">
+          <a:p>
             <a:pPr>
               <a:buNone/>
               <a:defRPr sz="1875" b="1">
@@ -5106,35 +5006,35 @@
       </p:sp>
       <p:sp>
         <p:nvSpPr>
-          <p:cNvPr id="7" name="">
-            <a:extLst xmlns:a="http://schemas.openxmlformats.org/drawingml/2006/main">
+          <p:cNvPr id="7" name="Rectángulo 6">
+            <a:extLst>
               <a:ext uri="{FF2B5EF4-FFF2-40B4-BE49-F238E27FC236}">
                 <a16:creationId xmlns:a16="http://schemas.microsoft.com/office/drawing/2014/main" id="{247672A5-D04C-4906-B2C0-633E12FFFB81}"/>
               </a:ext>
             </a:extLst>
           </p:cNvPr>
           <p:cNvSpPr>
-            <a:spLocks xmlns:a="http://schemas.openxmlformats.org/drawingml/2006/main" noGrp="1"/>
+            <a:spLocks noGrp="1"/>
           </p:cNvSpPr>
           <p:nvPr/>
         </p:nvSpPr>
         <p:spPr>
-          <a:xfrm xmlns:a="http://schemas.openxmlformats.org/drawingml/2006/main">
+          <a:xfrm>
             <a:off x="857250" y="3333750"/>
             <a:ext cx="666750" cy="666750"/>
           </a:xfrm>
-          <a:prstGeom xmlns:a="http://schemas.openxmlformats.org/drawingml/2006/main" prst="rect">
-            <a:avLst/>
-          </a:prstGeom>
-          <a:noFill xmlns:a="http://schemas.openxmlformats.org/drawingml/2006/main"/>
-          <a:ln xmlns:a="http://schemas.openxmlformats.org/drawingml/2006/main" w="0">
+          <a:prstGeom prst="rect">
+            <a:avLst/>
+          </a:prstGeom>
+          <a:noFill/>
+          <a:ln w="0">
             <a:noFill/>
             <a:prstDash val="solid"/>
           </a:ln>
         </p:spPr>
         <p:txBody>
-          <a:bodyPr xmlns:a="http://schemas.openxmlformats.org/drawingml/2006/main" anchor="ctr"/>
-          <a:lstStyle xmlns:a="http://schemas.openxmlformats.org/drawingml/2006/main">
+          <a:bodyPr anchor="ctr"/>
+          <a:lstStyle>
             <a:defPPr>
               <a:defRPr sz="3150" b="1">
                 <a:solidFill>
@@ -5143,7 +5043,7 @@
               </a:defRPr>
             </a:defPPr>
           </a:lstStyle>
-          <a:p xmlns:a="http://schemas.openxmlformats.org/drawingml/2006/main">
+          <a:p>
             <a:pPr>
               <a:buNone/>
               <a:defRPr sz="3150" b="1">
@@ -5165,35 +5065,35 @@
       </p:sp>
       <p:sp>
         <p:nvSpPr>
-          <p:cNvPr id="8" name="">
-            <a:extLst xmlns:a="http://schemas.openxmlformats.org/drawingml/2006/main">
+          <p:cNvPr id="8" name="Rectángulo 7">
+            <a:extLst>
               <a:ext uri="{FF2B5EF4-FFF2-40B4-BE49-F238E27FC236}">
                 <a16:creationId xmlns:a16="http://schemas.microsoft.com/office/drawing/2014/main" id="{9A73C478-F25F-4F73-A13E-613D29130BEC}"/>
               </a:ext>
             </a:extLst>
           </p:cNvPr>
           <p:cNvSpPr>
-            <a:spLocks xmlns:a="http://schemas.openxmlformats.org/drawingml/2006/main" noGrp="1"/>
+            <a:spLocks noGrp="1"/>
           </p:cNvSpPr>
           <p:nvPr/>
         </p:nvSpPr>
         <p:spPr>
-          <a:xfrm xmlns:a="http://schemas.openxmlformats.org/drawingml/2006/main">
+          <a:xfrm>
             <a:off x="1619250" y="3429000"/>
             <a:ext cx="4476750" cy="428625"/>
           </a:xfrm>
-          <a:prstGeom xmlns:a="http://schemas.openxmlformats.org/drawingml/2006/main" prst="rect">
-            <a:avLst/>
-          </a:prstGeom>
-          <a:noFill xmlns:a="http://schemas.openxmlformats.org/drawingml/2006/main"/>
-          <a:ln xmlns:a="http://schemas.openxmlformats.org/drawingml/2006/main" w="0">
+          <a:prstGeom prst="rect">
+            <a:avLst/>
+          </a:prstGeom>
+          <a:noFill/>
+          <a:ln w="0">
             <a:noFill/>
             <a:prstDash val="solid"/>
           </a:ln>
         </p:spPr>
         <p:txBody>
-          <a:bodyPr xmlns:a="http://schemas.openxmlformats.org/drawingml/2006/main" anchor="ctr"/>
-          <a:lstStyle xmlns:a="http://schemas.openxmlformats.org/drawingml/2006/main">
+          <a:bodyPr anchor="ctr"/>
+          <a:lstStyle>
             <a:defPPr>
               <a:defRPr sz="1875" b="1">
                 <a:solidFill>
@@ -5202,7 +5102,7 @@
               </a:defRPr>
             </a:defPPr>
           </a:lstStyle>
-          <a:p xmlns:a="http://schemas.openxmlformats.org/drawingml/2006/main">
+          <a:p>
             <a:pPr>
               <a:buNone/>
               <a:defRPr sz="1875" b="1">
@@ -5224,35 +5124,35 @@
       </p:sp>
       <p:sp>
         <p:nvSpPr>
-          <p:cNvPr id="9" name="">
-            <a:extLst xmlns:a="http://schemas.openxmlformats.org/drawingml/2006/main">
+          <p:cNvPr id="9" name="Rectángulo 8">
+            <a:extLst>
               <a:ext uri="{FF2B5EF4-FFF2-40B4-BE49-F238E27FC236}">
                 <a16:creationId xmlns:a16="http://schemas.microsoft.com/office/drawing/2014/main" id="{D0DCF825-6DDF-49C4-9B2E-F7B7A99C1B0C}"/>
               </a:ext>
             </a:extLst>
           </p:cNvPr>
           <p:cNvSpPr>
-            <a:spLocks xmlns:a="http://schemas.openxmlformats.org/drawingml/2006/main" noGrp="1"/>
+            <a:spLocks noGrp="1"/>
           </p:cNvSpPr>
           <p:nvPr/>
         </p:nvSpPr>
         <p:spPr>
-          <a:xfrm xmlns:a="http://schemas.openxmlformats.org/drawingml/2006/main">
+          <a:xfrm>
             <a:off x="857250" y="4333875"/>
             <a:ext cx="666750" cy="666750"/>
           </a:xfrm>
-          <a:prstGeom xmlns:a="http://schemas.openxmlformats.org/drawingml/2006/main" prst="rect">
-            <a:avLst/>
-          </a:prstGeom>
-          <a:noFill xmlns:a="http://schemas.openxmlformats.org/drawingml/2006/main"/>
-          <a:ln xmlns:a="http://schemas.openxmlformats.org/drawingml/2006/main" w="0">
+          <a:prstGeom prst="rect">
+            <a:avLst/>
+          </a:prstGeom>
+          <a:noFill/>
+          <a:ln w="0">
             <a:noFill/>
             <a:prstDash val="solid"/>
           </a:ln>
         </p:spPr>
         <p:txBody>
-          <a:bodyPr xmlns:a="http://schemas.openxmlformats.org/drawingml/2006/main" anchor="ctr"/>
-          <a:lstStyle xmlns:a="http://schemas.openxmlformats.org/drawingml/2006/main">
+          <a:bodyPr anchor="ctr"/>
+          <a:lstStyle>
             <a:defPPr>
               <a:defRPr sz="3150" b="1">
                 <a:solidFill>
@@ -5261,7 +5161,7 @@
               </a:defRPr>
             </a:defPPr>
           </a:lstStyle>
-          <a:p xmlns:a="http://schemas.openxmlformats.org/drawingml/2006/main">
+          <a:p>
             <a:pPr>
               <a:buNone/>
               <a:defRPr sz="3150" b="1">
@@ -5283,35 +5183,35 @@
       </p:sp>
       <p:sp>
         <p:nvSpPr>
-          <p:cNvPr id="10" name="">
-            <a:extLst xmlns:a="http://schemas.openxmlformats.org/drawingml/2006/main">
+          <p:cNvPr id="10" name="Rectángulo 9">
+            <a:extLst>
               <a:ext uri="{FF2B5EF4-FFF2-40B4-BE49-F238E27FC236}">
                 <a16:creationId xmlns:a16="http://schemas.microsoft.com/office/drawing/2014/main" id="{51A11DE6-BA24-40DB-930D-07E61FFC956C}"/>
               </a:ext>
             </a:extLst>
           </p:cNvPr>
           <p:cNvSpPr>
-            <a:spLocks xmlns:a="http://schemas.openxmlformats.org/drawingml/2006/main" noGrp="1"/>
+            <a:spLocks noGrp="1"/>
           </p:cNvSpPr>
           <p:nvPr/>
         </p:nvSpPr>
         <p:spPr>
-          <a:xfrm xmlns:a="http://schemas.openxmlformats.org/drawingml/2006/main">
+          <a:xfrm>
             <a:off x="1619250" y="4429125"/>
             <a:ext cx="4572000" cy="428625"/>
           </a:xfrm>
-          <a:prstGeom xmlns:a="http://schemas.openxmlformats.org/drawingml/2006/main" prst="rect">
-            <a:avLst/>
-          </a:prstGeom>
-          <a:noFill xmlns:a="http://schemas.openxmlformats.org/drawingml/2006/main"/>
-          <a:ln xmlns:a="http://schemas.openxmlformats.org/drawingml/2006/main" w="0">
+          <a:prstGeom prst="rect">
+            <a:avLst/>
+          </a:prstGeom>
+          <a:noFill/>
+          <a:ln w="0">
             <a:noFill/>
             <a:prstDash val="solid"/>
           </a:ln>
         </p:spPr>
         <p:txBody>
-          <a:bodyPr xmlns:a="http://schemas.openxmlformats.org/drawingml/2006/main" anchor="ctr"/>
-          <a:lstStyle xmlns:a="http://schemas.openxmlformats.org/drawingml/2006/main">
+          <a:bodyPr anchor="ctr"/>
+          <a:lstStyle>
             <a:defPPr>
               <a:defRPr sz="1875" b="1">
                 <a:solidFill>
@@ -5320,7 +5220,7 @@
               </a:defRPr>
             </a:defPPr>
           </a:lstStyle>
-          <a:p xmlns:a="http://schemas.openxmlformats.org/drawingml/2006/main">
+          <a:p>
             <a:pPr>
               <a:buNone/>
               <a:defRPr sz="1875" b="1">
@@ -5342,35 +5242,35 @@
       </p:sp>
       <p:sp>
         <p:nvSpPr>
-          <p:cNvPr id="11" name="">
-            <a:extLst xmlns:a="http://schemas.openxmlformats.org/drawingml/2006/main">
+          <p:cNvPr id="11" name="Rectángulo 10">
+            <a:extLst>
               <a:ext uri="{FF2B5EF4-FFF2-40B4-BE49-F238E27FC236}">
                 <a16:creationId xmlns:a16="http://schemas.microsoft.com/office/drawing/2014/main" id="{E2757C5A-CA0F-4362-A8C5-A55140CEABEB}"/>
               </a:ext>
             </a:extLst>
           </p:cNvPr>
           <p:cNvSpPr>
-            <a:spLocks xmlns:a="http://schemas.openxmlformats.org/drawingml/2006/main" noGrp="1"/>
+            <a:spLocks noGrp="1"/>
           </p:cNvSpPr>
           <p:nvPr/>
         </p:nvSpPr>
         <p:spPr>
-          <a:xfrm xmlns:a="http://schemas.openxmlformats.org/drawingml/2006/main">
+          <a:xfrm>
             <a:off x="6667500" y="3143250"/>
             <a:ext cx="4476750" cy="857250"/>
           </a:xfrm>
-          <a:prstGeom xmlns:a="http://schemas.openxmlformats.org/drawingml/2006/main" prst="rect">
-            <a:avLst/>
-          </a:prstGeom>
-          <a:noFill xmlns:a="http://schemas.openxmlformats.org/drawingml/2006/main"/>
-          <a:ln xmlns:a="http://schemas.openxmlformats.org/drawingml/2006/main" w="0">
+          <a:prstGeom prst="rect">
+            <a:avLst/>
+          </a:prstGeom>
+          <a:noFill/>
+          <a:ln w="0">
             <a:noFill/>
             <a:prstDash val="solid"/>
           </a:ln>
         </p:spPr>
         <p:txBody>
-          <a:bodyPr xmlns:a="http://schemas.openxmlformats.org/drawingml/2006/main" anchor="ctr"/>
-          <a:lstStyle xmlns:a="http://schemas.openxmlformats.org/drawingml/2006/main">
+          <a:bodyPr anchor="ctr"/>
+          <a:lstStyle>
             <a:defPPr>
               <a:defRPr sz="1875" b="1">
                 <a:solidFill>
@@ -5379,7 +5279,7 @@
               </a:defRPr>
             </a:defPPr>
           </a:lstStyle>
-          <a:p xmlns:a="http://schemas.openxmlformats.org/drawingml/2006/main">
+          <a:p>
             <a:pPr>
               <a:buNone/>
               <a:defRPr sz="1875" b="1">
@@ -5389,15 +5289,55 @@
               </a:defRPr>
             </a:pPr>
             <a:r>
-              <a:rPr sz="1875" b="1">
+              <a:rPr sz="1875" b="1" dirty="0" err="1">
                 <a:solidFill>
                   <a:srgbClr val="12304A"/>
                 </a:solidFill>
               </a:rPr>
-              <a:t>Ejecución local registrada · 14/10/2026</a:t>
+              <a:t>Ejecución</a:t>
             </a:r>
-          </a:p>
-          <a:p xmlns:a="http://schemas.openxmlformats.org/drawingml/2006/main">
+            <a:r>
+              <a:rPr sz="1875" b="1" dirty="0">
+                <a:solidFill>
+                  <a:srgbClr val="12304A"/>
+                </a:solidFill>
+              </a:rPr>
+              <a:t> local </a:t>
+            </a:r>
+            <a:r>
+              <a:rPr sz="1875" b="1" dirty="0" err="1">
+                <a:solidFill>
+                  <a:srgbClr val="12304A"/>
+                </a:solidFill>
+              </a:rPr>
+              <a:t>registrada</a:t>
+            </a:r>
+            <a:r>
+              <a:rPr sz="1875" b="1" dirty="0">
+                <a:solidFill>
+                  <a:srgbClr val="12304A"/>
+                </a:solidFill>
+              </a:rPr>
+              <a:t> · 1</a:t>
+            </a:r>
+            <a:r>
+              <a:rPr lang="es-BO" sz="1875" b="1" dirty="0">
+                <a:solidFill>
+                  <a:srgbClr val="12304A"/>
+                </a:solidFill>
+              </a:rPr>
+              <a:t>8</a:t>
+            </a:r>
+            <a:r>
+              <a:rPr sz="1875" b="1" dirty="0">
+                <a:solidFill>
+                  <a:srgbClr val="12304A"/>
+                </a:solidFill>
+              </a:rPr>
+              <a:t>/10/2026</a:t>
+            </a:r>
+          </a:p>
+          <a:p>
             <a:pPr>
               <a:buNone/>
               <a:defRPr sz="1875" b="1">
@@ -5407,7 +5347,7 @@
               </a:defRPr>
             </a:pPr>
             <a:r>
-              <a:rPr sz="1875" b="1">
+              <a:rPr sz="1875" b="1" dirty="0">
                 <a:solidFill>
                   <a:srgbClr val="12304A"/>
                 </a:solidFill>
@@ -5424,17 +5364,21 @@
       </p:ext>
     </p:extLst>
   </p:cSld>
+  <p:clrMapOvr>
+    <a:masterClrMapping/>
+  </p:clrMapOvr>
 </p:sld>
 </file>
 
 <file path=ppt/slides/slide5.xml><?xml version="1.0" encoding="utf-8"?>
-<p:sld xmlns:p="http://schemas.openxmlformats.org/presentationml/2006/main">
+<p:sld xmlns:a="http://schemas.openxmlformats.org/drawingml/2006/main" xmlns:r="http://schemas.openxmlformats.org/officeDocument/2006/relationships" xmlns:p="http://schemas.openxmlformats.org/presentationml/2006/main">
   <p:cSld>
     <p:bg>
       <p:bgPr>
-        <a:solidFill xmlns:a="http://schemas.openxmlformats.org/drawingml/2006/main">
+        <a:solidFill>
           <a:srgbClr val="F3F7FA"/>
         </a:solidFill>
+        <a:effectLst/>
       </p:bgPr>
     </p:bg>
     <p:spTree>
@@ -5444,39 +5388,44 @@
         <p:nvPr/>
       </p:nvGrpSpPr>
       <p:grpSpPr>
-        <a:xfrm xmlns:a="http://schemas.openxmlformats.org/drawingml/2006/main"/>
+        <a:xfrm>
+          <a:off x="0" y="0"/>
+          <a:ext cx="0" cy="0"/>
+          <a:chOff x="0" y="0"/>
+          <a:chExt cx="0" cy="0"/>
+        </a:xfrm>
       </p:grpSpPr>
       <p:sp>
         <p:nvSpPr>
-          <p:cNvPr id="16" name="">
-            <a:extLst xmlns:a="http://schemas.openxmlformats.org/drawingml/2006/main">
+          <p:cNvPr id="16" name="Rectángulo 15">
+            <a:extLst>
               <a:ext uri="{FF2B5EF4-FFF2-40B4-BE49-F238E27FC236}">
                 <a16:creationId xmlns:a16="http://schemas.microsoft.com/office/drawing/2014/main" id="{2814E9B7-9503-4A48-ACEC-82346E3014A5}"/>
               </a:ext>
             </a:extLst>
           </p:cNvPr>
           <p:cNvSpPr>
-            <a:spLocks xmlns:a="http://schemas.openxmlformats.org/drawingml/2006/main" noGrp="1"/>
+            <a:spLocks noGrp="1"/>
           </p:cNvSpPr>
           <p:nvPr/>
         </p:nvSpPr>
         <p:spPr>
-          <a:xfrm xmlns:a="http://schemas.openxmlformats.org/drawingml/2006/main">
+          <a:xfrm>
             <a:off x="609600" y="323850"/>
             <a:ext cx="8572500" cy="247650"/>
           </a:xfrm>
-          <a:prstGeom xmlns:a="http://schemas.openxmlformats.org/drawingml/2006/main" prst="rect">
-            <a:avLst/>
-          </a:prstGeom>
-          <a:noFill xmlns:a="http://schemas.openxmlformats.org/drawingml/2006/main"/>
-          <a:ln xmlns:a="http://schemas.openxmlformats.org/drawingml/2006/main" w="0">
+          <a:prstGeom prst="rect">
+            <a:avLst/>
+          </a:prstGeom>
+          <a:noFill/>
+          <a:ln w="0">
             <a:noFill/>
             <a:prstDash val="solid"/>
           </a:ln>
         </p:spPr>
         <p:txBody>
-          <a:bodyPr xmlns:a="http://schemas.openxmlformats.org/drawingml/2006/main" anchor="ctr"/>
-          <a:lstStyle xmlns:a="http://schemas.openxmlformats.org/drawingml/2006/main">
+          <a:bodyPr anchor="ctr"/>
+          <a:lstStyle>
             <a:defPPr>
               <a:defRPr sz="1050" b="1">
                 <a:solidFill>
@@ -5485,7 +5434,7 @@
               </a:defRPr>
             </a:defPPr>
           </a:lstStyle>
-          <a:p xmlns:a="http://schemas.openxmlformats.org/drawingml/2006/main">
+          <a:p>
             <a:pPr>
               <a:buNone/>
               <a:defRPr sz="1050" b="1">
@@ -5507,35 +5456,35 @@
       </p:sp>
       <p:sp>
         <p:nvSpPr>
-          <p:cNvPr id="2" name="">
-            <a:extLst xmlns:a="http://schemas.openxmlformats.org/drawingml/2006/main">
+          <p:cNvPr id="2" name="Rectángulo 1">
+            <a:extLst>
               <a:ext uri="{FF2B5EF4-FFF2-40B4-BE49-F238E27FC236}">
                 <a16:creationId xmlns:a16="http://schemas.microsoft.com/office/drawing/2014/main" id="{37A66D62-57F6-47EC-AA0C-B4A60F5DF92F}"/>
               </a:ext>
             </a:extLst>
           </p:cNvPr>
           <p:cNvSpPr>
-            <a:spLocks xmlns:a="http://schemas.openxmlformats.org/drawingml/2006/main" noGrp="1"/>
+            <a:spLocks noGrp="1"/>
           </p:cNvSpPr>
           <p:nvPr/>
         </p:nvSpPr>
         <p:spPr>
-          <a:xfrm xmlns:a="http://schemas.openxmlformats.org/drawingml/2006/main">
+          <a:xfrm>
             <a:off x="609600" y="781050"/>
             <a:ext cx="10953750" cy="533400"/>
           </a:xfrm>
-          <a:prstGeom xmlns:a="http://schemas.openxmlformats.org/drawingml/2006/main" prst="rect">
-            <a:avLst/>
-          </a:prstGeom>
-          <a:noFill xmlns:a="http://schemas.openxmlformats.org/drawingml/2006/main"/>
-          <a:ln xmlns:a="http://schemas.openxmlformats.org/drawingml/2006/main" w="0">
+          <a:prstGeom prst="rect">
+            <a:avLst/>
+          </a:prstGeom>
+          <a:noFill/>
+          <a:ln w="0">
             <a:noFill/>
             <a:prstDash val="solid"/>
           </a:ln>
         </p:spPr>
         <p:txBody>
-          <a:bodyPr xmlns:a="http://schemas.openxmlformats.org/drawingml/2006/main" anchor="ctr"/>
-          <a:lstStyle xmlns:a="http://schemas.openxmlformats.org/drawingml/2006/main">
+          <a:bodyPr anchor="ctr"/>
+          <a:lstStyle>
             <a:defPPr>
               <a:defRPr sz="2700" b="1">
                 <a:solidFill>
@@ -5544,7 +5493,7 @@
               </a:defRPr>
             </a:defPPr>
           </a:lstStyle>
-          <a:p xmlns:a="http://schemas.openxmlformats.org/drawingml/2006/main">
+          <a:p>
             <a:pPr>
               <a:buNone/>
               <a:defRPr sz="2700" b="1">
@@ -5566,35 +5515,35 @@
       </p:sp>
       <p:sp>
         <p:nvSpPr>
-          <p:cNvPr id="3" name="">
-            <a:extLst xmlns:a="http://schemas.openxmlformats.org/drawingml/2006/main">
+          <p:cNvPr id="3" name="Rectángulo 2">
+            <a:extLst>
               <a:ext uri="{FF2B5EF4-FFF2-40B4-BE49-F238E27FC236}">
                 <a16:creationId xmlns:a16="http://schemas.microsoft.com/office/drawing/2014/main" id="{2557FF2C-3F05-4BFD-AEE8-7B6E7CDF6500}"/>
               </a:ext>
             </a:extLst>
           </p:cNvPr>
           <p:cNvSpPr>
-            <a:spLocks xmlns:a="http://schemas.openxmlformats.org/drawingml/2006/main" noGrp="1"/>
+            <a:spLocks noGrp="1"/>
           </p:cNvSpPr>
           <p:nvPr/>
         </p:nvSpPr>
         <p:spPr>
-          <a:xfrm xmlns:a="http://schemas.openxmlformats.org/drawingml/2006/main">
+          <a:xfrm>
             <a:off x="609600" y="1381125"/>
             <a:ext cx="10477500" cy="381000"/>
           </a:xfrm>
-          <a:prstGeom xmlns:a="http://schemas.openxmlformats.org/drawingml/2006/main" prst="rect">
-            <a:avLst/>
-          </a:prstGeom>
-          <a:noFill xmlns:a="http://schemas.openxmlformats.org/drawingml/2006/main"/>
-          <a:ln xmlns:a="http://schemas.openxmlformats.org/drawingml/2006/main" w="0">
+          <a:prstGeom prst="rect">
+            <a:avLst/>
+          </a:prstGeom>
+          <a:noFill/>
+          <a:ln w="0">
             <a:noFill/>
             <a:prstDash val="solid"/>
           </a:ln>
         </p:spPr>
         <p:txBody>
-          <a:bodyPr xmlns:a="http://schemas.openxmlformats.org/drawingml/2006/main" anchor="ctr"/>
-          <a:lstStyle xmlns:a="http://schemas.openxmlformats.org/drawingml/2006/main">
+          <a:bodyPr anchor="ctr"/>
+          <a:lstStyle>
             <a:defPPr>
               <a:defRPr sz="1425" b="0">
                 <a:solidFill>
@@ -5603,7 +5552,7 @@
               </a:defRPr>
             </a:defPPr>
           </a:lstStyle>
-          <a:p xmlns:a="http://schemas.openxmlformats.org/drawingml/2006/main">
+          <a:p>
             <a:pPr>
               <a:buNone/>
               <a:defRPr sz="1425" b="0">
@@ -5625,35 +5574,35 @@
       </p:sp>
       <p:sp>
         <p:nvSpPr>
-          <p:cNvPr id="4" name="">
-            <a:extLst xmlns:a="http://schemas.openxmlformats.org/drawingml/2006/main">
+          <p:cNvPr id="4" name="Rectángulo 3">
+            <a:extLst>
               <a:ext uri="{FF2B5EF4-FFF2-40B4-BE49-F238E27FC236}">
                 <a16:creationId xmlns:a16="http://schemas.microsoft.com/office/drawing/2014/main" id="{ACB2207C-F3C4-485D-AAE3-4781B7F019F3}"/>
               </a:ext>
             </a:extLst>
           </p:cNvPr>
           <p:cNvSpPr>
-            <a:spLocks xmlns:a="http://schemas.openxmlformats.org/drawingml/2006/main" noGrp="1"/>
+            <a:spLocks noGrp="1"/>
           </p:cNvSpPr>
           <p:nvPr/>
         </p:nvSpPr>
         <p:spPr>
-          <a:xfrm xmlns:a="http://schemas.openxmlformats.org/drawingml/2006/main">
+          <a:xfrm>
             <a:off x="609600" y="6419850"/>
             <a:ext cx="10477500" cy="190500"/>
           </a:xfrm>
-          <a:prstGeom xmlns:a="http://schemas.openxmlformats.org/drawingml/2006/main" prst="rect">
-            <a:avLst/>
-          </a:prstGeom>
-          <a:noFill xmlns:a="http://schemas.openxmlformats.org/drawingml/2006/main"/>
-          <a:ln xmlns:a="http://schemas.openxmlformats.org/drawingml/2006/main" w="0">
+          <a:prstGeom prst="rect">
+            <a:avLst/>
+          </a:prstGeom>
+          <a:noFill/>
+          <a:ln w="0">
             <a:noFill/>
             <a:prstDash val="solid"/>
           </a:ln>
         </p:spPr>
         <p:txBody>
-          <a:bodyPr xmlns:a="http://schemas.openxmlformats.org/drawingml/2006/main" anchor="ctr"/>
-          <a:lstStyle xmlns:a="http://schemas.openxmlformats.org/drawingml/2006/main">
+          <a:bodyPr anchor="ctr"/>
+          <a:lstStyle>
             <a:defPPr>
               <a:defRPr sz="900" b="0">
                 <a:solidFill>
@@ -5662,7 +5611,7 @@
               </a:defRPr>
             </a:defPPr>
           </a:lstStyle>
-          <a:p xmlns:a="http://schemas.openxmlformats.org/drawingml/2006/main">
+          <a:p>
             <a:pPr>
               <a:buNone/>
               <a:defRPr sz="900" b="0">
@@ -5684,35 +5633,35 @@
       </p:sp>
       <p:sp>
         <p:nvSpPr>
-          <p:cNvPr id="5" name="">
-            <a:extLst xmlns:a="http://schemas.openxmlformats.org/drawingml/2006/main">
+          <p:cNvPr id="5" name="Rectángulo 4">
+            <a:extLst>
               <a:ext uri="{FF2B5EF4-FFF2-40B4-BE49-F238E27FC236}">
                 <a16:creationId xmlns:a16="http://schemas.microsoft.com/office/drawing/2014/main" id="{EECD0485-8B81-4828-B2E7-4377A0707B7A}"/>
               </a:ext>
             </a:extLst>
           </p:cNvPr>
           <p:cNvSpPr>
-            <a:spLocks xmlns:a="http://schemas.openxmlformats.org/drawingml/2006/main" noGrp="1"/>
+            <a:spLocks noGrp="1"/>
           </p:cNvSpPr>
           <p:nvPr/>
         </p:nvSpPr>
         <p:spPr>
-          <a:xfrm xmlns:a="http://schemas.openxmlformats.org/drawingml/2006/main">
+          <a:xfrm>
             <a:off x="1000125" y="2333625"/>
             <a:ext cx="1809750" cy="523875"/>
           </a:xfrm>
-          <a:prstGeom xmlns:a="http://schemas.openxmlformats.org/drawingml/2006/main" prst="rect">
-            <a:avLst/>
-          </a:prstGeom>
-          <a:noFill xmlns:a="http://schemas.openxmlformats.org/drawingml/2006/main"/>
-          <a:ln xmlns:a="http://schemas.openxmlformats.org/drawingml/2006/main" w="0">
+          <a:prstGeom prst="rect">
+            <a:avLst/>
+          </a:prstGeom>
+          <a:noFill/>
+          <a:ln w="0">
             <a:noFill/>
             <a:prstDash val="solid"/>
           </a:ln>
         </p:spPr>
         <p:txBody>
-          <a:bodyPr xmlns:a="http://schemas.openxmlformats.org/drawingml/2006/main" anchor="ctr"/>
-          <a:lstStyle xmlns:a="http://schemas.openxmlformats.org/drawingml/2006/main">
+          <a:bodyPr anchor="ctr"/>
+          <a:lstStyle>
             <a:defPPr>
               <a:defRPr sz="2100" b="1">
                 <a:solidFill>
@@ -5721,7 +5670,7 @@
               </a:defRPr>
             </a:defPPr>
           </a:lstStyle>
-          <a:p xmlns:a="http://schemas.openxmlformats.org/drawingml/2006/main">
+          <a:p>
             <a:pPr>
               <a:buNone/>
               <a:defRPr sz="2100" b="1">
@@ -5743,35 +5692,35 @@
       </p:sp>
       <p:sp>
         <p:nvSpPr>
-          <p:cNvPr id="6" name="">
-            <a:extLst xmlns:a="http://schemas.openxmlformats.org/drawingml/2006/main">
+          <p:cNvPr id="6" name="Rectángulo 5">
+            <a:extLst>
               <a:ext uri="{FF2B5EF4-FFF2-40B4-BE49-F238E27FC236}">
                 <a16:creationId xmlns:a16="http://schemas.microsoft.com/office/drawing/2014/main" id="{6B07A657-D222-4DAC-9238-2E9282109E02}"/>
               </a:ext>
             </a:extLst>
           </p:cNvPr>
           <p:cNvSpPr>
-            <a:spLocks xmlns:a="http://schemas.openxmlformats.org/drawingml/2006/main" noGrp="1"/>
+            <a:spLocks noGrp="1"/>
           </p:cNvSpPr>
           <p:nvPr/>
         </p:nvSpPr>
         <p:spPr>
-          <a:xfrm xmlns:a="http://schemas.openxmlformats.org/drawingml/2006/main">
+          <a:xfrm>
             <a:off x="3333750" y="2352675"/>
             <a:ext cx="7905750" cy="457200"/>
           </a:xfrm>
-          <a:prstGeom xmlns:a="http://schemas.openxmlformats.org/drawingml/2006/main" prst="rect">
-            <a:avLst/>
-          </a:prstGeom>
-          <a:noFill xmlns:a="http://schemas.openxmlformats.org/drawingml/2006/main"/>
-          <a:ln xmlns:a="http://schemas.openxmlformats.org/drawingml/2006/main" w="0">
+          <a:prstGeom prst="rect">
+            <a:avLst/>
+          </a:prstGeom>
+          <a:noFill/>
+          <a:ln w="0">
             <a:noFill/>
             <a:prstDash val="solid"/>
           </a:ln>
         </p:spPr>
         <p:txBody>
-          <a:bodyPr xmlns:a="http://schemas.openxmlformats.org/drawingml/2006/main" anchor="ctr"/>
-          <a:lstStyle xmlns:a="http://schemas.openxmlformats.org/drawingml/2006/main">
+          <a:bodyPr anchor="ctr"/>
+          <a:lstStyle>
             <a:defPPr>
               <a:defRPr sz="1650" b="1">
                 <a:solidFill>
@@ -5780,7 +5729,7 @@
               </a:defRPr>
             </a:defPPr>
           </a:lstStyle>
-          <a:p xmlns:a="http://schemas.openxmlformats.org/drawingml/2006/main">
+          <a:p>
             <a:pPr>
               <a:buNone/>
               <a:defRPr sz="1650" b="1">
@@ -5802,35 +5751,35 @@
       </p:sp>
       <p:sp>
         <p:nvSpPr>
-          <p:cNvPr id="7" name="">
-            <a:extLst xmlns:a="http://schemas.openxmlformats.org/drawingml/2006/main">
+          <p:cNvPr id="7" name="Rectángulo 6">
+            <a:extLst>
               <a:ext uri="{FF2B5EF4-FFF2-40B4-BE49-F238E27FC236}">
                 <a16:creationId xmlns:a16="http://schemas.microsoft.com/office/drawing/2014/main" id="{0DBC0A03-E897-4CE5-85C7-FA84834AA54D}"/>
               </a:ext>
             </a:extLst>
           </p:cNvPr>
           <p:cNvSpPr>
-            <a:spLocks xmlns:a="http://schemas.openxmlformats.org/drawingml/2006/main" noGrp="1"/>
+            <a:spLocks noGrp="1"/>
           </p:cNvSpPr>
           <p:nvPr/>
         </p:nvSpPr>
         <p:spPr>
-          <a:xfrm xmlns:a="http://schemas.openxmlformats.org/drawingml/2006/main">
+          <a:xfrm>
             <a:off x="1143000" y="3381375"/>
             <a:ext cx="2190750" cy="333375"/>
           </a:xfrm>
-          <a:prstGeom xmlns:a="http://schemas.openxmlformats.org/drawingml/2006/main" prst="rect">
-            <a:avLst/>
-          </a:prstGeom>
-          <a:noFill xmlns:a="http://schemas.openxmlformats.org/drawingml/2006/main"/>
-          <a:ln xmlns:a="http://schemas.openxmlformats.org/drawingml/2006/main" w="0">
+          <a:prstGeom prst="rect">
+            <a:avLst/>
+          </a:prstGeom>
+          <a:noFill/>
+          <a:ln w="0">
             <a:noFill/>
             <a:prstDash val="solid"/>
           </a:ln>
         </p:spPr>
         <p:txBody>
-          <a:bodyPr xmlns:a="http://schemas.openxmlformats.org/drawingml/2006/main" anchor="ctr"/>
-          <a:lstStyle xmlns:a="http://schemas.openxmlformats.org/drawingml/2006/main">
+          <a:bodyPr anchor="ctr"/>
+          <a:lstStyle>
             <a:defPPr>
               <a:defRPr sz="1500" b="1">
                 <a:solidFill>
@@ -5839,7 +5788,7 @@
               </a:defRPr>
             </a:defPPr>
           </a:lstStyle>
-          <a:p xmlns:a="http://schemas.openxmlformats.org/drawingml/2006/main">
+          <a:p>
             <a:pPr>
               <a:buNone/>
               <a:defRPr sz="1500" b="1">
@@ -5861,35 +5810,35 @@
       </p:sp>
       <p:sp>
         <p:nvSpPr>
-          <p:cNvPr id="8" name="">
-            <a:extLst xmlns:a="http://schemas.openxmlformats.org/drawingml/2006/main">
+          <p:cNvPr id="8" name="Rectángulo 7">
+            <a:extLst>
               <a:ext uri="{FF2B5EF4-FFF2-40B4-BE49-F238E27FC236}">
                 <a16:creationId xmlns:a16="http://schemas.microsoft.com/office/drawing/2014/main" id="{44D0D671-DA4F-4EB2-AA2E-B91887338558}"/>
               </a:ext>
             </a:extLst>
           </p:cNvPr>
           <p:cNvSpPr>
-            <a:spLocks xmlns:a="http://schemas.openxmlformats.org/drawingml/2006/main" noGrp="1"/>
+            <a:spLocks noGrp="1"/>
           </p:cNvSpPr>
           <p:nvPr/>
         </p:nvSpPr>
         <p:spPr>
-          <a:xfrm xmlns:a="http://schemas.openxmlformats.org/drawingml/2006/main">
+          <a:xfrm>
             <a:off x="3810000" y="3381375"/>
             <a:ext cx="4762500" cy="333375"/>
           </a:xfrm>
-          <a:prstGeom xmlns:a="http://schemas.openxmlformats.org/drawingml/2006/main" prst="rect">
-            <a:avLst/>
-          </a:prstGeom>
-          <a:noFill xmlns:a="http://schemas.openxmlformats.org/drawingml/2006/main"/>
-          <a:ln xmlns:a="http://schemas.openxmlformats.org/drawingml/2006/main" w="0">
+          <a:prstGeom prst="rect">
+            <a:avLst/>
+          </a:prstGeom>
+          <a:noFill/>
+          <a:ln w="0">
             <a:noFill/>
             <a:prstDash val="solid"/>
           </a:ln>
         </p:spPr>
         <p:txBody>
-          <a:bodyPr xmlns:a="http://schemas.openxmlformats.org/drawingml/2006/main" anchor="ctr"/>
-          <a:lstStyle xmlns:a="http://schemas.openxmlformats.org/drawingml/2006/main">
+          <a:bodyPr anchor="ctr"/>
+          <a:lstStyle>
             <a:defPPr>
               <a:defRPr sz="1500" b="0">
                 <a:solidFill>
@@ -5898,7 +5847,7 @@
               </a:defRPr>
             </a:defPPr>
           </a:lstStyle>
-          <a:p xmlns:a="http://schemas.openxmlformats.org/drawingml/2006/main">
+          <a:p>
             <a:pPr>
               <a:buNone/>
               <a:defRPr sz="1500" b="0">
@@ -5920,35 +5869,35 @@
       </p:sp>
       <p:sp>
         <p:nvSpPr>
-          <p:cNvPr id="9" name="">
-            <a:extLst xmlns:a="http://schemas.openxmlformats.org/drawingml/2006/main">
+          <p:cNvPr id="9" name="Rectángulo 8">
+            <a:extLst>
               <a:ext uri="{FF2B5EF4-FFF2-40B4-BE49-F238E27FC236}">
                 <a16:creationId xmlns:a16="http://schemas.microsoft.com/office/drawing/2014/main" id="{D957346D-B0EC-4EC9-BEA3-CE4F217E3301}"/>
               </a:ext>
             </a:extLst>
           </p:cNvPr>
           <p:cNvSpPr>
-            <a:spLocks xmlns:a="http://schemas.openxmlformats.org/drawingml/2006/main" noGrp="1"/>
+            <a:spLocks noGrp="1"/>
           </p:cNvSpPr>
           <p:nvPr/>
         </p:nvSpPr>
         <p:spPr>
-          <a:xfrm xmlns:a="http://schemas.openxmlformats.org/drawingml/2006/main">
+          <a:xfrm>
             <a:off x="1143000" y="3905250"/>
             <a:ext cx="2190750" cy="333375"/>
           </a:xfrm>
-          <a:prstGeom xmlns:a="http://schemas.openxmlformats.org/drawingml/2006/main" prst="rect">
-            <a:avLst/>
-          </a:prstGeom>
-          <a:noFill xmlns:a="http://schemas.openxmlformats.org/drawingml/2006/main"/>
-          <a:ln xmlns:a="http://schemas.openxmlformats.org/drawingml/2006/main" w="0">
+          <a:prstGeom prst="rect">
+            <a:avLst/>
+          </a:prstGeom>
+          <a:noFill/>
+          <a:ln w="0">
             <a:noFill/>
             <a:prstDash val="solid"/>
           </a:ln>
         </p:spPr>
         <p:txBody>
-          <a:bodyPr xmlns:a="http://schemas.openxmlformats.org/drawingml/2006/main" anchor="ctr"/>
-          <a:lstStyle xmlns:a="http://schemas.openxmlformats.org/drawingml/2006/main">
+          <a:bodyPr anchor="ctr"/>
+          <a:lstStyle>
             <a:defPPr>
               <a:defRPr sz="1500" b="1">
                 <a:solidFill>
@@ -5957,7 +5906,7 @@
               </a:defRPr>
             </a:defPPr>
           </a:lstStyle>
-          <a:p xmlns:a="http://schemas.openxmlformats.org/drawingml/2006/main">
+          <a:p>
             <a:pPr>
               <a:buNone/>
               <a:defRPr sz="1500" b="1">
@@ -5979,35 +5928,35 @@
       </p:sp>
       <p:sp>
         <p:nvSpPr>
-          <p:cNvPr id="10" name="">
-            <a:extLst xmlns:a="http://schemas.openxmlformats.org/drawingml/2006/main">
+          <p:cNvPr id="10" name="Rectángulo 9">
+            <a:extLst>
               <a:ext uri="{FF2B5EF4-FFF2-40B4-BE49-F238E27FC236}">
                 <a16:creationId xmlns:a16="http://schemas.microsoft.com/office/drawing/2014/main" id="{E6C55CB9-251E-43B3-B75C-01DAF5354A22}"/>
               </a:ext>
             </a:extLst>
           </p:cNvPr>
           <p:cNvSpPr>
-            <a:spLocks xmlns:a="http://schemas.openxmlformats.org/drawingml/2006/main" noGrp="1"/>
+            <a:spLocks noGrp="1"/>
           </p:cNvSpPr>
           <p:nvPr/>
         </p:nvSpPr>
         <p:spPr>
-          <a:xfrm xmlns:a="http://schemas.openxmlformats.org/drawingml/2006/main">
+          <a:xfrm>
             <a:off x="3810000" y="3905250"/>
             <a:ext cx="4762500" cy="333375"/>
           </a:xfrm>
-          <a:prstGeom xmlns:a="http://schemas.openxmlformats.org/drawingml/2006/main" prst="rect">
-            <a:avLst/>
-          </a:prstGeom>
-          <a:noFill xmlns:a="http://schemas.openxmlformats.org/drawingml/2006/main"/>
-          <a:ln xmlns:a="http://schemas.openxmlformats.org/drawingml/2006/main" w="0">
+          <a:prstGeom prst="rect">
+            <a:avLst/>
+          </a:prstGeom>
+          <a:noFill/>
+          <a:ln w="0">
             <a:noFill/>
             <a:prstDash val="solid"/>
           </a:ln>
         </p:spPr>
         <p:txBody>
-          <a:bodyPr xmlns:a="http://schemas.openxmlformats.org/drawingml/2006/main" anchor="ctr"/>
-          <a:lstStyle xmlns:a="http://schemas.openxmlformats.org/drawingml/2006/main">
+          <a:bodyPr anchor="ctr"/>
+          <a:lstStyle>
             <a:defPPr>
               <a:defRPr sz="1500" b="0">
                 <a:solidFill>
@@ -6016,7 +5965,7 @@
               </a:defRPr>
             </a:defPPr>
           </a:lstStyle>
-          <a:p xmlns:a="http://schemas.openxmlformats.org/drawingml/2006/main">
+          <a:p>
             <a:pPr>
               <a:buNone/>
               <a:defRPr sz="1500" b="0">
@@ -6038,35 +5987,35 @@
       </p:sp>
       <p:sp>
         <p:nvSpPr>
-          <p:cNvPr id="11" name="">
-            <a:extLst xmlns:a="http://schemas.openxmlformats.org/drawingml/2006/main">
+          <p:cNvPr id="11" name="Rectángulo 10">
+            <a:extLst>
               <a:ext uri="{FF2B5EF4-FFF2-40B4-BE49-F238E27FC236}">
                 <a16:creationId xmlns:a16="http://schemas.microsoft.com/office/drawing/2014/main" id="{A9CD7890-124C-436F-91B1-E8D5872542B5}"/>
               </a:ext>
             </a:extLst>
           </p:cNvPr>
           <p:cNvSpPr>
-            <a:spLocks xmlns:a="http://schemas.openxmlformats.org/drawingml/2006/main" noGrp="1"/>
+            <a:spLocks noGrp="1"/>
           </p:cNvSpPr>
           <p:nvPr/>
         </p:nvSpPr>
         <p:spPr>
-          <a:xfrm xmlns:a="http://schemas.openxmlformats.org/drawingml/2006/main">
+          <a:xfrm>
             <a:off x="1143000" y="4429125"/>
             <a:ext cx="2190750" cy="333375"/>
           </a:xfrm>
-          <a:prstGeom xmlns:a="http://schemas.openxmlformats.org/drawingml/2006/main" prst="rect">
-            <a:avLst/>
-          </a:prstGeom>
-          <a:noFill xmlns:a="http://schemas.openxmlformats.org/drawingml/2006/main"/>
-          <a:ln xmlns:a="http://schemas.openxmlformats.org/drawingml/2006/main" w="0">
+          <a:prstGeom prst="rect">
+            <a:avLst/>
+          </a:prstGeom>
+          <a:noFill/>
+          <a:ln w="0">
             <a:noFill/>
             <a:prstDash val="solid"/>
           </a:ln>
         </p:spPr>
         <p:txBody>
-          <a:bodyPr xmlns:a="http://schemas.openxmlformats.org/drawingml/2006/main" anchor="ctr"/>
-          <a:lstStyle xmlns:a="http://schemas.openxmlformats.org/drawingml/2006/main">
+          <a:bodyPr anchor="ctr"/>
+          <a:lstStyle>
             <a:defPPr>
               <a:defRPr sz="1500" b="1">
                 <a:solidFill>
@@ -6075,7 +6024,7 @@
               </a:defRPr>
             </a:defPPr>
           </a:lstStyle>
-          <a:p xmlns:a="http://schemas.openxmlformats.org/drawingml/2006/main">
+          <a:p>
             <a:pPr>
               <a:buNone/>
               <a:defRPr sz="1500" b="1">
@@ -6097,35 +6046,35 @@
       </p:sp>
       <p:sp>
         <p:nvSpPr>
-          <p:cNvPr id="12" name="">
-            <a:extLst xmlns:a="http://schemas.openxmlformats.org/drawingml/2006/main">
+          <p:cNvPr id="12" name="Rectángulo 11">
+            <a:extLst>
               <a:ext uri="{FF2B5EF4-FFF2-40B4-BE49-F238E27FC236}">
                 <a16:creationId xmlns:a16="http://schemas.microsoft.com/office/drawing/2014/main" id="{FCBC4E22-388B-4103-AB47-EF13702A617E}"/>
               </a:ext>
             </a:extLst>
           </p:cNvPr>
           <p:cNvSpPr>
-            <a:spLocks xmlns:a="http://schemas.openxmlformats.org/drawingml/2006/main" noGrp="1"/>
+            <a:spLocks noGrp="1"/>
           </p:cNvSpPr>
           <p:nvPr/>
         </p:nvSpPr>
         <p:spPr>
-          <a:xfrm xmlns:a="http://schemas.openxmlformats.org/drawingml/2006/main">
+          <a:xfrm>
             <a:off x="3810000" y="4429125"/>
             <a:ext cx="4762500" cy="333375"/>
           </a:xfrm>
-          <a:prstGeom xmlns:a="http://schemas.openxmlformats.org/drawingml/2006/main" prst="rect">
-            <a:avLst/>
-          </a:prstGeom>
-          <a:noFill xmlns:a="http://schemas.openxmlformats.org/drawingml/2006/main"/>
-          <a:ln xmlns:a="http://schemas.openxmlformats.org/drawingml/2006/main" w="0">
+          <a:prstGeom prst="rect">
+            <a:avLst/>
+          </a:prstGeom>
+          <a:noFill/>
+          <a:ln w="0">
             <a:noFill/>
             <a:prstDash val="solid"/>
           </a:ln>
         </p:spPr>
         <p:txBody>
-          <a:bodyPr xmlns:a="http://schemas.openxmlformats.org/drawingml/2006/main" anchor="ctr"/>
-          <a:lstStyle xmlns:a="http://schemas.openxmlformats.org/drawingml/2006/main">
+          <a:bodyPr anchor="ctr"/>
+          <a:lstStyle>
             <a:defPPr>
               <a:defRPr sz="1500" b="0">
                 <a:solidFill>
@@ -6134,7 +6083,7 @@
               </a:defRPr>
             </a:defPPr>
           </a:lstStyle>
-          <a:p xmlns:a="http://schemas.openxmlformats.org/drawingml/2006/main">
+          <a:p>
             <a:pPr>
               <a:buNone/>
               <a:defRPr sz="1500" b="0">
@@ -6156,35 +6105,35 @@
       </p:sp>
       <p:sp>
         <p:nvSpPr>
-          <p:cNvPr id="13" name="">
-            <a:extLst xmlns:a="http://schemas.openxmlformats.org/drawingml/2006/main">
+          <p:cNvPr id="13" name="Rectángulo 12">
+            <a:extLst>
               <a:ext uri="{FF2B5EF4-FFF2-40B4-BE49-F238E27FC236}">
                 <a16:creationId xmlns:a16="http://schemas.microsoft.com/office/drawing/2014/main" id="{CD6726A5-37FD-455B-92D7-A5AE34E033DD}"/>
               </a:ext>
             </a:extLst>
           </p:cNvPr>
           <p:cNvSpPr>
-            <a:spLocks xmlns:a="http://schemas.openxmlformats.org/drawingml/2006/main" noGrp="1"/>
+            <a:spLocks noGrp="1"/>
           </p:cNvSpPr>
           <p:nvPr/>
         </p:nvSpPr>
         <p:spPr>
-          <a:xfrm xmlns:a="http://schemas.openxmlformats.org/drawingml/2006/main">
+          <a:xfrm>
             <a:off x="1143000" y="4953000"/>
             <a:ext cx="2190750" cy="333375"/>
           </a:xfrm>
-          <a:prstGeom xmlns:a="http://schemas.openxmlformats.org/drawingml/2006/main" prst="rect">
-            <a:avLst/>
-          </a:prstGeom>
-          <a:noFill xmlns:a="http://schemas.openxmlformats.org/drawingml/2006/main"/>
-          <a:ln xmlns:a="http://schemas.openxmlformats.org/drawingml/2006/main" w="0">
+          <a:prstGeom prst="rect">
+            <a:avLst/>
+          </a:prstGeom>
+          <a:noFill/>
+          <a:ln w="0">
             <a:noFill/>
             <a:prstDash val="solid"/>
           </a:ln>
         </p:spPr>
         <p:txBody>
-          <a:bodyPr xmlns:a="http://schemas.openxmlformats.org/drawingml/2006/main" anchor="ctr"/>
-          <a:lstStyle xmlns:a="http://schemas.openxmlformats.org/drawingml/2006/main">
+          <a:bodyPr anchor="ctr"/>
+          <a:lstStyle>
             <a:defPPr>
               <a:defRPr sz="1500" b="1">
                 <a:solidFill>
@@ -6193,7 +6142,7 @@
               </a:defRPr>
             </a:defPPr>
           </a:lstStyle>
-          <a:p xmlns:a="http://schemas.openxmlformats.org/drawingml/2006/main">
+          <a:p>
             <a:pPr>
               <a:buNone/>
               <a:defRPr sz="1500" b="1">
@@ -6215,35 +6164,35 @@
       </p:sp>
       <p:sp>
         <p:nvSpPr>
-          <p:cNvPr id="14" name="">
-            <a:extLst xmlns:a="http://schemas.openxmlformats.org/drawingml/2006/main">
+          <p:cNvPr id="14" name="Rectángulo 13">
+            <a:extLst>
               <a:ext uri="{FF2B5EF4-FFF2-40B4-BE49-F238E27FC236}">
                 <a16:creationId xmlns:a16="http://schemas.microsoft.com/office/drawing/2014/main" id="{86EF3147-2132-4703-BA6D-03F9D2B5F29F}"/>
               </a:ext>
             </a:extLst>
           </p:cNvPr>
           <p:cNvSpPr>
-            <a:spLocks xmlns:a="http://schemas.openxmlformats.org/drawingml/2006/main" noGrp="1"/>
+            <a:spLocks noGrp="1"/>
           </p:cNvSpPr>
           <p:nvPr/>
         </p:nvSpPr>
         <p:spPr>
-          <a:xfrm xmlns:a="http://schemas.openxmlformats.org/drawingml/2006/main">
+          <a:xfrm>
             <a:off x="3810000" y="4953000"/>
             <a:ext cx="4762500" cy="333375"/>
           </a:xfrm>
-          <a:prstGeom xmlns:a="http://schemas.openxmlformats.org/drawingml/2006/main" prst="rect">
-            <a:avLst/>
-          </a:prstGeom>
-          <a:noFill xmlns:a="http://schemas.openxmlformats.org/drawingml/2006/main"/>
-          <a:ln xmlns:a="http://schemas.openxmlformats.org/drawingml/2006/main" w="0">
+          <a:prstGeom prst="rect">
+            <a:avLst/>
+          </a:prstGeom>
+          <a:noFill/>
+          <a:ln w="0">
             <a:noFill/>
             <a:prstDash val="solid"/>
           </a:ln>
         </p:spPr>
         <p:txBody>
-          <a:bodyPr xmlns:a="http://schemas.openxmlformats.org/drawingml/2006/main" anchor="ctr"/>
-          <a:lstStyle xmlns:a="http://schemas.openxmlformats.org/drawingml/2006/main">
+          <a:bodyPr anchor="ctr"/>
+          <a:lstStyle>
             <a:defPPr>
               <a:defRPr sz="1500" b="0">
                 <a:solidFill>
@@ -6252,7 +6201,7 @@
               </a:defRPr>
             </a:defPPr>
           </a:lstStyle>
-          <a:p xmlns:a="http://schemas.openxmlformats.org/drawingml/2006/main">
+          <a:p>
             <a:pPr>
               <a:buNone/>
               <a:defRPr sz="1500" b="0">
@@ -6274,35 +6223,35 @@
       </p:sp>
       <p:sp>
         <p:nvSpPr>
-          <p:cNvPr id="15" name="">
-            <a:extLst xmlns:a="http://schemas.openxmlformats.org/drawingml/2006/main">
+          <p:cNvPr id="15" name="Rectángulo 14">
+            <a:extLst>
               <a:ext uri="{FF2B5EF4-FFF2-40B4-BE49-F238E27FC236}">
                 <a16:creationId xmlns:a16="http://schemas.microsoft.com/office/drawing/2014/main" id="{7D8DC425-147C-4B17-B6F7-6648D71A3BC7}"/>
               </a:ext>
             </a:extLst>
           </p:cNvPr>
           <p:cNvSpPr>
-            <a:spLocks xmlns:a="http://schemas.openxmlformats.org/drawingml/2006/main" noGrp="1"/>
+            <a:spLocks noGrp="1"/>
           </p:cNvSpPr>
           <p:nvPr/>
         </p:nvSpPr>
         <p:spPr>
-          <a:xfrm xmlns:a="http://schemas.openxmlformats.org/drawingml/2006/main">
+          <a:xfrm>
             <a:off x="1143000" y="5619750"/>
             <a:ext cx="9525000" cy="333375"/>
           </a:xfrm>
-          <a:prstGeom xmlns:a="http://schemas.openxmlformats.org/drawingml/2006/main" prst="rect">
-            <a:avLst/>
-          </a:prstGeom>
-          <a:noFill xmlns:a="http://schemas.openxmlformats.org/drawingml/2006/main"/>
-          <a:ln xmlns:a="http://schemas.openxmlformats.org/drawingml/2006/main" w="0">
+          <a:prstGeom prst="rect">
+            <a:avLst/>
+          </a:prstGeom>
+          <a:noFill/>
+          <a:ln w="0">
             <a:noFill/>
             <a:prstDash val="solid"/>
           </a:ln>
         </p:spPr>
         <p:txBody>
-          <a:bodyPr xmlns:a="http://schemas.openxmlformats.org/drawingml/2006/main" anchor="ctr"/>
-          <a:lstStyle xmlns:a="http://schemas.openxmlformats.org/drawingml/2006/main">
+          <a:bodyPr anchor="ctr"/>
+          <a:lstStyle>
             <a:defPPr>
               <a:defRPr sz="1425" b="1">
                 <a:solidFill>
@@ -6311,7 +6260,7 @@
               </a:defRPr>
             </a:defPPr>
           </a:lstStyle>
-          <a:p xmlns:a="http://schemas.openxmlformats.org/drawingml/2006/main">
+          <a:p>
             <a:pPr>
               <a:buNone/>
               <a:defRPr sz="1425" b="1">
@@ -6338,6 +6287,9 @@
       </p:ext>
     </p:extLst>
   </p:cSld>
+  <p:clrMapOvr>
+    <a:masterClrMapping/>
+  </p:clrMapOvr>
 </p:sld>
 </file>
 
@@ -6583,5 +6535,254 @@
       </a:bgFillStyleLst>
     </a:fmtScheme>
   </a:themeElements>
+  <a:objectDefaults/>
+  <a:extraClrSchemeLst/>
+</a:theme>
+</file>
+
+<file path=ppt/theme/theme2.xml><?xml version="1.0" encoding="utf-8"?>
+<a:theme xmlns:a="http://schemas.openxmlformats.org/drawingml/2006/main" name="ChatGPT">
+  <a:themeElements>
+    <a:clrScheme name="ChatGPT">
+      <a:dk1>
+        <a:srgbClr val="000000"/>
+      </a:dk1>
+      <a:lt1>
+        <a:srgbClr val="FFFFFF"/>
+      </a:lt1>
+      <a:dk2>
+        <a:srgbClr val="0E2841"/>
+      </a:dk2>
+      <a:lt2>
+        <a:srgbClr val="E8E8E8"/>
+      </a:lt2>
+      <a:accent1>
+        <a:srgbClr val="156082"/>
+      </a:accent1>
+      <a:accent2>
+        <a:srgbClr val="E97132"/>
+      </a:accent2>
+      <a:accent3>
+        <a:srgbClr val="196B24"/>
+      </a:accent3>
+      <a:accent4>
+        <a:srgbClr val="0F9ED5"/>
+      </a:accent4>
+      <a:accent5>
+        <a:srgbClr val="A02B93"/>
+      </a:accent5>
+      <a:accent6>
+        <a:srgbClr val="4EA72E"/>
+      </a:accent6>
+      <a:hlink>
+        <a:srgbClr val="467886"/>
+      </a:hlink>
+      <a:folHlink>
+        <a:srgbClr val="96607D"/>
+      </a:folHlink>
+    </a:clrScheme>
+    <a:fontScheme name="">
+      <a:majorFont>
+        <a:latin typeface="Aptos"/>
+        <a:ea typeface=""/>
+        <a:cs typeface=""/>
+      </a:majorFont>
+      <a:minorFont>
+        <a:latin typeface="Aptos"/>
+        <a:ea typeface=""/>
+        <a:cs typeface=""/>
+      </a:minorFont>
+    </a:fontScheme>
+    <a:fmtScheme name="ChatGPT">
+      <a:fillStyleLst>
+        <a:solidFill>
+          <a:schemeClr val="phClr"/>
+        </a:solidFill>
+        <a:gradFill>
+          <a:gsLst>
+            <a:gs pos="0">
+              <a:schemeClr val="phClr">
+                <a:tint val="67000"/>
+                <a:lumMod val="110000"/>
+                <a:satMod val="105000"/>
+              </a:schemeClr>
+            </a:gs>
+            <a:gs pos="50000">
+              <a:schemeClr val="phClr">
+                <a:tint val="73000"/>
+                <a:lumMod val="105000"/>
+                <a:satMod val="103000"/>
+              </a:schemeClr>
+            </a:gs>
+            <a:gs pos="100000">
+              <a:schemeClr val="phClr">
+                <a:tint val="81000"/>
+                <a:lumMod val="105000"/>
+                <a:satMod val="109000"/>
+              </a:schemeClr>
+            </a:gs>
+          </a:gsLst>
+          <a:lin ang="5400000" scaled="0"/>
+        </a:gradFill>
+        <a:gradFill>
+          <a:gsLst>
+            <a:gs pos="0">
+              <a:schemeClr val="phClr">
+                <a:tint val="94000"/>
+                <a:lumMod val="102000"/>
+                <a:satMod val="103000"/>
+              </a:schemeClr>
+            </a:gs>
+            <a:gs pos="50000">
+              <a:schemeClr val="phClr">
+                <a:shade val="100000"/>
+                <a:lumMod val="100000"/>
+                <a:satMod val="110000"/>
+              </a:schemeClr>
+            </a:gs>
+            <a:gs pos="100000">
+              <a:schemeClr val="phClr">
+                <a:shade val="78000"/>
+                <a:lumMod val="99000"/>
+                <a:satMod val="120000"/>
+              </a:schemeClr>
+            </a:gs>
+          </a:gsLst>
+          <a:lin ang="5400000" scaled="0"/>
+        </a:gradFill>
+      </a:fillStyleLst>
+      <a:lnStyleLst>
+        <a:ln w="12700">
+          <a:solidFill>
+            <a:schemeClr val="phClr"/>
+          </a:solidFill>
+          <a:prstDash val="solid"/>
+        </a:ln>
+        <a:ln w="19050">
+          <a:solidFill>
+            <a:schemeClr val="phClr"/>
+          </a:solidFill>
+          <a:prstDash val="solid"/>
+        </a:ln>
+        <a:ln w="25400">
+          <a:solidFill>
+            <a:schemeClr val="phClr"/>
+          </a:solidFill>
+          <a:prstDash val="solid"/>
+        </a:ln>
+      </a:lnStyleLst>
+      <a:effectStyleLst>
+        <a:effectStyle>
+          <a:effectLst/>
+        </a:effectStyle>
+        <a:effectStyle>
+          <a:effectLst/>
+        </a:effectStyle>
+        <a:effectStyle>
+          <a:effectLst>
+            <a:outerShdw blurRad="57150" dist="19050" dir="5400000">
+              <a:srgbClr val="000000">
+                <a:alpha val="16000"/>
+              </a:srgbClr>
+            </a:outerShdw>
+          </a:effectLst>
+        </a:effectStyle>
+        <a:effectStyle>
+          <a:effectLst>
+            <a:outerShdw blurRad="19050" dist="9525" dir="5400000">
+              <a:srgbClr val="000000">
+                <a:alpha val="6000"/>
+              </a:srgbClr>
+            </a:outerShdw>
+          </a:effectLst>
+        </a:effectStyle>
+        <a:effectStyle>
+          <a:effectLst>
+            <a:outerShdw blurRad="28575" dist="9525" dir="5400000">
+              <a:srgbClr val="000000">
+                <a:alpha val="8000"/>
+              </a:srgbClr>
+            </a:outerShdw>
+          </a:effectLst>
+        </a:effectStyle>
+        <a:effectStyle>
+          <a:effectLst>
+            <a:outerShdw blurRad="57150" dist="19050" dir="5400000">
+              <a:srgbClr val="000000">
+                <a:alpha val="10000"/>
+              </a:srgbClr>
+            </a:outerShdw>
+          </a:effectLst>
+        </a:effectStyle>
+        <a:effectStyle>
+          <a:effectLst>
+            <a:outerShdw blurRad="114300" dist="38100" dir="5400000">
+              <a:srgbClr val="000000">
+                <a:alpha val="12000"/>
+              </a:srgbClr>
+            </a:outerShdw>
+          </a:effectLst>
+        </a:effectStyle>
+        <a:effectStyle>
+          <a:effectLst>
+            <a:outerShdw blurRad="171450" dist="57150" dir="5400000">
+              <a:srgbClr val="000000">
+                <a:alpha val="16000"/>
+              </a:srgbClr>
+            </a:outerShdw>
+          </a:effectLst>
+        </a:effectStyle>
+        <a:effectStyle>
+          <a:effectLst>
+            <a:outerShdw blurRad="266700" dist="95250" dir="5400000">
+              <a:srgbClr val="000000">
+                <a:alpha val="24000"/>
+              </a:srgbClr>
+            </a:outerShdw>
+          </a:effectLst>
+        </a:effectStyle>
+      </a:effectStyleLst>
+      <a:bgFillStyleLst>
+        <a:solidFill>
+          <a:schemeClr val="phClr"/>
+        </a:solidFill>
+        <a:solidFill>
+          <a:schemeClr val="phClr">
+            <a:tint val="95000"/>
+            <a:satMod val="170000"/>
+          </a:schemeClr>
+        </a:solidFill>
+        <a:gradFill>
+          <a:gsLst>
+            <a:gs pos="0">
+              <a:schemeClr val="phClr">
+                <a:tint val="93000"/>
+                <a:shade val="98000"/>
+                <a:lumMod val="102000"/>
+                <a:satMod val="150000"/>
+              </a:schemeClr>
+            </a:gs>
+            <a:gs pos="50000">
+              <a:schemeClr val="phClr">
+                <a:tint val="98000"/>
+                <a:shade val="90000"/>
+                <a:lumMod val="103000"/>
+                <a:satMod val="130000"/>
+              </a:schemeClr>
+            </a:gs>
+            <a:gs pos="100000">
+              <a:schemeClr val="phClr">
+                <a:shade val="63000"/>
+                <a:satMod val="120000"/>
+              </a:schemeClr>
+            </a:gs>
+          </a:gsLst>
+          <a:lin ang="5400000" scaled="0"/>
+        </a:gradFill>
+      </a:bgFillStyleLst>
+    </a:fmtScheme>
+  </a:themeElements>
+  <a:objectDefaults/>
+  <a:extraClrSchemeLst/>
 </a:theme>
 </file>